--- a/docs/content/05-teaching-resources/slides/core/19-threat-mitigation-cia-and-iaaa.pptx
+++ b/docs/content/05-teaching-resources/slides/core/19-threat-mitigation-cia-and-iaaa.pptx
@@ -10,11 +10,17 @@
     <p:sldId id="258" r:id="rId9"/>
     <p:sldId id="259" r:id="rId10"/>
     <p:sldId id="260" r:id="rId11"/>
-    <p:sldId id="261" r:id="rId12"/>
-    <p:sldId id="262" r:id="rId13"/>
+    <p:sldId id="261" r:id="rId13"/>
+    <p:sldId id="262" r:id="rId14"/>
     <p:sldId id="263" r:id="rId15"/>
     <p:sldId id="264" r:id="rId16"/>
     <p:sldId id="265" r:id="rId17"/>
+    <p:sldId id="266" r:id="rId18"/>
+    <p:sldId id="267" r:id="rId19"/>
+    <p:sldId id="268" r:id="rId20"/>
+    <p:sldId id="269" r:id="rId21"/>
+    <p:sldId id="270" r:id="rId22"/>
+    <p:sldId id="271" r:id="rId23"/>
   </p:sldIdLst>
   <p:sldSz cx="12191695" cy="6858000" type="screen4x3"/>
   <p:notesSz cx="6858000" cy="9144000"/>
@@ -511,7 +517,22 @@
           <a:lstStyle/>
           <a:p>
             <a:r>
-              <a:t>Give students a few minutes to answer on mini whiteboards or paper, then reveal the answers on the next slide.</a:t>
+              <a:t>Answers:</a:t>
+            </a:r>
+          </a:p>
+          <a:p>
+            <a:r>
+              <a:t>1. Hashing.</a:t>
+            </a:r>
+          </a:p>
+          <a:p>
+            <a:r>
+              <a:t>2. Authorised testing to find weaknesses.</a:t>
+            </a:r>
+          </a:p>
+          <a:p>
+            <a:r>
+              <a:t>3. A stolen password alone isn't enough to log in.</a:t>
             </a:r>
           </a:p>
         </p:txBody>
@@ -581,7 +602,22 @@
           <a:lstStyle/>
           <a:p>
             <a:r>
-              <a:t>Talk through any answers the class found difficult.</a:t>
+              <a:t>Answers:</a:t>
+            </a:r>
+          </a:p>
+          <a:p>
+            <a:r>
+              <a:t>1. Availability.</a:t>
+            </a:r>
+          </a:p>
+          <a:p>
+            <a:r>
+              <a:t>2. Data hasn't been tampered with.</a:t>
+            </a:r>
+          </a:p>
+          <a:p>
+            <a:r>
+              <a:t>3. Access control and encryption.</a:t>
             </a:r>
           </a:p>
         </p:txBody>
@@ -607,6 +643,231 @@
 </file>
 
 <file path=ppt/notesSlides/notesSlide3.xml><?xml version="1.0" encoding="utf-8"?>
+<p:notes xmlns:a="http://schemas.openxmlformats.org/drawingml/2006/main" xmlns:p="http://schemas.openxmlformats.org/presentationml/2006/main" xmlns:r="http://schemas.openxmlformats.org/officeDocument/2006/relationships">
+  <p:cSld>
+    <p:spTree>
+      <p:nvGrpSpPr>
+        <p:cNvPr id="1" name=""/>
+        <p:cNvGrpSpPr/>
+        <p:nvPr/>
+      </p:nvGrpSpPr>
+      <p:grpSpPr>
+        <a:xfrm>
+          <a:off x="0" y="0"/>
+          <a:ext cx="0" cy="0"/>
+          <a:chOff x="0" y="0"/>
+          <a:chExt cx="0" cy="0"/>
+        </a:xfrm>
+      </p:grpSpPr>
+      <p:sp>
+        <p:nvSpPr>
+          <p:cNvPr id="2" name="Slide Image Placeholder 1"/>
+          <p:cNvSpPr>
+            <a:spLocks noGrp="1"/>
+          </p:cNvSpPr>
+          <p:nvPr>
+            <p:ph type="sldImg" idx="2"/>
+          </p:nvPr>
+        </p:nvSpPr>
+        <p:spPr/>
+      </p:sp>
+      <p:sp>
+        <p:nvSpPr>
+          <p:cNvPr id="3" name="Notes Placeholder 2"/>
+          <p:cNvSpPr>
+            <a:spLocks noGrp="1"/>
+          </p:cNvSpPr>
+          <p:nvPr>
+            <p:ph type="body" idx="3" sz="quarter"/>
+          </p:nvPr>
+        </p:nvSpPr>
+        <p:spPr/>
+        <p:txBody>
+          <a:bodyPr/>
+          <a:lstStyle/>
+          <a:p>
+            <a:r>
+              <a:t>Answers:</a:t>
+            </a:r>
+          </a:p>
+          <a:p>
+            <a:r>
+              <a:t>1. Authentication.</a:t>
+            </a:r>
+          </a:p>
+          <a:p>
+            <a:r>
+              <a:t>2. Authorisation.</a:t>
+            </a:r>
+          </a:p>
+          <a:p>
+            <a:r>
+              <a:t>3. Audit logs.</a:t>
+            </a:r>
+          </a:p>
+        </p:txBody>
+      </p:sp>
+      <p:sp>
+        <p:nvSpPr>
+          <p:cNvPr id="4" name="Slide Number Placeholder 3"/>
+          <p:cNvSpPr>
+            <a:spLocks noGrp="1"/>
+          </p:cNvSpPr>
+          <p:nvPr>
+            <p:ph type="sldNum" idx="5" sz="quarter"/>
+          </p:nvPr>
+        </p:nvSpPr>
+        <p:spPr/>
+      </p:sp>
+    </p:spTree>
+  </p:cSld>
+  <p:clrMapOvr>
+    <a:masterClrMapping/>
+  </p:clrMapOvr>
+</p:notes>
+</file>
+
+<file path=ppt/notesSlides/notesSlide4.xml><?xml version="1.0" encoding="utf-8"?>
+<p:notes xmlns:a="http://schemas.openxmlformats.org/drawingml/2006/main" xmlns:p="http://schemas.openxmlformats.org/presentationml/2006/main" xmlns:r="http://schemas.openxmlformats.org/officeDocument/2006/relationships">
+  <p:cSld>
+    <p:spTree>
+      <p:nvGrpSpPr>
+        <p:cNvPr id="1" name=""/>
+        <p:cNvGrpSpPr/>
+        <p:nvPr/>
+      </p:nvGrpSpPr>
+      <p:grpSpPr>
+        <a:xfrm>
+          <a:off x="0" y="0"/>
+          <a:ext cx="0" cy="0"/>
+          <a:chOff x="0" y="0"/>
+          <a:chExt cx="0" cy="0"/>
+        </a:xfrm>
+      </p:grpSpPr>
+      <p:sp>
+        <p:nvSpPr>
+          <p:cNvPr id="2" name="Slide Image Placeholder 1"/>
+          <p:cNvSpPr>
+            <a:spLocks noGrp="1"/>
+          </p:cNvSpPr>
+          <p:nvPr>
+            <p:ph type="sldImg" idx="2"/>
+          </p:nvPr>
+        </p:nvSpPr>
+        <p:spPr/>
+      </p:sp>
+      <p:sp>
+        <p:nvSpPr>
+          <p:cNvPr id="3" name="Notes Placeholder 2"/>
+          <p:cNvSpPr>
+            <a:spLocks noGrp="1"/>
+          </p:cNvSpPr>
+          <p:nvPr>
+            <p:ph type="body" idx="3" sz="quarter"/>
+          </p:nvPr>
+        </p:nvSpPr>
+        <p:spPr/>
+        <p:txBody>
+          <a:bodyPr/>
+          <a:lstStyle/>
+          <a:p>
+            <a:r>
+              <a:t>Give students a few minutes to answer on mini whiteboards or paper, then reveal the answers on the next slide.</a:t>
+            </a:r>
+          </a:p>
+        </p:txBody>
+      </p:sp>
+      <p:sp>
+        <p:nvSpPr>
+          <p:cNvPr id="4" name="Slide Number Placeholder 3"/>
+          <p:cNvSpPr>
+            <a:spLocks noGrp="1"/>
+          </p:cNvSpPr>
+          <p:nvPr>
+            <p:ph type="sldNum" idx="5" sz="quarter"/>
+          </p:nvPr>
+        </p:nvSpPr>
+        <p:spPr/>
+      </p:sp>
+    </p:spTree>
+  </p:cSld>
+  <p:clrMapOvr>
+    <a:masterClrMapping/>
+  </p:clrMapOvr>
+</p:notes>
+</file>
+
+<file path=ppt/notesSlides/notesSlide5.xml><?xml version="1.0" encoding="utf-8"?>
+<p:notes xmlns:a="http://schemas.openxmlformats.org/drawingml/2006/main" xmlns:p="http://schemas.openxmlformats.org/presentationml/2006/main" xmlns:r="http://schemas.openxmlformats.org/officeDocument/2006/relationships">
+  <p:cSld>
+    <p:spTree>
+      <p:nvGrpSpPr>
+        <p:cNvPr id="1" name=""/>
+        <p:cNvGrpSpPr/>
+        <p:nvPr/>
+      </p:nvGrpSpPr>
+      <p:grpSpPr>
+        <a:xfrm>
+          <a:off x="0" y="0"/>
+          <a:ext cx="0" cy="0"/>
+          <a:chOff x="0" y="0"/>
+          <a:chExt cx="0" cy="0"/>
+        </a:xfrm>
+      </p:grpSpPr>
+      <p:sp>
+        <p:nvSpPr>
+          <p:cNvPr id="2" name="Slide Image Placeholder 1"/>
+          <p:cNvSpPr>
+            <a:spLocks noGrp="1"/>
+          </p:cNvSpPr>
+          <p:nvPr>
+            <p:ph type="sldImg" idx="2"/>
+          </p:nvPr>
+        </p:nvSpPr>
+        <p:spPr/>
+      </p:sp>
+      <p:sp>
+        <p:nvSpPr>
+          <p:cNvPr id="3" name="Notes Placeholder 2"/>
+          <p:cNvSpPr>
+            <a:spLocks noGrp="1"/>
+          </p:cNvSpPr>
+          <p:nvPr>
+            <p:ph type="body" idx="3" sz="quarter"/>
+          </p:nvPr>
+        </p:nvSpPr>
+        <p:spPr/>
+        <p:txBody>
+          <a:bodyPr/>
+          <a:lstStyle/>
+          <a:p>
+            <a:r>
+              <a:t>Talk through any answers the class found difficult.</a:t>
+            </a:r>
+          </a:p>
+        </p:txBody>
+      </p:sp>
+      <p:sp>
+        <p:nvSpPr>
+          <p:cNvPr id="4" name="Slide Number Placeholder 3"/>
+          <p:cNvSpPr>
+            <a:spLocks noGrp="1"/>
+          </p:cNvSpPr>
+          <p:nvPr>
+            <p:ph type="sldNum" idx="5" sz="quarter"/>
+          </p:nvPr>
+        </p:nvSpPr>
+        <p:spPr/>
+      </p:sp>
+    </p:spTree>
+  </p:cSld>
+  <p:clrMapOvr>
+    <a:masterClrMapping/>
+  </p:clrMapOvr>
+</p:notes>
+</file>
+
+<file path=ppt/notesSlides/notesSlide6.xml><?xml version="1.0" encoding="utf-8"?>
 <p:notes xmlns:a="http://schemas.openxmlformats.org/drawingml/2006/main" xmlns:p="http://schemas.openxmlformats.org/presentationml/2006/main" xmlns:r="http://schemas.openxmlformats.org/officeDocument/2006/relationships">
   <p:cSld>
     <p:spTree>
@@ -3982,6 +4243,3531 @@
     <p:bg>
       <p:bgPr>
         <a:solidFill>
+          <a:srgbClr val="FFFFFF"/>
+        </a:solidFill>
+        <a:effectLst/>
+      </p:bgPr>
+    </p:bg>
+    <p:spTree>
+      <p:nvGrpSpPr>
+        <p:cNvPr id="1" name=""/>
+        <p:cNvGrpSpPr/>
+        <p:nvPr/>
+      </p:nvGrpSpPr>
+      <p:grpSpPr/>
+      <p:sp>
+        <p:nvSpPr>
+          <p:cNvPr id="2" name="TextBox 1"/>
+          <p:cNvSpPr txBox="1"/>
+          <p:nvPr/>
+        </p:nvSpPr>
+        <p:spPr>
+          <a:xfrm>
+            <a:off x="548640" y="320040"/>
+            <a:ext cx="11094415" cy="274320"/>
+          </a:xfrm>
+          <a:prstGeom prst="rect">
+            <a:avLst/>
+          </a:prstGeom>
+          <a:noFill/>
+        </p:spPr>
+        <p:txBody>
+          <a:bodyPr wrap="square" anchor="t" lIns="0" rIns="0" tIns="0" bIns="0"/>
+          <a:lstStyle/>
+          <a:p>
+            <a:pPr algn="l"/>
+            <a:r>
+              <a:rPr sz="1100" b="1" i="0">
+                <a:solidFill>
+                  <a:srgbClr val="54595D"/>
+                </a:solidFill>
+                <a:latin typeface="Calibri"/>
+              </a:rPr>
+              <a:t>CORE COMPONENT  ·  Core Paper 2</a:t>
+            </a:r>
+          </a:p>
+        </p:txBody>
+      </p:sp>
+      <p:sp>
+        <p:nvSpPr>
+          <p:cNvPr id="3" name="TextBox 2"/>
+          <p:cNvSpPr txBox="1"/>
+          <p:nvPr/>
+        </p:nvSpPr>
+        <p:spPr>
+          <a:xfrm>
+            <a:off x="548640" y="566928"/>
+            <a:ext cx="11094415" cy="822960"/>
+          </a:xfrm>
+          <a:prstGeom prst="rect">
+            <a:avLst/>
+          </a:prstGeom>
+          <a:noFill/>
+        </p:spPr>
+        <p:txBody>
+          <a:bodyPr wrap="square" anchor="ctr" lIns="0" rIns="0" tIns="0" bIns="0"/>
+          <a:lstStyle/>
+          <a:p>
+            <a:pPr algn="l"/>
+            <a:r>
+              <a:rPr sz="3200" b="1" i="0">
+                <a:solidFill>
+                  <a:srgbClr val="03306E"/>
+                </a:solidFill>
+                <a:latin typeface="Cambria"/>
+              </a:rPr>
+              <a:t>The IAAA model</a:t>
+            </a:r>
+          </a:p>
+        </p:txBody>
+      </p:sp>
+      <p:sp>
+        <p:nvSpPr>
+          <p:cNvPr id="4" name="TextBox 3"/>
+          <p:cNvSpPr txBox="1"/>
+          <p:nvPr/>
+        </p:nvSpPr>
+        <p:spPr>
+          <a:xfrm>
+            <a:off x="548640" y="6446520"/>
+            <a:ext cx="8229600" cy="274320"/>
+          </a:xfrm>
+          <a:prstGeom prst="rect">
+            <a:avLst/>
+          </a:prstGeom>
+          <a:noFill/>
+        </p:spPr>
+        <p:txBody>
+          <a:bodyPr wrap="square" anchor="t" lIns="0" rIns="0" tIns="0" bIns="0"/>
+          <a:lstStyle/>
+          <a:p>
+            <a:pPr algn="l"/>
+            <a:r>
+              <a:rPr sz="1000" b="0" i="0">
+                <a:solidFill>
+                  <a:srgbClr val="54595D"/>
+                </a:solidFill>
+                <a:latin typeface="Calibri"/>
+              </a:rPr>
+              <a:t>Digital Software Development T Level  ·  Threat Mitigation, the CIA Triad and IAAA</a:t>
+            </a:r>
+          </a:p>
+        </p:txBody>
+      </p:sp>
+      <p:sp>
+        <p:nvSpPr>
+          <p:cNvPr id="5" name="TextBox 4"/>
+          <p:cNvSpPr txBox="1"/>
+          <p:nvPr/>
+        </p:nvSpPr>
+        <p:spPr>
+          <a:xfrm>
+            <a:off x="10728655" y="6446520"/>
+            <a:ext cx="914400" cy="274320"/>
+          </a:xfrm>
+          <a:prstGeom prst="rect">
+            <a:avLst/>
+          </a:prstGeom>
+          <a:noFill/>
+        </p:spPr>
+        <p:txBody>
+          <a:bodyPr wrap="square" anchor="t" lIns="0" rIns="0" tIns="0" bIns="0"/>
+          <a:lstStyle/>
+          <a:p>
+            <a:pPr algn="r"/>
+            <a:r>
+              <a:rPr sz="1000" b="0" i="0">
+                <a:solidFill>
+                  <a:srgbClr val="54595D"/>
+                </a:solidFill>
+                <a:latin typeface="Calibri"/>
+              </a:rPr>
+              <a:t>10</a:t>
+            </a:r>
+          </a:p>
+        </p:txBody>
+      </p:sp>
+      <p:sp>
+        <p:nvSpPr>
+          <p:cNvPr id="6" name="TextBox 5"/>
+          <p:cNvSpPr txBox="1"/>
+          <p:nvPr/>
+        </p:nvSpPr>
+        <p:spPr>
+          <a:xfrm>
+            <a:off x="548640" y="1554480"/>
+            <a:ext cx="6720840" cy="4617720"/>
+          </a:xfrm>
+          <a:prstGeom prst="rect">
+            <a:avLst/>
+          </a:prstGeom>
+          <a:noFill/>
+        </p:spPr>
+        <p:txBody>
+          <a:bodyPr wrap="square" lIns="0" rIns="0" tIns="0" bIns="0">
+            <a:spAutoFit/>
+          </a:bodyPr>
+          <a:lstStyle/>
+          <a:p>
+            <a:pPr>
+              <a:spcAft>
+                <a:spcPts val="1320"/>
+              </a:spcAft>
+            </a:pPr>
+            <a:r>
+              <a:rPr sz="2200" b="0">
+                <a:solidFill>
+                  <a:srgbClr val="202122"/>
+                </a:solidFill>
+                <a:latin typeface="Calibri"/>
+              </a:rPr>
+              <a:t>IAAA is how systems control users.</a:t>
+            </a:r>
+          </a:p>
+          <a:p>
+            <a:pPr>
+              <a:spcAft>
+                <a:spcPts val="1320"/>
+              </a:spcAft>
+            </a:pPr>
+            <a:r>
+              <a:rPr sz="2200" b="1">
+                <a:solidFill>
+                  <a:srgbClr val="202122"/>
+                </a:solidFill>
+                <a:latin typeface="Calibri"/>
+              </a:rPr>
+              <a:t>Identification:</a:t>
+            </a:r>
+            <a:r>
+              <a:rPr sz="2200" b="0">
+                <a:solidFill>
+                  <a:srgbClr val="202122"/>
+                </a:solidFill>
+                <a:latin typeface="Calibri"/>
+              </a:rPr>
+              <a:t> the user claims an identity, such as a username. Authentication: the system checks it, with a password, biometrics or MFA. Authorisation: the system decides what the user may do, using roles or access control lists. Accountability: actions are logged so they can be traced to the user.</a:t>
+            </a:r>
+          </a:p>
+          <a:p>
+            <a:pPr>
+              <a:spcAft>
+                <a:spcPts val="1320"/>
+              </a:spcAft>
+            </a:pPr>
+            <a:r>
+              <a:rPr sz="2200" b="0">
+                <a:solidFill>
+                  <a:srgbClr val="202122"/>
+                </a:solidFill>
+                <a:latin typeface="Calibri"/>
+              </a:rPr>
+              <a:t>As a developer you build all four into your app's account system.</a:t>
+            </a:r>
+          </a:p>
+        </p:txBody>
+      </p:sp>
+      <p:sp>
+        <p:nvSpPr>
+          <p:cNvPr id="7" name="Rounded Rectangle 6"/>
+          <p:cNvSpPr/>
+          <p:nvPr/>
+        </p:nvSpPr>
+        <p:spPr>
+          <a:xfrm>
+            <a:off x="7772400" y="1554480"/>
+            <a:ext cx="3867912" cy="4526280"/>
+          </a:xfrm>
+          <a:prstGeom prst="roundRect">
+            <a:avLst>
+              <a:gd name="adj" fmla="val 8000"/>
+            </a:avLst>
+          </a:prstGeom>
+          <a:solidFill>
+            <a:srgbClr val="03306E"/>
+          </a:solidFill>
+          <a:ln>
+            <a:noFill/>
+          </a:ln>
+          <a:effectLst/>
+        </p:spPr>
+        <p:style>
+          <a:lnRef idx="1">
+            <a:schemeClr val="accent1"/>
+          </a:lnRef>
+          <a:fillRef idx="3">
+            <a:schemeClr val="accent1"/>
+          </a:fillRef>
+          <a:effectRef idx="2">
+            <a:schemeClr val="accent1"/>
+          </a:effectRef>
+          <a:fontRef idx="minor">
+            <a:schemeClr val="lt1"/>
+          </a:fontRef>
+        </p:style>
+        <p:txBody>
+          <a:bodyPr rtlCol="0" anchor="ctr"/>
+          <a:lstStyle/>
+          <a:p/>
+        </p:txBody>
+      </p:sp>
+      <p:sp>
+        <p:nvSpPr>
+          <p:cNvPr id="8" name="Oval 7"/>
+          <p:cNvSpPr/>
+          <p:nvPr/>
+        </p:nvSpPr>
+        <p:spPr>
+          <a:xfrm>
+            <a:off x="8046720" y="1828800"/>
+            <a:ext cx="548640" cy="548640"/>
+          </a:xfrm>
+          <a:prstGeom prst="ellipse">
+            <a:avLst/>
+          </a:prstGeom>
+          <a:solidFill>
+            <a:srgbClr val="F2B705"/>
+          </a:solidFill>
+          <a:ln>
+            <a:noFill/>
+          </a:ln>
+          <a:effectLst/>
+        </p:spPr>
+        <p:style>
+          <a:lnRef idx="1">
+            <a:schemeClr val="accent1"/>
+          </a:lnRef>
+          <a:fillRef idx="3">
+            <a:schemeClr val="accent1"/>
+          </a:fillRef>
+          <a:effectRef idx="2">
+            <a:schemeClr val="accent1"/>
+          </a:effectRef>
+          <a:fontRef idx="minor">
+            <a:schemeClr val="lt1"/>
+          </a:fontRef>
+        </p:style>
+        <p:txBody>
+          <a:bodyPr rtlCol="0" anchor="ctr" lIns="0" rIns="0" tIns="0" bIns="0"/>
+          <a:lstStyle/>
+          <a:p>
+            <a:pPr algn="ctr"/>
+            <a:r>
+              <a:rPr sz="1300" b="1">
+                <a:solidFill>
+                  <a:srgbClr val="202122"/>
+                </a:solidFill>
+                <a:latin typeface="Calibri"/>
+              </a:rPr>
+              <a:t>e.g.</a:t>
+            </a:r>
+          </a:p>
+        </p:txBody>
+      </p:sp>
+      <p:sp>
+        <p:nvSpPr>
+          <p:cNvPr id="9" name="TextBox 8"/>
+          <p:cNvSpPr txBox="1"/>
+          <p:nvPr/>
+        </p:nvSpPr>
+        <p:spPr>
+          <a:xfrm>
+            <a:off x="8046720" y="2560320"/>
+            <a:ext cx="3291840" cy="365760"/>
+          </a:xfrm>
+          <a:prstGeom prst="rect">
+            <a:avLst/>
+          </a:prstGeom>
+          <a:noFill/>
+        </p:spPr>
+        <p:txBody>
+          <a:bodyPr wrap="square" anchor="t" lIns="0" rIns="0" tIns="0" bIns="0"/>
+          <a:lstStyle/>
+          <a:p>
+            <a:pPr algn="l"/>
+            <a:r>
+              <a:rPr sz="1300" b="1" i="0">
+                <a:solidFill>
+                  <a:srgbClr val="A9C8F0"/>
+                </a:solidFill>
+                <a:latin typeface="Calibri"/>
+              </a:rPr>
+              <a:t>EXAMPLE</a:t>
+            </a:r>
+          </a:p>
+        </p:txBody>
+      </p:sp>
+      <p:sp>
+        <p:nvSpPr>
+          <p:cNvPr id="10" name="TextBox 9"/>
+          <p:cNvSpPr txBox="1"/>
+          <p:nvPr/>
+        </p:nvSpPr>
+        <p:spPr>
+          <a:xfrm>
+            <a:off x="8046720" y="2971800"/>
+            <a:ext cx="3291840" cy="2971800"/>
+          </a:xfrm>
+          <a:prstGeom prst="rect">
+            <a:avLst/>
+          </a:prstGeom>
+          <a:noFill/>
+        </p:spPr>
+        <p:txBody>
+          <a:bodyPr wrap="square" anchor="t" lIns="0" rIns="0" tIns="0" bIns="0"/>
+          <a:lstStyle/>
+          <a:p>
+            <a:pPr algn="l"/>
+            <a:r>
+              <a:rPr sz="1900" b="0" i="0">
+                <a:solidFill>
+                  <a:srgbClr val="FFFFFF"/>
+                </a:solidFill>
+                <a:latin typeface="Cambria"/>
+              </a:rPr>
+              <a:t>In a school app: username (identification), password plus code (authentication), teachers can edit marks but students can't (authorisation), every change is logged (accountability).</a:t>
+            </a:r>
+          </a:p>
+        </p:txBody>
+      </p:sp>
+    </p:spTree>
+  </p:cSld>
+  <p:clrMapOvr>
+    <a:masterClrMapping/>
+  </p:clrMapOvr>
+</p:sld>
+</file>
+
+<file path=ppt/slides/slide11.xml><?xml version="1.0" encoding="utf-8"?>
+<p:sld xmlns:a="http://schemas.openxmlformats.org/drawingml/2006/main" xmlns:p="http://schemas.openxmlformats.org/presentationml/2006/main" xmlns:r="http://schemas.openxmlformats.org/officeDocument/2006/relationships">
+  <p:cSld>
+    <p:bg>
+      <p:bgPr>
+        <a:solidFill>
+          <a:srgbClr val="FFFFFF"/>
+        </a:solidFill>
+        <a:effectLst/>
+      </p:bgPr>
+    </p:bg>
+    <p:spTree>
+      <p:nvGrpSpPr>
+        <p:cNvPr id="1" name=""/>
+        <p:cNvGrpSpPr/>
+        <p:nvPr/>
+      </p:nvGrpSpPr>
+      <p:grpSpPr/>
+      <p:sp>
+        <p:nvSpPr>
+          <p:cNvPr id="2" name="TextBox 1"/>
+          <p:cNvSpPr txBox="1"/>
+          <p:nvPr/>
+        </p:nvSpPr>
+        <p:spPr>
+          <a:xfrm>
+            <a:off x="548640" y="320040"/>
+            <a:ext cx="11094415" cy="274320"/>
+          </a:xfrm>
+          <a:prstGeom prst="rect">
+            <a:avLst/>
+          </a:prstGeom>
+          <a:noFill/>
+        </p:spPr>
+        <p:txBody>
+          <a:bodyPr wrap="square" anchor="t" lIns="0" rIns="0" tIns="0" bIns="0"/>
+          <a:lstStyle/>
+          <a:p>
+            <a:pPr algn="l"/>
+            <a:r>
+              <a:rPr sz="1100" b="1" i="0">
+                <a:solidFill>
+                  <a:srgbClr val="54595D"/>
+                </a:solidFill>
+                <a:latin typeface="Calibri"/>
+              </a:rPr>
+              <a:t>CORE COMPONENT  ·  Core Paper 2</a:t>
+            </a:r>
+          </a:p>
+        </p:txBody>
+      </p:sp>
+      <p:sp>
+        <p:nvSpPr>
+          <p:cNvPr id="3" name="TextBox 2"/>
+          <p:cNvSpPr txBox="1"/>
+          <p:nvPr/>
+        </p:nvSpPr>
+        <p:spPr>
+          <a:xfrm>
+            <a:off x="548640" y="566928"/>
+            <a:ext cx="11094415" cy="822960"/>
+          </a:xfrm>
+          <a:prstGeom prst="rect">
+            <a:avLst/>
+          </a:prstGeom>
+          <a:noFill/>
+        </p:spPr>
+        <p:txBody>
+          <a:bodyPr wrap="square" anchor="ctr" lIns="0" rIns="0" tIns="0" bIns="0"/>
+          <a:lstStyle/>
+          <a:p>
+            <a:pPr algn="l"/>
+            <a:r>
+              <a:rPr sz="3200" b="1" i="0">
+                <a:solidFill>
+                  <a:srgbClr val="03306E"/>
+                </a:solidFill>
+                <a:latin typeface="Cambria"/>
+              </a:rPr>
+              <a:t>The IAAA model</a:t>
+            </a:r>
+          </a:p>
+        </p:txBody>
+      </p:sp>
+      <p:sp>
+        <p:nvSpPr>
+          <p:cNvPr id="4" name="TextBox 3"/>
+          <p:cNvSpPr txBox="1"/>
+          <p:nvPr/>
+        </p:nvSpPr>
+        <p:spPr>
+          <a:xfrm>
+            <a:off x="548640" y="6446520"/>
+            <a:ext cx="8229600" cy="274320"/>
+          </a:xfrm>
+          <a:prstGeom prst="rect">
+            <a:avLst/>
+          </a:prstGeom>
+          <a:noFill/>
+        </p:spPr>
+        <p:txBody>
+          <a:bodyPr wrap="square" anchor="t" lIns="0" rIns="0" tIns="0" bIns="0"/>
+          <a:lstStyle/>
+          <a:p>
+            <a:pPr algn="l"/>
+            <a:r>
+              <a:rPr sz="1000" b="0" i="0">
+                <a:solidFill>
+                  <a:srgbClr val="54595D"/>
+                </a:solidFill>
+                <a:latin typeface="Calibri"/>
+              </a:rPr>
+              <a:t>Digital Software Development T Level  ·  Threat Mitigation, the CIA Triad and IAAA</a:t>
+            </a:r>
+          </a:p>
+        </p:txBody>
+      </p:sp>
+      <p:sp>
+        <p:nvSpPr>
+          <p:cNvPr id="5" name="TextBox 4"/>
+          <p:cNvSpPr txBox="1"/>
+          <p:nvPr/>
+        </p:nvSpPr>
+        <p:spPr>
+          <a:xfrm>
+            <a:off x="10728655" y="6446520"/>
+            <a:ext cx="914400" cy="274320"/>
+          </a:xfrm>
+          <a:prstGeom prst="rect">
+            <a:avLst/>
+          </a:prstGeom>
+          <a:noFill/>
+        </p:spPr>
+        <p:txBody>
+          <a:bodyPr wrap="square" anchor="t" lIns="0" rIns="0" tIns="0" bIns="0"/>
+          <a:lstStyle/>
+          <a:p>
+            <a:pPr algn="r"/>
+            <a:r>
+              <a:rPr sz="1000" b="0" i="0">
+                <a:solidFill>
+                  <a:srgbClr val="54595D"/>
+                </a:solidFill>
+                <a:latin typeface="Calibri"/>
+              </a:rPr>
+              <a:t>11</a:t>
+            </a:r>
+          </a:p>
+        </p:txBody>
+      </p:sp>
+      <p:sp>
+        <p:nvSpPr>
+          <p:cNvPr id="6" name="Rectangle 5"/>
+          <p:cNvSpPr/>
+          <p:nvPr/>
+        </p:nvSpPr>
+        <p:spPr>
+          <a:xfrm>
+            <a:off x="1884006" y="2793492"/>
+            <a:ext cx="8423681" cy="36576"/>
+          </a:xfrm>
+          <a:prstGeom prst="rect">
+            <a:avLst/>
+          </a:prstGeom>
+          <a:solidFill>
+            <a:srgbClr val="A9C8F0"/>
+          </a:solidFill>
+          <a:ln>
+            <a:noFill/>
+          </a:ln>
+          <a:effectLst/>
+        </p:spPr>
+        <p:style>
+          <a:lnRef idx="1">
+            <a:schemeClr val="accent1"/>
+          </a:lnRef>
+          <a:fillRef idx="3">
+            <a:schemeClr val="accent1"/>
+          </a:fillRef>
+          <a:effectRef idx="2">
+            <a:schemeClr val="accent1"/>
+          </a:effectRef>
+          <a:fontRef idx="minor">
+            <a:schemeClr val="lt1"/>
+          </a:fontRef>
+        </p:style>
+        <p:txBody>
+          <a:bodyPr rtlCol="0" anchor="ctr"/>
+          <a:lstStyle/>
+          <a:p/>
+        </p:txBody>
+      </p:sp>
+      <p:sp>
+        <p:nvSpPr>
+          <p:cNvPr id="7" name="Oval 6"/>
+          <p:cNvSpPr/>
+          <p:nvPr/>
+        </p:nvSpPr>
+        <p:spPr>
+          <a:xfrm>
+            <a:off x="1563966" y="2491740"/>
+            <a:ext cx="640080" cy="640080"/>
+          </a:xfrm>
+          <a:prstGeom prst="ellipse">
+            <a:avLst/>
+          </a:prstGeom>
+          <a:solidFill>
+            <a:srgbClr val="F2B705"/>
+          </a:solidFill>
+          <a:ln>
+            <a:noFill/>
+          </a:ln>
+          <a:effectLst/>
+        </p:spPr>
+        <p:style>
+          <a:lnRef idx="1">
+            <a:schemeClr val="accent1"/>
+          </a:lnRef>
+          <a:fillRef idx="3">
+            <a:schemeClr val="accent1"/>
+          </a:fillRef>
+          <a:effectRef idx="2">
+            <a:schemeClr val="accent1"/>
+          </a:effectRef>
+          <a:fontRef idx="minor">
+            <a:schemeClr val="lt1"/>
+          </a:fontRef>
+        </p:style>
+        <p:txBody>
+          <a:bodyPr rtlCol="0" anchor="ctr" lIns="0" rIns="0" tIns="0" bIns="0"/>
+          <a:lstStyle/>
+          <a:p>
+            <a:pPr algn="ctr"/>
+            <a:r>
+              <a:rPr sz="2000" b="1">
+                <a:solidFill>
+                  <a:srgbClr val="202122"/>
+                </a:solidFill>
+                <a:latin typeface="Calibri"/>
+              </a:rPr>
+              <a:t>1</a:t>
+            </a:r>
+          </a:p>
+        </p:txBody>
+      </p:sp>
+      <p:sp>
+        <p:nvSpPr>
+          <p:cNvPr id="8" name="TextBox 7"/>
+          <p:cNvSpPr txBox="1"/>
+          <p:nvPr/>
+        </p:nvSpPr>
+        <p:spPr>
+          <a:xfrm>
+            <a:off x="548640" y="3268979"/>
+            <a:ext cx="2670733" cy="731520"/>
+          </a:xfrm>
+          <a:prstGeom prst="rect">
+            <a:avLst/>
+          </a:prstGeom>
+          <a:noFill/>
+        </p:spPr>
+        <p:txBody>
+          <a:bodyPr wrap="square" anchor="t" lIns="0" rIns="0" tIns="0" bIns="0"/>
+          <a:lstStyle/>
+          <a:p>
+            <a:pPr algn="ctr"/>
+            <a:r>
+              <a:rPr sz="1700" b="1" i="0">
+                <a:solidFill>
+                  <a:srgbClr val="03306E"/>
+                </a:solidFill>
+                <a:latin typeface="Calibri"/>
+              </a:rPr>
+              <a:t>Identification</a:t>
+            </a:r>
+          </a:p>
+        </p:txBody>
+      </p:sp>
+      <p:sp>
+        <p:nvSpPr>
+          <p:cNvPr id="9" name="Rounded Rectangle 8"/>
+          <p:cNvSpPr/>
+          <p:nvPr/>
+        </p:nvSpPr>
+        <p:spPr>
+          <a:xfrm>
+            <a:off x="548640" y="4046220"/>
+            <a:ext cx="2670733" cy="1234439"/>
+          </a:xfrm>
+          <a:prstGeom prst="roundRect">
+            <a:avLst>
+              <a:gd name="adj" fmla="val 6000"/>
+            </a:avLst>
+          </a:prstGeom>
+          <a:solidFill>
+            <a:srgbClr val="EAF3FF"/>
+          </a:solidFill>
+          <a:ln>
+            <a:noFill/>
+          </a:ln>
+          <a:effectLst/>
+        </p:spPr>
+        <p:style>
+          <a:lnRef idx="1">
+            <a:schemeClr val="accent1"/>
+          </a:lnRef>
+          <a:fillRef idx="3">
+            <a:schemeClr val="accent1"/>
+          </a:fillRef>
+          <a:effectRef idx="2">
+            <a:schemeClr val="accent1"/>
+          </a:effectRef>
+          <a:fontRef idx="minor">
+            <a:schemeClr val="lt1"/>
+          </a:fontRef>
+        </p:style>
+        <p:txBody>
+          <a:bodyPr rtlCol="0" anchor="ctr"/>
+          <a:lstStyle/>
+          <a:p/>
+        </p:txBody>
+      </p:sp>
+      <p:sp>
+        <p:nvSpPr>
+          <p:cNvPr id="10" name="TextBox 9"/>
+          <p:cNvSpPr txBox="1"/>
+          <p:nvPr/>
+        </p:nvSpPr>
+        <p:spPr>
+          <a:xfrm>
+            <a:off x="685800" y="4183380"/>
+            <a:ext cx="2396413" cy="960119"/>
+          </a:xfrm>
+          <a:prstGeom prst="rect">
+            <a:avLst/>
+          </a:prstGeom>
+          <a:noFill/>
+        </p:spPr>
+        <p:txBody>
+          <a:bodyPr wrap="square" anchor="t" lIns="0" rIns="0" tIns="0" bIns="0"/>
+          <a:lstStyle/>
+          <a:p>
+            <a:pPr algn="l"/>
+            <a:r>
+              <a:rPr sz="1800" b="0" i="0">
+                <a:solidFill>
+                  <a:srgbClr val="202122"/>
+                </a:solidFill>
+                <a:latin typeface="Calibri"/>
+              </a:rPr>
+              <a:t>Who are you? Username, card or biometric.</a:t>
+            </a:r>
+          </a:p>
+        </p:txBody>
+      </p:sp>
+      <p:sp>
+        <p:nvSpPr>
+          <p:cNvPr id="11" name="Oval 10"/>
+          <p:cNvSpPr/>
+          <p:nvPr/>
+        </p:nvSpPr>
+        <p:spPr>
+          <a:xfrm>
+            <a:off x="4371860" y="2491740"/>
+            <a:ext cx="640080" cy="640080"/>
+          </a:xfrm>
+          <a:prstGeom prst="ellipse">
+            <a:avLst/>
+          </a:prstGeom>
+          <a:solidFill>
+            <a:srgbClr val="F2B705"/>
+          </a:solidFill>
+          <a:ln>
+            <a:noFill/>
+          </a:ln>
+          <a:effectLst/>
+        </p:spPr>
+        <p:style>
+          <a:lnRef idx="1">
+            <a:schemeClr val="accent1"/>
+          </a:lnRef>
+          <a:fillRef idx="3">
+            <a:schemeClr val="accent1"/>
+          </a:fillRef>
+          <a:effectRef idx="2">
+            <a:schemeClr val="accent1"/>
+          </a:effectRef>
+          <a:fontRef idx="minor">
+            <a:schemeClr val="lt1"/>
+          </a:fontRef>
+        </p:style>
+        <p:txBody>
+          <a:bodyPr rtlCol="0" anchor="ctr" lIns="0" rIns="0" tIns="0" bIns="0"/>
+          <a:lstStyle/>
+          <a:p>
+            <a:pPr algn="ctr"/>
+            <a:r>
+              <a:rPr sz="2000" b="1">
+                <a:solidFill>
+                  <a:srgbClr val="202122"/>
+                </a:solidFill>
+                <a:latin typeface="Calibri"/>
+              </a:rPr>
+              <a:t>2</a:t>
+            </a:r>
+          </a:p>
+        </p:txBody>
+      </p:sp>
+      <p:sp>
+        <p:nvSpPr>
+          <p:cNvPr id="12" name="TextBox 11"/>
+          <p:cNvSpPr txBox="1"/>
+          <p:nvPr/>
+        </p:nvSpPr>
+        <p:spPr>
+          <a:xfrm>
+            <a:off x="3356533" y="3268979"/>
+            <a:ext cx="2670733" cy="731520"/>
+          </a:xfrm>
+          <a:prstGeom prst="rect">
+            <a:avLst/>
+          </a:prstGeom>
+          <a:noFill/>
+        </p:spPr>
+        <p:txBody>
+          <a:bodyPr wrap="square" anchor="t" lIns="0" rIns="0" tIns="0" bIns="0"/>
+          <a:lstStyle/>
+          <a:p>
+            <a:pPr algn="ctr"/>
+            <a:r>
+              <a:rPr sz="1700" b="1" i="0">
+                <a:solidFill>
+                  <a:srgbClr val="03306E"/>
+                </a:solidFill>
+                <a:latin typeface="Calibri"/>
+              </a:rPr>
+              <a:t>Authentication</a:t>
+            </a:r>
+          </a:p>
+        </p:txBody>
+      </p:sp>
+      <p:sp>
+        <p:nvSpPr>
+          <p:cNvPr id="13" name="Rounded Rectangle 12"/>
+          <p:cNvSpPr/>
+          <p:nvPr/>
+        </p:nvSpPr>
+        <p:spPr>
+          <a:xfrm>
+            <a:off x="3356533" y="4046220"/>
+            <a:ext cx="2670733" cy="1234439"/>
+          </a:xfrm>
+          <a:prstGeom prst="roundRect">
+            <a:avLst>
+              <a:gd name="adj" fmla="val 6000"/>
+            </a:avLst>
+          </a:prstGeom>
+          <a:solidFill>
+            <a:srgbClr val="EAF3FF"/>
+          </a:solidFill>
+          <a:ln>
+            <a:noFill/>
+          </a:ln>
+          <a:effectLst/>
+        </p:spPr>
+        <p:style>
+          <a:lnRef idx="1">
+            <a:schemeClr val="accent1"/>
+          </a:lnRef>
+          <a:fillRef idx="3">
+            <a:schemeClr val="accent1"/>
+          </a:fillRef>
+          <a:effectRef idx="2">
+            <a:schemeClr val="accent1"/>
+          </a:effectRef>
+          <a:fontRef idx="minor">
+            <a:schemeClr val="lt1"/>
+          </a:fontRef>
+        </p:style>
+        <p:txBody>
+          <a:bodyPr rtlCol="0" anchor="ctr"/>
+          <a:lstStyle/>
+          <a:p/>
+        </p:txBody>
+      </p:sp>
+      <p:sp>
+        <p:nvSpPr>
+          <p:cNvPr id="14" name="TextBox 13"/>
+          <p:cNvSpPr txBox="1"/>
+          <p:nvPr/>
+        </p:nvSpPr>
+        <p:spPr>
+          <a:xfrm>
+            <a:off x="3493693" y="4183380"/>
+            <a:ext cx="2396413" cy="960119"/>
+          </a:xfrm>
+          <a:prstGeom prst="rect">
+            <a:avLst/>
+          </a:prstGeom>
+          <a:noFill/>
+        </p:spPr>
+        <p:txBody>
+          <a:bodyPr wrap="square" anchor="t" lIns="0" rIns="0" tIns="0" bIns="0"/>
+          <a:lstStyle/>
+          <a:p>
+            <a:pPr algn="l"/>
+            <a:r>
+              <a:rPr sz="1800" b="0" i="0">
+                <a:solidFill>
+                  <a:srgbClr val="202122"/>
+                </a:solidFill>
+                <a:latin typeface="Calibri"/>
+              </a:rPr>
+              <a:t>Prove it: password, MFA, biometrics.</a:t>
+            </a:r>
+          </a:p>
+        </p:txBody>
+      </p:sp>
+      <p:sp>
+        <p:nvSpPr>
+          <p:cNvPr id="15" name="Oval 14"/>
+          <p:cNvSpPr/>
+          <p:nvPr/>
+        </p:nvSpPr>
+        <p:spPr>
+          <a:xfrm>
+            <a:off x="7179754" y="2491740"/>
+            <a:ext cx="640080" cy="640080"/>
+          </a:xfrm>
+          <a:prstGeom prst="ellipse">
+            <a:avLst/>
+          </a:prstGeom>
+          <a:solidFill>
+            <a:srgbClr val="F2B705"/>
+          </a:solidFill>
+          <a:ln>
+            <a:noFill/>
+          </a:ln>
+          <a:effectLst/>
+        </p:spPr>
+        <p:style>
+          <a:lnRef idx="1">
+            <a:schemeClr val="accent1"/>
+          </a:lnRef>
+          <a:fillRef idx="3">
+            <a:schemeClr val="accent1"/>
+          </a:fillRef>
+          <a:effectRef idx="2">
+            <a:schemeClr val="accent1"/>
+          </a:effectRef>
+          <a:fontRef idx="minor">
+            <a:schemeClr val="lt1"/>
+          </a:fontRef>
+        </p:style>
+        <p:txBody>
+          <a:bodyPr rtlCol="0" anchor="ctr" lIns="0" rIns="0" tIns="0" bIns="0"/>
+          <a:lstStyle/>
+          <a:p>
+            <a:pPr algn="ctr"/>
+            <a:r>
+              <a:rPr sz="2000" b="1">
+                <a:solidFill>
+                  <a:srgbClr val="202122"/>
+                </a:solidFill>
+                <a:latin typeface="Calibri"/>
+              </a:rPr>
+              <a:t>3</a:t>
+            </a:r>
+          </a:p>
+        </p:txBody>
+      </p:sp>
+      <p:sp>
+        <p:nvSpPr>
+          <p:cNvPr id="16" name="TextBox 15"/>
+          <p:cNvSpPr txBox="1"/>
+          <p:nvPr/>
+        </p:nvSpPr>
+        <p:spPr>
+          <a:xfrm>
+            <a:off x="6164427" y="3268979"/>
+            <a:ext cx="2670733" cy="731520"/>
+          </a:xfrm>
+          <a:prstGeom prst="rect">
+            <a:avLst/>
+          </a:prstGeom>
+          <a:noFill/>
+        </p:spPr>
+        <p:txBody>
+          <a:bodyPr wrap="square" anchor="t" lIns="0" rIns="0" tIns="0" bIns="0"/>
+          <a:lstStyle/>
+          <a:p>
+            <a:pPr algn="ctr"/>
+            <a:r>
+              <a:rPr sz="1700" b="1" i="0">
+                <a:solidFill>
+                  <a:srgbClr val="03306E"/>
+                </a:solidFill>
+                <a:latin typeface="Calibri"/>
+              </a:rPr>
+              <a:t>Authorisation</a:t>
+            </a:r>
+          </a:p>
+        </p:txBody>
+      </p:sp>
+      <p:sp>
+        <p:nvSpPr>
+          <p:cNvPr id="17" name="Rounded Rectangle 16"/>
+          <p:cNvSpPr/>
+          <p:nvPr/>
+        </p:nvSpPr>
+        <p:spPr>
+          <a:xfrm>
+            <a:off x="6164427" y="4046220"/>
+            <a:ext cx="2670733" cy="1234439"/>
+          </a:xfrm>
+          <a:prstGeom prst="roundRect">
+            <a:avLst>
+              <a:gd name="adj" fmla="val 6000"/>
+            </a:avLst>
+          </a:prstGeom>
+          <a:solidFill>
+            <a:srgbClr val="EAF3FF"/>
+          </a:solidFill>
+          <a:ln>
+            <a:noFill/>
+          </a:ln>
+          <a:effectLst/>
+        </p:spPr>
+        <p:style>
+          <a:lnRef idx="1">
+            <a:schemeClr val="accent1"/>
+          </a:lnRef>
+          <a:fillRef idx="3">
+            <a:schemeClr val="accent1"/>
+          </a:fillRef>
+          <a:effectRef idx="2">
+            <a:schemeClr val="accent1"/>
+          </a:effectRef>
+          <a:fontRef idx="minor">
+            <a:schemeClr val="lt1"/>
+          </a:fontRef>
+        </p:style>
+        <p:txBody>
+          <a:bodyPr rtlCol="0" anchor="ctr"/>
+          <a:lstStyle/>
+          <a:p/>
+        </p:txBody>
+      </p:sp>
+      <p:sp>
+        <p:nvSpPr>
+          <p:cNvPr id="18" name="TextBox 17"/>
+          <p:cNvSpPr txBox="1"/>
+          <p:nvPr/>
+        </p:nvSpPr>
+        <p:spPr>
+          <a:xfrm>
+            <a:off x="6301587" y="4183380"/>
+            <a:ext cx="2396413" cy="960119"/>
+          </a:xfrm>
+          <a:prstGeom prst="rect">
+            <a:avLst/>
+          </a:prstGeom>
+          <a:noFill/>
+        </p:spPr>
+        <p:txBody>
+          <a:bodyPr wrap="square" anchor="t" lIns="0" rIns="0" tIns="0" bIns="0"/>
+          <a:lstStyle/>
+          <a:p>
+            <a:pPr algn="l"/>
+            <a:r>
+              <a:rPr sz="1800" b="0" i="0">
+                <a:solidFill>
+                  <a:srgbClr val="202122"/>
+                </a:solidFill>
+                <a:latin typeface="Calibri"/>
+              </a:rPr>
+              <a:t>What can you do? Roles and access control lists.</a:t>
+            </a:r>
+          </a:p>
+        </p:txBody>
+      </p:sp>
+      <p:sp>
+        <p:nvSpPr>
+          <p:cNvPr id="19" name="Oval 18"/>
+          <p:cNvSpPr/>
+          <p:nvPr/>
+        </p:nvSpPr>
+        <p:spPr>
+          <a:xfrm>
+            <a:off x="9987648" y="2491740"/>
+            <a:ext cx="640080" cy="640080"/>
+          </a:xfrm>
+          <a:prstGeom prst="ellipse">
+            <a:avLst/>
+          </a:prstGeom>
+          <a:solidFill>
+            <a:srgbClr val="F2B705"/>
+          </a:solidFill>
+          <a:ln>
+            <a:noFill/>
+          </a:ln>
+          <a:effectLst/>
+        </p:spPr>
+        <p:style>
+          <a:lnRef idx="1">
+            <a:schemeClr val="accent1"/>
+          </a:lnRef>
+          <a:fillRef idx="3">
+            <a:schemeClr val="accent1"/>
+          </a:fillRef>
+          <a:effectRef idx="2">
+            <a:schemeClr val="accent1"/>
+          </a:effectRef>
+          <a:fontRef idx="minor">
+            <a:schemeClr val="lt1"/>
+          </a:fontRef>
+        </p:style>
+        <p:txBody>
+          <a:bodyPr rtlCol="0" anchor="ctr" lIns="0" rIns="0" tIns="0" bIns="0"/>
+          <a:lstStyle/>
+          <a:p>
+            <a:pPr algn="ctr"/>
+            <a:r>
+              <a:rPr sz="2000" b="1">
+                <a:solidFill>
+                  <a:srgbClr val="202122"/>
+                </a:solidFill>
+                <a:latin typeface="Calibri"/>
+              </a:rPr>
+              <a:t>4</a:t>
+            </a:r>
+          </a:p>
+        </p:txBody>
+      </p:sp>
+      <p:sp>
+        <p:nvSpPr>
+          <p:cNvPr id="20" name="TextBox 19"/>
+          <p:cNvSpPr txBox="1"/>
+          <p:nvPr/>
+        </p:nvSpPr>
+        <p:spPr>
+          <a:xfrm>
+            <a:off x="8972321" y="3268979"/>
+            <a:ext cx="2670733" cy="731520"/>
+          </a:xfrm>
+          <a:prstGeom prst="rect">
+            <a:avLst/>
+          </a:prstGeom>
+          <a:noFill/>
+        </p:spPr>
+        <p:txBody>
+          <a:bodyPr wrap="square" anchor="t" lIns="0" rIns="0" tIns="0" bIns="0"/>
+          <a:lstStyle/>
+          <a:p>
+            <a:pPr algn="ctr"/>
+            <a:r>
+              <a:rPr sz="1700" b="1" i="0">
+                <a:solidFill>
+                  <a:srgbClr val="03306E"/>
+                </a:solidFill>
+                <a:latin typeface="Calibri"/>
+              </a:rPr>
+              <a:t>Accountability</a:t>
+            </a:r>
+          </a:p>
+        </p:txBody>
+      </p:sp>
+      <p:sp>
+        <p:nvSpPr>
+          <p:cNvPr id="21" name="Rounded Rectangle 20"/>
+          <p:cNvSpPr/>
+          <p:nvPr/>
+        </p:nvSpPr>
+        <p:spPr>
+          <a:xfrm>
+            <a:off x="8972321" y="4046220"/>
+            <a:ext cx="2670733" cy="1234439"/>
+          </a:xfrm>
+          <a:prstGeom prst="roundRect">
+            <a:avLst>
+              <a:gd name="adj" fmla="val 6000"/>
+            </a:avLst>
+          </a:prstGeom>
+          <a:solidFill>
+            <a:srgbClr val="EAF3FF"/>
+          </a:solidFill>
+          <a:ln>
+            <a:noFill/>
+          </a:ln>
+          <a:effectLst/>
+        </p:spPr>
+        <p:style>
+          <a:lnRef idx="1">
+            <a:schemeClr val="accent1"/>
+          </a:lnRef>
+          <a:fillRef idx="3">
+            <a:schemeClr val="accent1"/>
+          </a:fillRef>
+          <a:effectRef idx="2">
+            <a:schemeClr val="accent1"/>
+          </a:effectRef>
+          <a:fontRef idx="minor">
+            <a:schemeClr val="lt1"/>
+          </a:fontRef>
+        </p:style>
+        <p:txBody>
+          <a:bodyPr rtlCol="0" anchor="ctr"/>
+          <a:lstStyle/>
+          <a:p/>
+        </p:txBody>
+      </p:sp>
+      <p:sp>
+        <p:nvSpPr>
+          <p:cNvPr id="22" name="TextBox 21"/>
+          <p:cNvSpPr txBox="1"/>
+          <p:nvPr/>
+        </p:nvSpPr>
+        <p:spPr>
+          <a:xfrm>
+            <a:off x="9109481" y="4183380"/>
+            <a:ext cx="2396413" cy="960119"/>
+          </a:xfrm>
+          <a:prstGeom prst="rect">
+            <a:avLst/>
+          </a:prstGeom>
+          <a:noFill/>
+        </p:spPr>
+        <p:txBody>
+          <a:bodyPr wrap="square" anchor="t" lIns="0" rIns="0" tIns="0" bIns="0"/>
+          <a:lstStyle/>
+          <a:p>
+            <a:pPr algn="l"/>
+            <a:r>
+              <a:rPr sz="1800" b="0" i="0">
+                <a:solidFill>
+                  <a:srgbClr val="202122"/>
+                </a:solidFill>
+                <a:latin typeface="Calibri"/>
+              </a:rPr>
+              <a:t>What did you do? Audit logs.</a:t>
+            </a:r>
+          </a:p>
+        </p:txBody>
+      </p:sp>
+    </p:spTree>
+  </p:cSld>
+  <p:clrMapOvr>
+    <a:masterClrMapping/>
+  </p:clrMapOvr>
+</p:sld>
+</file>
+
+<file path=ppt/slides/slide12.xml><?xml version="1.0" encoding="utf-8"?>
+<p:sld xmlns:a="http://schemas.openxmlformats.org/drawingml/2006/main" xmlns:p="http://schemas.openxmlformats.org/presentationml/2006/main" xmlns:r="http://schemas.openxmlformats.org/officeDocument/2006/relationships">
+  <p:cSld>
+    <p:bg>
+      <p:bgPr>
+        <a:solidFill>
+          <a:srgbClr val="FFFFFF"/>
+        </a:solidFill>
+        <a:effectLst/>
+      </p:bgPr>
+    </p:bg>
+    <p:spTree>
+      <p:nvGrpSpPr>
+        <p:cNvPr id="1" name=""/>
+        <p:cNvGrpSpPr/>
+        <p:nvPr/>
+      </p:nvGrpSpPr>
+      <p:grpSpPr/>
+      <p:sp>
+        <p:nvSpPr>
+          <p:cNvPr id="2" name="TextBox 1"/>
+          <p:cNvSpPr txBox="1"/>
+          <p:nvPr/>
+        </p:nvSpPr>
+        <p:spPr>
+          <a:xfrm>
+            <a:off x="548640" y="320040"/>
+            <a:ext cx="11094415" cy="274320"/>
+          </a:xfrm>
+          <a:prstGeom prst="rect">
+            <a:avLst/>
+          </a:prstGeom>
+          <a:noFill/>
+        </p:spPr>
+        <p:txBody>
+          <a:bodyPr wrap="square" anchor="t" lIns="0" rIns="0" tIns="0" bIns="0"/>
+          <a:lstStyle/>
+          <a:p>
+            <a:pPr algn="l"/>
+            <a:r>
+              <a:rPr sz="1100" b="1" i="0">
+                <a:solidFill>
+                  <a:srgbClr val="54595D"/>
+                </a:solidFill>
+                <a:latin typeface="Calibri"/>
+              </a:rPr>
+              <a:t>CORE COMPONENT  ·  Core Paper 2</a:t>
+            </a:r>
+          </a:p>
+        </p:txBody>
+      </p:sp>
+      <p:sp>
+        <p:nvSpPr>
+          <p:cNvPr id="3" name="TextBox 2"/>
+          <p:cNvSpPr txBox="1"/>
+          <p:nvPr/>
+        </p:nvSpPr>
+        <p:spPr>
+          <a:xfrm>
+            <a:off x="548640" y="566928"/>
+            <a:ext cx="11094415" cy="822960"/>
+          </a:xfrm>
+          <a:prstGeom prst="rect">
+            <a:avLst/>
+          </a:prstGeom>
+          <a:noFill/>
+        </p:spPr>
+        <p:txBody>
+          <a:bodyPr wrap="square" anchor="ctr" lIns="0" rIns="0" tIns="0" bIns="0"/>
+          <a:lstStyle/>
+          <a:p>
+            <a:pPr algn="l"/>
+            <a:r>
+              <a:rPr sz="3200" b="1" i="0">
+                <a:solidFill>
+                  <a:srgbClr val="03306E"/>
+                </a:solidFill>
+                <a:latin typeface="Cambria"/>
+              </a:rPr>
+              <a:t>Quick check: The IAAA model</a:t>
+            </a:r>
+          </a:p>
+        </p:txBody>
+      </p:sp>
+      <p:sp>
+        <p:nvSpPr>
+          <p:cNvPr id="4" name="TextBox 3"/>
+          <p:cNvSpPr txBox="1"/>
+          <p:nvPr/>
+        </p:nvSpPr>
+        <p:spPr>
+          <a:xfrm>
+            <a:off x="548640" y="6446520"/>
+            <a:ext cx="8229600" cy="274320"/>
+          </a:xfrm>
+          <a:prstGeom prst="rect">
+            <a:avLst/>
+          </a:prstGeom>
+          <a:noFill/>
+        </p:spPr>
+        <p:txBody>
+          <a:bodyPr wrap="square" anchor="t" lIns="0" rIns="0" tIns="0" bIns="0"/>
+          <a:lstStyle/>
+          <a:p>
+            <a:pPr algn="l"/>
+            <a:r>
+              <a:rPr sz="1000" b="0" i="0">
+                <a:solidFill>
+                  <a:srgbClr val="54595D"/>
+                </a:solidFill>
+                <a:latin typeface="Calibri"/>
+              </a:rPr>
+              <a:t>Digital Software Development T Level  ·  Threat Mitigation, the CIA Triad and IAAA</a:t>
+            </a:r>
+          </a:p>
+        </p:txBody>
+      </p:sp>
+      <p:sp>
+        <p:nvSpPr>
+          <p:cNvPr id="5" name="TextBox 4"/>
+          <p:cNvSpPr txBox="1"/>
+          <p:nvPr/>
+        </p:nvSpPr>
+        <p:spPr>
+          <a:xfrm>
+            <a:off x="10728655" y="6446520"/>
+            <a:ext cx="914400" cy="274320"/>
+          </a:xfrm>
+          <a:prstGeom prst="rect">
+            <a:avLst/>
+          </a:prstGeom>
+          <a:noFill/>
+        </p:spPr>
+        <p:txBody>
+          <a:bodyPr wrap="square" anchor="t" lIns="0" rIns="0" tIns="0" bIns="0"/>
+          <a:lstStyle/>
+          <a:p>
+            <a:pPr algn="r"/>
+            <a:r>
+              <a:rPr sz="1000" b="0" i="0">
+                <a:solidFill>
+                  <a:srgbClr val="54595D"/>
+                </a:solidFill>
+                <a:latin typeface="Calibri"/>
+              </a:rPr>
+              <a:t>12</a:t>
+            </a:r>
+          </a:p>
+        </p:txBody>
+      </p:sp>
+      <p:sp>
+        <p:nvSpPr>
+          <p:cNvPr id="6" name="Oval 5"/>
+          <p:cNvSpPr/>
+          <p:nvPr/>
+        </p:nvSpPr>
+        <p:spPr>
+          <a:xfrm>
+            <a:off x="548640" y="1691640"/>
+            <a:ext cx="502920" cy="502920"/>
+          </a:xfrm>
+          <a:prstGeom prst="ellipse">
+            <a:avLst/>
+          </a:prstGeom>
+          <a:solidFill>
+            <a:srgbClr val="F2B705"/>
+          </a:solidFill>
+          <a:ln>
+            <a:noFill/>
+          </a:ln>
+          <a:effectLst/>
+        </p:spPr>
+        <p:style>
+          <a:lnRef idx="1">
+            <a:schemeClr val="accent1"/>
+          </a:lnRef>
+          <a:fillRef idx="3">
+            <a:schemeClr val="accent1"/>
+          </a:fillRef>
+          <a:effectRef idx="2">
+            <a:schemeClr val="accent1"/>
+          </a:effectRef>
+          <a:fontRef idx="minor">
+            <a:schemeClr val="lt1"/>
+          </a:fontRef>
+        </p:style>
+        <p:txBody>
+          <a:bodyPr rtlCol="0" anchor="ctr" lIns="0" rIns="0" tIns="0" bIns="0"/>
+          <a:lstStyle/>
+          <a:p>
+            <a:pPr algn="ctr"/>
+            <a:r>
+              <a:rPr sz="1600" b="1">
+                <a:solidFill>
+                  <a:srgbClr val="202122"/>
+                </a:solidFill>
+                <a:latin typeface="Calibri"/>
+              </a:rPr>
+              <a:t>1</a:t>
+            </a:r>
+          </a:p>
+        </p:txBody>
+      </p:sp>
+      <p:sp>
+        <p:nvSpPr>
+          <p:cNvPr id="7" name="TextBox 6"/>
+          <p:cNvSpPr txBox="1"/>
+          <p:nvPr/>
+        </p:nvSpPr>
+        <p:spPr>
+          <a:xfrm>
+            <a:off x="1371600" y="1645920"/>
+            <a:ext cx="10271455" cy="1188720"/>
+          </a:xfrm>
+          <a:prstGeom prst="rect">
+            <a:avLst/>
+          </a:prstGeom>
+          <a:noFill/>
+        </p:spPr>
+        <p:txBody>
+          <a:bodyPr wrap="square" anchor="t" lIns="0" rIns="0" tIns="0" bIns="0"/>
+          <a:lstStyle/>
+          <a:p>
+            <a:pPr algn="l"/>
+            <a:r>
+              <a:rPr sz="2400" b="0" i="0">
+                <a:solidFill>
+                  <a:srgbClr val="202122"/>
+                </a:solidFill>
+                <a:latin typeface="Calibri"/>
+              </a:rPr>
+              <a:t>Which stage checks a password?</a:t>
+            </a:r>
+          </a:p>
+        </p:txBody>
+      </p:sp>
+      <p:sp>
+        <p:nvSpPr>
+          <p:cNvPr id="8" name="Oval 7"/>
+          <p:cNvSpPr/>
+          <p:nvPr/>
+        </p:nvSpPr>
+        <p:spPr>
+          <a:xfrm>
+            <a:off x="548640" y="3108960"/>
+            <a:ext cx="502920" cy="502920"/>
+          </a:xfrm>
+          <a:prstGeom prst="ellipse">
+            <a:avLst/>
+          </a:prstGeom>
+          <a:solidFill>
+            <a:srgbClr val="F2B705"/>
+          </a:solidFill>
+          <a:ln>
+            <a:noFill/>
+          </a:ln>
+          <a:effectLst/>
+        </p:spPr>
+        <p:style>
+          <a:lnRef idx="1">
+            <a:schemeClr val="accent1"/>
+          </a:lnRef>
+          <a:fillRef idx="3">
+            <a:schemeClr val="accent1"/>
+          </a:fillRef>
+          <a:effectRef idx="2">
+            <a:schemeClr val="accent1"/>
+          </a:effectRef>
+          <a:fontRef idx="minor">
+            <a:schemeClr val="lt1"/>
+          </a:fontRef>
+        </p:style>
+        <p:txBody>
+          <a:bodyPr rtlCol="0" anchor="ctr" lIns="0" rIns="0" tIns="0" bIns="0"/>
+          <a:lstStyle/>
+          <a:p>
+            <a:pPr algn="ctr"/>
+            <a:r>
+              <a:rPr sz="1600" b="1">
+                <a:solidFill>
+                  <a:srgbClr val="202122"/>
+                </a:solidFill>
+                <a:latin typeface="Calibri"/>
+              </a:rPr>
+              <a:t>2</a:t>
+            </a:r>
+          </a:p>
+        </p:txBody>
+      </p:sp>
+      <p:sp>
+        <p:nvSpPr>
+          <p:cNvPr id="9" name="TextBox 8"/>
+          <p:cNvSpPr txBox="1"/>
+          <p:nvPr/>
+        </p:nvSpPr>
+        <p:spPr>
+          <a:xfrm>
+            <a:off x="1371600" y="3063240"/>
+            <a:ext cx="10271455" cy="1188720"/>
+          </a:xfrm>
+          <a:prstGeom prst="rect">
+            <a:avLst/>
+          </a:prstGeom>
+          <a:noFill/>
+        </p:spPr>
+        <p:txBody>
+          <a:bodyPr wrap="square" anchor="t" lIns="0" rIns="0" tIns="0" bIns="0"/>
+          <a:lstStyle/>
+          <a:p>
+            <a:pPr algn="l"/>
+            <a:r>
+              <a:rPr sz="2400" b="0" i="0">
+                <a:solidFill>
+                  <a:srgbClr val="202122"/>
+                </a:solidFill>
+                <a:latin typeface="Calibri"/>
+              </a:rPr>
+              <a:t>Which stage decides what a user can do?</a:t>
+            </a:r>
+          </a:p>
+        </p:txBody>
+      </p:sp>
+      <p:sp>
+        <p:nvSpPr>
+          <p:cNvPr id="10" name="Oval 9"/>
+          <p:cNvSpPr/>
+          <p:nvPr/>
+        </p:nvSpPr>
+        <p:spPr>
+          <a:xfrm>
+            <a:off x="548640" y="4526280"/>
+            <a:ext cx="502920" cy="502920"/>
+          </a:xfrm>
+          <a:prstGeom prst="ellipse">
+            <a:avLst/>
+          </a:prstGeom>
+          <a:solidFill>
+            <a:srgbClr val="F2B705"/>
+          </a:solidFill>
+          <a:ln>
+            <a:noFill/>
+          </a:ln>
+          <a:effectLst/>
+        </p:spPr>
+        <p:style>
+          <a:lnRef idx="1">
+            <a:schemeClr val="accent1"/>
+          </a:lnRef>
+          <a:fillRef idx="3">
+            <a:schemeClr val="accent1"/>
+          </a:fillRef>
+          <a:effectRef idx="2">
+            <a:schemeClr val="accent1"/>
+          </a:effectRef>
+          <a:fontRef idx="minor">
+            <a:schemeClr val="lt1"/>
+          </a:fontRef>
+        </p:style>
+        <p:txBody>
+          <a:bodyPr rtlCol="0" anchor="ctr" lIns="0" rIns="0" tIns="0" bIns="0"/>
+          <a:lstStyle/>
+          <a:p>
+            <a:pPr algn="ctr"/>
+            <a:r>
+              <a:rPr sz="1600" b="1">
+                <a:solidFill>
+                  <a:srgbClr val="202122"/>
+                </a:solidFill>
+                <a:latin typeface="Calibri"/>
+              </a:rPr>
+              <a:t>3</a:t>
+            </a:r>
+          </a:p>
+        </p:txBody>
+      </p:sp>
+      <p:sp>
+        <p:nvSpPr>
+          <p:cNvPr id="11" name="TextBox 10"/>
+          <p:cNvSpPr txBox="1"/>
+          <p:nvPr/>
+        </p:nvSpPr>
+        <p:spPr>
+          <a:xfrm>
+            <a:off x="1371600" y="4480560"/>
+            <a:ext cx="10271455" cy="1188720"/>
+          </a:xfrm>
+          <a:prstGeom prst="rect">
+            <a:avLst/>
+          </a:prstGeom>
+          <a:noFill/>
+        </p:spPr>
+        <p:txBody>
+          <a:bodyPr wrap="square" anchor="t" lIns="0" rIns="0" tIns="0" bIns="0"/>
+          <a:lstStyle/>
+          <a:p>
+            <a:pPr algn="l"/>
+            <a:r>
+              <a:rPr sz="2400" b="0" i="0">
+                <a:solidFill>
+                  <a:srgbClr val="202122"/>
+                </a:solidFill>
+                <a:latin typeface="Calibri"/>
+              </a:rPr>
+              <a:t>How is accountability achieved?</a:t>
+            </a:r>
+          </a:p>
+        </p:txBody>
+      </p:sp>
+      <p:sp>
+        <p:nvSpPr>
+          <p:cNvPr id="12" name="TextBox 11"/>
+          <p:cNvSpPr txBox="1"/>
+          <p:nvPr/>
+        </p:nvSpPr>
+        <p:spPr>
+          <a:xfrm>
+            <a:off x="548640" y="5852160"/>
+            <a:ext cx="11094415" cy="365760"/>
+          </a:xfrm>
+          <a:prstGeom prst="rect">
+            <a:avLst/>
+          </a:prstGeom>
+          <a:noFill/>
+        </p:spPr>
+        <p:txBody>
+          <a:bodyPr wrap="square" anchor="t" lIns="0" rIns="0" tIns="0" bIns="0"/>
+          <a:lstStyle/>
+          <a:p>
+            <a:pPr algn="l"/>
+            <a:r>
+              <a:rPr sz="1300" b="0" i="1">
+                <a:solidFill>
+                  <a:srgbClr val="54595D"/>
+                </a:solidFill>
+                <a:latin typeface="Calibri"/>
+              </a:rPr>
+              <a:t>Answer on mini whiteboards or in your book. Answers are in the speaker notes.</a:t>
+            </a:r>
+          </a:p>
+        </p:txBody>
+      </p:sp>
+    </p:spTree>
+  </p:cSld>
+  <p:clrMapOvr>
+    <a:masterClrMapping/>
+  </p:clrMapOvr>
+</p:sld>
+</file>
+
+<file path=ppt/slides/slide13.xml><?xml version="1.0" encoding="utf-8"?>
+<p:sld xmlns:a="http://schemas.openxmlformats.org/drawingml/2006/main" xmlns:p="http://schemas.openxmlformats.org/presentationml/2006/main" xmlns:r="http://schemas.openxmlformats.org/officeDocument/2006/relationships">
+  <p:cSld>
+    <p:bg>
+      <p:bgPr>
+        <a:solidFill>
+          <a:srgbClr val="FFFFFF"/>
+        </a:solidFill>
+        <a:effectLst/>
+      </p:bgPr>
+    </p:bg>
+    <p:spTree>
+      <p:nvGrpSpPr>
+        <p:cNvPr id="1" name=""/>
+        <p:cNvGrpSpPr/>
+        <p:nvPr/>
+      </p:nvGrpSpPr>
+      <p:grpSpPr/>
+      <p:sp>
+        <p:nvSpPr>
+          <p:cNvPr id="2" name="TextBox 1"/>
+          <p:cNvSpPr txBox="1"/>
+          <p:nvPr/>
+        </p:nvSpPr>
+        <p:spPr>
+          <a:xfrm>
+            <a:off x="548640" y="320040"/>
+            <a:ext cx="11094415" cy="274320"/>
+          </a:xfrm>
+          <a:prstGeom prst="rect">
+            <a:avLst/>
+          </a:prstGeom>
+          <a:noFill/>
+        </p:spPr>
+        <p:txBody>
+          <a:bodyPr wrap="square" anchor="t" lIns="0" rIns="0" tIns="0" bIns="0"/>
+          <a:lstStyle/>
+          <a:p>
+            <a:pPr algn="l"/>
+            <a:r>
+              <a:rPr sz="1100" b="1" i="0">
+                <a:solidFill>
+                  <a:srgbClr val="54595D"/>
+                </a:solidFill>
+                <a:latin typeface="Calibri"/>
+              </a:rPr>
+              <a:t>CORE COMPONENT  ·  Core Paper 2</a:t>
+            </a:r>
+          </a:p>
+        </p:txBody>
+      </p:sp>
+      <p:sp>
+        <p:nvSpPr>
+          <p:cNvPr id="3" name="TextBox 2"/>
+          <p:cNvSpPr txBox="1"/>
+          <p:nvPr/>
+        </p:nvSpPr>
+        <p:spPr>
+          <a:xfrm>
+            <a:off x="548640" y="566928"/>
+            <a:ext cx="11094415" cy="822960"/>
+          </a:xfrm>
+          <a:prstGeom prst="rect">
+            <a:avLst/>
+          </a:prstGeom>
+          <a:noFill/>
+        </p:spPr>
+        <p:txBody>
+          <a:bodyPr wrap="square" anchor="ctr" lIns="0" rIns="0" tIns="0" bIns="0"/>
+          <a:lstStyle/>
+          <a:p>
+            <a:pPr algn="l"/>
+            <a:r>
+              <a:rPr sz="3200" b="1" i="0">
+                <a:solidFill>
+                  <a:srgbClr val="03306E"/>
+                </a:solidFill>
+                <a:latin typeface="Cambria"/>
+              </a:rPr>
+              <a:t>Check your understanding</a:t>
+            </a:r>
+          </a:p>
+        </p:txBody>
+      </p:sp>
+      <p:sp>
+        <p:nvSpPr>
+          <p:cNvPr id="4" name="TextBox 3"/>
+          <p:cNvSpPr txBox="1"/>
+          <p:nvPr/>
+        </p:nvSpPr>
+        <p:spPr>
+          <a:xfrm>
+            <a:off x="548640" y="6446520"/>
+            <a:ext cx="8229600" cy="274320"/>
+          </a:xfrm>
+          <a:prstGeom prst="rect">
+            <a:avLst/>
+          </a:prstGeom>
+          <a:noFill/>
+        </p:spPr>
+        <p:txBody>
+          <a:bodyPr wrap="square" anchor="t" lIns="0" rIns="0" tIns="0" bIns="0"/>
+          <a:lstStyle/>
+          <a:p>
+            <a:pPr algn="l"/>
+            <a:r>
+              <a:rPr sz="1000" b="0" i="0">
+                <a:solidFill>
+                  <a:srgbClr val="54595D"/>
+                </a:solidFill>
+                <a:latin typeface="Calibri"/>
+              </a:rPr>
+              <a:t>Digital Software Development T Level  ·  Threat Mitigation, the CIA Triad and IAAA</a:t>
+            </a:r>
+          </a:p>
+        </p:txBody>
+      </p:sp>
+      <p:sp>
+        <p:nvSpPr>
+          <p:cNvPr id="5" name="TextBox 4"/>
+          <p:cNvSpPr txBox="1"/>
+          <p:nvPr/>
+        </p:nvSpPr>
+        <p:spPr>
+          <a:xfrm>
+            <a:off x="10728655" y="6446520"/>
+            <a:ext cx="914400" cy="274320"/>
+          </a:xfrm>
+          <a:prstGeom prst="rect">
+            <a:avLst/>
+          </a:prstGeom>
+          <a:noFill/>
+        </p:spPr>
+        <p:txBody>
+          <a:bodyPr wrap="square" anchor="t" lIns="0" rIns="0" tIns="0" bIns="0"/>
+          <a:lstStyle/>
+          <a:p>
+            <a:pPr algn="r"/>
+            <a:r>
+              <a:rPr sz="1000" b="0" i="0">
+                <a:solidFill>
+                  <a:srgbClr val="54595D"/>
+                </a:solidFill>
+                <a:latin typeface="Calibri"/>
+              </a:rPr>
+              <a:t>13</a:t>
+            </a:r>
+          </a:p>
+        </p:txBody>
+      </p:sp>
+      <p:sp>
+        <p:nvSpPr>
+          <p:cNvPr id="6" name="Oval 5"/>
+          <p:cNvSpPr/>
+          <p:nvPr/>
+        </p:nvSpPr>
+        <p:spPr>
+          <a:xfrm>
+            <a:off x="548640" y="1618488"/>
+            <a:ext cx="411480" cy="411480"/>
+          </a:xfrm>
+          <a:prstGeom prst="ellipse">
+            <a:avLst/>
+          </a:prstGeom>
+          <a:solidFill>
+            <a:srgbClr val="F2B705"/>
+          </a:solidFill>
+          <a:ln>
+            <a:noFill/>
+          </a:ln>
+          <a:effectLst/>
+        </p:spPr>
+        <p:style>
+          <a:lnRef idx="1">
+            <a:schemeClr val="accent1"/>
+          </a:lnRef>
+          <a:fillRef idx="3">
+            <a:schemeClr val="accent1"/>
+          </a:fillRef>
+          <a:effectRef idx="2">
+            <a:schemeClr val="accent1"/>
+          </a:effectRef>
+          <a:fontRef idx="minor">
+            <a:schemeClr val="lt1"/>
+          </a:fontRef>
+        </p:style>
+        <p:txBody>
+          <a:bodyPr rtlCol="0" anchor="ctr" lIns="0" rIns="0" tIns="0" bIns="0"/>
+          <a:lstStyle/>
+          <a:p>
+            <a:pPr algn="ctr"/>
+            <a:r>
+              <a:rPr sz="1400" b="1">
+                <a:solidFill>
+                  <a:srgbClr val="202122"/>
+                </a:solidFill>
+                <a:latin typeface="Calibri"/>
+              </a:rPr>
+              <a:t>1</a:t>
+            </a:r>
+          </a:p>
+        </p:txBody>
+      </p:sp>
+      <p:sp>
+        <p:nvSpPr>
+          <p:cNvPr id="7" name="TextBox 6"/>
+          <p:cNvSpPr txBox="1"/>
+          <p:nvPr/>
+        </p:nvSpPr>
+        <p:spPr>
+          <a:xfrm>
+            <a:off x="1234440" y="1600200"/>
+            <a:ext cx="10408615" cy="1030986"/>
+          </a:xfrm>
+          <a:prstGeom prst="rect">
+            <a:avLst/>
+          </a:prstGeom>
+          <a:noFill/>
+        </p:spPr>
+        <p:txBody>
+          <a:bodyPr wrap="square" anchor="t" lIns="0" rIns="0" tIns="0" bIns="0"/>
+          <a:lstStyle/>
+          <a:p>
+            <a:pPr algn="l"/>
+            <a:r>
+              <a:rPr sz="2200" b="0" i="0">
+                <a:solidFill>
+                  <a:srgbClr val="202122"/>
+                </a:solidFill>
+                <a:latin typeface="Calibri"/>
+              </a:rPr>
+              <a:t>Why hash passwords rather than encrypt them?</a:t>
+            </a:r>
+          </a:p>
+        </p:txBody>
+      </p:sp>
+      <p:sp>
+        <p:nvSpPr>
+          <p:cNvPr id="8" name="Oval 7"/>
+          <p:cNvSpPr/>
+          <p:nvPr/>
+        </p:nvSpPr>
+        <p:spPr>
+          <a:xfrm>
+            <a:off x="548640" y="2814066"/>
+            <a:ext cx="411480" cy="411480"/>
+          </a:xfrm>
+          <a:prstGeom prst="ellipse">
+            <a:avLst/>
+          </a:prstGeom>
+          <a:solidFill>
+            <a:srgbClr val="F2B705"/>
+          </a:solidFill>
+          <a:ln>
+            <a:noFill/>
+          </a:ln>
+          <a:effectLst/>
+        </p:spPr>
+        <p:style>
+          <a:lnRef idx="1">
+            <a:schemeClr val="accent1"/>
+          </a:lnRef>
+          <a:fillRef idx="3">
+            <a:schemeClr val="accent1"/>
+          </a:fillRef>
+          <a:effectRef idx="2">
+            <a:schemeClr val="accent1"/>
+          </a:effectRef>
+          <a:fontRef idx="minor">
+            <a:schemeClr val="lt1"/>
+          </a:fontRef>
+        </p:style>
+        <p:txBody>
+          <a:bodyPr rtlCol="0" anchor="ctr" lIns="0" rIns="0" tIns="0" bIns="0"/>
+          <a:lstStyle/>
+          <a:p>
+            <a:pPr algn="ctr"/>
+            <a:r>
+              <a:rPr sz="1400" b="1">
+                <a:solidFill>
+                  <a:srgbClr val="202122"/>
+                </a:solidFill>
+                <a:latin typeface="Calibri"/>
+              </a:rPr>
+              <a:t>2</a:t>
+            </a:r>
+          </a:p>
+        </p:txBody>
+      </p:sp>
+      <p:sp>
+        <p:nvSpPr>
+          <p:cNvPr id="9" name="TextBox 8"/>
+          <p:cNvSpPr txBox="1"/>
+          <p:nvPr/>
+        </p:nvSpPr>
+        <p:spPr>
+          <a:xfrm>
+            <a:off x="1234440" y="2795778"/>
+            <a:ext cx="10408615" cy="1030986"/>
+          </a:xfrm>
+          <a:prstGeom prst="rect">
+            <a:avLst/>
+          </a:prstGeom>
+          <a:noFill/>
+        </p:spPr>
+        <p:txBody>
+          <a:bodyPr wrap="square" anchor="t" lIns="0" rIns="0" tIns="0" bIns="0"/>
+          <a:lstStyle/>
+          <a:p>
+            <a:pPr algn="l"/>
+            <a:r>
+              <a:rPr sz="2200" b="0" i="0">
+                <a:solidFill>
+                  <a:srgbClr val="202122"/>
+                </a:solidFill>
+                <a:latin typeface="Calibri"/>
+              </a:rPr>
+              <a:t>What is an air gap?</a:t>
+            </a:r>
+          </a:p>
+        </p:txBody>
+      </p:sp>
+      <p:sp>
+        <p:nvSpPr>
+          <p:cNvPr id="10" name="Oval 9"/>
+          <p:cNvSpPr/>
+          <p:nvPr/>
+        </p:nvSpPr>
+        <p:spPr>
+          <a:xfrm>
+            <a:off x="548640" y="4009644"/>
+            <a:ext cx="411480" cy="411480"/>
+          </a:xfrm>
+          <a:prstGeom prst="ellipse">
+            <a:avLst/>
+          </a:prstGeom>
+          <a:solidFill>
+            <a:srgbClr val="F2B705"/>
+          </a:solidFill>
+          <a:ln>
+            <a:noFill/>
+          </a:ln>
+          <a:effectLst/>
+        </p:spPr>
+        <p:style>
+          <a:lnRef idx="1">
+            <a:schemeClr val="accent1"/>
+          </a:lnRef>
+          <a:fillRef idx="3">
+            <a:schemeClr val="accent1"/>
+          </a:fillRef>
+          <a:effectRef idx="2">
+            <a:schemeClr val="accent1"/>
+          </a:effectRef>
+          <a:fontRef idx="minor">
+            <a:schemeClr val="lt1"/>
+          </a:fontRef>
+        </p:style>
+        <p:txBody>
+          <a:bodyPr rtlCol="0" anchor="ctr" lIns="0" rIns="0" tIns="0" bIns="0"/>
+          <a:lstStyle/>
+          <a:p>
+            <a:pPr algn="ctr"/>
+            <a:r>
+              <a:rPr sz="1400" b="1">
+                <a:solidFill>
+                  <a:srgbClr val="202122"/>
+                </a:solidFill>
+                <a:latin typeface="Calibri"/>
+              </a:rPr>
+              <a:t>3</a:t>
+            </a:r>
+          </a:p>
+        </p:txBody>
+      </p:sp>
+      <p:sp>
+        <p:nvSpPr>
+          <p:cNvPr id="11" name="TextBox 10"/>
+          <p:cNvSpPr txBox="1"/>
+          <p:nvPr/>
+        </p:nvSpPr>
+        <p:spPr>
+          <a:xfrm>
+            <a:off x="1234440" y="3991356"/>
+            <a:ext cx="10408615" cy="1030986"/>
+          </a:xfrm>
+          <a:prstGeom prst="rect">
+            <a:avLst/>
+          </a:prstGeom>
+          <a:noFill/>
+        </p:spPr>
+        <p:txBody>
+          <a:bodyPr wrap="square" anchor="t" lIns="0" rIns="0" tIns="0" bIns="0"/>
+          <a:lstStyle/>
+          <a:p>
+            <a:pPr algn="l"/>
+            <a:r>
+              <a:rPr sz="2200" b="0" i="0">
+                <a:solidFill>
+                  <a:srgbClr val="202122"/>
+                </a:solidFill>
+                <a:latin typeface="Calibri"/>
+              </a:rPr>
+              <a:t>Which IAAA stage checks permissions?</a:t>
+            </a:r>
+          </a:p>
+        </p:txBody>
+      </p:sp>
+      <p:sp>
+        <p:nvSpPr>
+          <p:cNvPr id="12" name="Oval 11"/>
+          <p:cNvSpPr/>
+          <p:nvPr/>
+        </p:nvSpPr>
+        <p:spPr>
+          <a:xfrm>
+            <a:off x="548640" y="5205221"/>
+            <a:ext cx="411480" cy="411480"/>
+          </a:xfrm>
+          <a:prstGeom prst="ellipse">
+            <a:avLst/>
+          </a:prstGeom>
+          <a:solidFill>
+            <a:srgbClr val="F2B705"/>
+          </a:solidFill>
+          <a:ln>
+            <a:noFill/>
+          </a:ln>
+          <a:effectLst/>
+        </p:spPr>
+        <p:style>
+          <a:lnRef idx="1">
+            <a:schemeClr val="accent1"/>
+          </a:lnRef>
+          <a:fillRef idx="3">
+            <a:schemeClr val="accent1"/>
+          </a:fillRef>
+          <a:effectRef idx="2">
+            <a:schemeClr val="accent1"/>
+          </a:effectRef>
+          <a:fontRef idx="minor">
+            <a:schemeClr val="lt1"/>
+          </a:fontRef>
+        </p:style>
+        <p:txBody>
+          <a:bodyPr rtlCol="0" anchor="ctr" lIns="0" rIns="0" tIns="0" bIns="0"/>
+          <a:lstStyle/>
+          <a:p>
+            <a:pPr algn="ctr"/>
+            <a:r>
+              <a:rPr sz="1400" b="1">
+                <a:solidFill>
+                  <a:srgbClr val="202122"/>
+                </a:solidFill>
+                <a:latin typeface="Calibri"/>
+              </a:rPr>
+              <a:t>4</a:t>
+            </a:r>
+          </a:p>
+        </p:txBody>
+      </p:sp>
+      <p:sp>
+        <p:nvSpPr>
+          <p:cNvPr id="13" name="TextBox 12"/>
+          <p:cNvSpPr txBox="1"/>
+          <p:nvPr/>
+        </p:nvSpPr>
+        <p:spPr>
+          <a:xfrm>
+            <a:off x="1234440" y="5186933"/>
+            <a:ext cx="10408615" cy="1030986"/>
+          </a:xfrm>
+          <a:prstGeom prst="rect">
+            <a:avLst/>
+          </a:prstGeom>
+          <a:noFill/>
+        </p:spPr>
+        <p:txBody>
+          <a:bodyPr wrap="square" anchor="t" lIns="0" rIns="0" tIns="0" bIns="0"/>
+          <a:lstStyle/>
+          <a:p>
+            <a:pPr algn="l"/>
+            <a:r>
+              <a:rPr sz="2200" b="0" i="0">
+                <a:solidFill>
+                  <a:srgbClr val="202122"/>
+                </a:solidFill>
+                <a:latin typeface="Calibri"/>
+              </a:rPr>
+              <a:t>Which CIA property does a DDoS attack target?</a:t>
+            </a:r>
+          </a:p>
+        </p:txBody>
+      </p:sp>
+    </p:spTree>
+  </p:cSld>
+  <p:clrMapOvr>
+    <a:masterClrMapping/>
+  </p:clrMapOvr>
+</p:sld>
+</file>
+
+<file path=ppt/slides/slide14.xml><?xml version="1.0" encoding="utf-8"?>
+<p:sld xmlns:a="http://schemas.openxmlformats.org/drawingml/2006/main" xmlns:p="http://schemas.openxmlformats.org/presentationml/2006/main" xmlns:r="http://schemas.openxmlformats.org/officeDocument/2006/relationships">
+  <p:cSld>
+    <p:bg>
+      <p:bgPr>
+        <a:solidFill>
+          <a:srgbClr val="FFFFFF"/>
+        </a:solidFill>
+        <a:effectLst/>
+      </p:bgPr>
+    </p:bg>
+    <p:spTree>
+      <p:nvGrpSpPr>
+        <p:cNvPr id="1" name=""/>
+        <p:cNvGrpSpPr/>
+        <p:nvPr/>
+      </p:nvGrpSpPr>
+      <p:grpSpPr/>
+      <p:sp>
+        <p:nvSpPr>
+          <p:cNvPr id="2" name="TextBox 1"/>
+          <p:cNvSpPr txBox="1"/>
+          <p:nvPr/>
+        </p:nvSpPr>
+        <p:spPr>
+          <a:xfrm>
+            <a:off x="548640" y="320040"/>
+            <a:ext cx="11094415" cy="274320"/>
+          </a:xfrm>
+          <a:prstGeom prst="rect">
+            <a:avLst/>
+          </a:prstGeom>
+          <a:noFill/>
+        </p:spPr>
+        <p:txBody>
+          <a:bodyPr wrap="square" anchor="t" lIns="0" rIns="0" tIns="0" bIns="0"/>
+          <a:lstStyle/>
+          <a:p>
+            <a:pPr algn="l"/>
+            <a:r>
+              <a:rPr sz="1100" b="1" i="0">
+                <a:solidFill>
+                  <a:srgbClr val="54595D"/>
+                </a:solidFill>
+                <a:latin typeface="Calibri"/>
+              </a:rPr>
+              <a:t>CORE COMPONENT  ·  Core Paper 2</a:t>
+            </a:r>
+          </a:p>
+        </p:txBody>
+      </p:sp>
+      <p:sp>
+        <p:nvSpPr>
+          <p:cNvPr id="3" name="TextBox 2"/>
+          <p:cNvSpPr txBox="1"/>
+          <p:nvPr/>
+        </p:nvSpPr>
+        <p:spPr>
+          <a:xfrm>
+            <a:off x="548640" y="566928"/>
+            <a:ext cx="11094415" cy="822960"/>
+          </a:xfrm>
+          <a:prstGeom prst="rect">
+            <a:avLst/>
+          </a:prstGeom>
+          <a:noFill/>
+        </p:spPr>
+        <p:txBody>
+          <a:bodyPr wrap="square" anchor="ctr" lIns="0" rIns="0" tIns="0" bIns="0"/>
+          <a:lstStyle/>
+          <a:p>
+            <a:pPr algn="l"/>
+            <a:r>
+              <a:rPr sz="3200" b="1" i="0">
+                <a:solidFill>
+                  <a:srgbClr val="03306E"/>
+                </a:solidFill>
+                <a:latin typeface="Cambria"/>
+              </a:rPr>
+              <a:t>Answers</a:t>
+            </a:r>
+          </a:p>
+        </p:txBody>
+      </p:sp>
+      <p:sp>
+        <p:nvSpPr>
+          <p:cNvPr id="4" name="TextBox 3"/>
+          <p:cNvSpPr txBox="1"/>
+          <p:nvPr/>
+        </p:nvSpPr>
+        <p:spPr>
+          <a:xfrm>
+            <a:off x="548640" y="6446520"/>
+            <a:ext cx="8229600" cy="274320"/>
+          </a:xfrm>
+          <a:prstGeom prst="rect">
+            <a:avLst/>
+          </a:prstGeom>
+          <a:noFill/>
+        </p:spPr>
+        <p:txBody>
+          <a:bodyPr wrap="square" anchor="t" lIns="0" rIns="0" tIns="0" bIns="0"/>
+          <a:lstStyle/>
+          <a:p>
+            <a:pPr algn="l"/>
+            <a:r>
+              <a:rPr sz="1000" b="0" i="0">
+                <a:solidFill>
+                  <a:srgbClr val="54595D"/>
+                </a:solidFill>
+                <a:latin typeface="Calibri"/>
+              </a:rPr>
+              <a:t>Digital Software Development T Level  ·  Threat Mitigation, the CIA Triad and IAAA</a:t>
+            </a:r>
+          </a:p>
+        </p:txBody>
+      </p:sp>
+      <p:sp>
+        <p:nvSpPr>
+          <p:cNvPr id="5" name="TextBox 4"/>
+          <p:cNvSpPr txBox="1"/>
+          <p:nvPr/>
+        </p:nvSpPr>
+        <p:spPr>
+          <a:xfrm>
+            <a:off x="10728655" y="6446520"/>
+            <a:ext cx="914400" cy="274320"/>
+          </a:xfrm>
+          <a:prstGeom prst="rect">
+            <a:avLst/>
+          </a:prstGeom>
+          <a:noFill/>
+        </p:spPr>
+        <p:txBody>
+          <a:bodyPr wrap="square" anchor="t" lIns="0" rIns="0" tIns="0" bIns="0"/>
+          <a:lstStyle/>
+          <a:p>
+            <a:pPr algn="r"/>
+            <a:r>
+              <a:rPr sz="1000" b="0" i="0">
+                <a:solidFill>
+                  <a:srgbClr val="54595D"/>
+                </a:solidFill>
+                <a:latin typeface="Calibri"/>
+              </a:rPr>
+              <a:t>14</a:t>
+            </a:r>
+          </a:p>
+        </p:txBody>
+      </p:sp>
+      <p:sp>
+        <p:nvSpPr>
+          <p:cNvPr id="6" name="Oval 5"/>
+          <p:cNvSpPr/>
+          <p:nvPr/>
+        </p:nvSpPr>
+        <p:spPr>
+          <a:xfrm>
+            <a:off x="548640" y="1618488"/>
+            <a:ext cx="411480" cy="411480"/>
+          </a:xfrm>
+          <a:prstGeom prst="ellipse">
+            <a:avLst/>
+          </a:prstGeom>
+          <a:solidFill>
+            <a:srgbClr val="F2B705"/>
+          </a:solidFill>
+          <a:ln>
+            <a:noFill/>
+          </a:ln>
+          <a:effectLst/>
+        </p:spPr>
+        <p:style>
+          <a:lnRef idx="1">
+            <a:schemeClr val="accent1"/>
+          </a:lnRef>
+          <a:fillRef idx="3">
+            <a:schemeClr val="accent1"/>
+          </a:fillRef>
+          <a:effectRef idx="2">
+            <a:schemeClr val="accent1"/>
+          </a:effectRef>
+          <a:fontRef idx="minor">
+            <a:schemeClr val="lt1"/>
+          </a:fontRef>
+        </p:style>
+        <p:txBody>
+          <a:bodyPr rtlCol="0" anchor="ctr" lIns="0" rIns="0" tIns="0" bIns="0"/>
+          <a:lstStyle/>
+          <a:p>
+            <a:pPr algn="ctr"/>
+            <a:r>
+              <a:rPr sz="1400" b="1">
+                <a:solidFill>
+                  <a:srgbClr val="202122"/>
+                </a:solidFill>
+                <a:latin typeface="Calibri"/>
+              </a:rPr>
+              <a:t>1</a:t>
+            </a:r>
+          </a:p>
+        </p:txBody>
+      </p:sp>
+      <p:sp>
+        <p:nvSpPr>
+          <p:cNvPr id="7" name="TextBox 6"/>
+          <p:cNvSpPr txBox="1"/>
+          <p:nvPr/>
+        </p:nvSpPr>
+        <p:spPr>
+          <a:xfrm>
+            <a:off x="1234440" y="1600200"/>
+            <a:ext cx="10408615" cy="1030986"/>
+          </a:xfrm>
+          <a:prstGeom prst="rect">
+            <a:avLst/>
+          </a:prstGeom>
+          <a:noFill/>
+        </p:spPr>
+        <p:txBody>
+          <a:bodyPr wrap="square" anchor="t" lIns="0" rIns="0" tIns="0" bIns="0"/>
+          <a:lstStyle/>
+          <a:p>
+            <a:pPr algn="l"/>
+            <a:r>
+              <a:rPr sz="1800" b="0" i="0">
+                <a:solidFill>
+                  <a:srgbClr val="54595D"/>
+                </a:solidFill>
+                <a:latin typeface="Calibri"/>
+              </a:rPr>
+              <a:t>Why hash passwords rather than encrypt them?</a:t>
+            </a:r>
+          </a:p>
+          <a:p>
+            <a:r>
+              <a:rPr sz="1800" b="1">
+                <a:solidFill>
+                  <a:srgbClr val="03306E"/>
+                </a:solidFill>
+                <a:latin typeface="Calibri"/>
+              </a:rPr>
+              <a:t>Hashing is one way, so stored passwords cannot be reversed.</a:t>
+            </a:r>
+          </a:p>
+        </p:txBody>
+      </p:sp>
+      <p:sp>
+        <p:nvSpPr>
+          <p:cNvPr id="8" name="Oval 7"/>
+          <p:cNvSpPr/>
+          <p:nvPr/>
+        </p:nvSpPr>
+        <p:spPr>
+          <a:xfrm>
+            <a:off x="548640" y="2814066"/>
+            <a:ext cx="411480" cy="411480"/>
+          </a:xfrm>
+          <a:prstGeom prst="ellipse">
+            <a:avLst/>
+          </a:prstGeom>
+          <a:solidFill>
+            <a:srgbClr val="F2B705"/>
+          </a:solidFill>
+          <a:ln>
+            <a:noFill/>
+          </a:ln>
+          <a:effectLst/>
+        </p:spPr>
+        <p:style>
+          <a:lnRef idx="1">
+            <a:schemeClr val="accent1"/>
+          </a:lnRef>
+          <a:fillRef idx="3">
+            <a:schemeClr val="accent1"/>
+          </a:fillRef>
+          <a:effectRef idx="2">
+            <a:schemeClr val="accent1"/>
+          </a:effectRef>
+          <a:fontRef idx="minor">
+            <a:schemeClr val="lt1"/>
+          </a:fontRef>
+        </p:style>
+        <p:txBody>
+          <a:bodyPr rtlCol="0" anchor="ctr" lIns="0" rIns="0" tIns="0" bIns="0"/>
+          <a:lstStyle/>
+          <a:p>
+            <a:pPr algn="ctr"/>
+            <a:r>
+              <a:rPr sz="1400" b="1">
+                <a:solidFill>
+                  <a:srgbClr val="202122"/>
+                </a:solidFill>
+                <a:latin typeface="Calibri"/>
+              </a:rPr>
+              <a:t>2</a:t>
+            </a:r>
+          </a:p>
+        </p:txBody>
+      </p:sp>
+      <p:sp>
+        <p:nvSpPr>
+          <p:cNvPr id="9" name="TextBox 8"/>
+          <p:cNvSpPr txBox="1"/>
+          <p:nvPr/>
+        </p:nvSpPr>
+        <p:spPr>
+          <a:xfrm>
+            <a:off x="1234440" y="2795778"/>
+            <a:ext cx="10408615" cy="1030986"/>
+          </a:xfrm>
+          <a:prstGeom prst="rect">
+            <a:avLst/>
+          </a:prstGeom>
+          <a:noFill/>
+        </p:spPr>
+        <p:txBody>
+          <a:bodyPr wrap="square" anchor="t" lIns="0" rIns="0" tIns="0" bIns="0"/>
+          <a:lstStyle/>
+          <a:p>
+            <a:pPr algn="l"/>
+            <a:r>
+              <a:rPr sz="1800" b="0" i="0">
+                <a:solidFill>
+                  <a:srgbClr val="54595D"/>
+                </a:solidFill>
+                <a:latin typeface="Calibri"/>
+              </a:rPr>
+              <a:t>What is an air gap?</a:t>
+            </a:r>
+          </a:p>
+          <a:p>
+            <a:r>
+              <a:rPr sz="1800" b="1">
+                <a:solidFill>
+                  <a:srgbClr val="03306E"/>
+                </a:solidFill>
+                <a:latin typeface="Calibri"/>
+              </a:rPr>
+              <a:t>Physically isolating a system from other networks.</a:t>
+            </a:r>
+          </a:p>
+        </p:txBody>
+      </p:sp>
+      <p:sp>
+        <p:nvSpPr>
+          <p:cNvPr id="10" name="Oval 9"/>
+          <p:cNvSpPr/>
+          <p:nvPr/>
+        </p:nvSpPr>
+        <p:spPr>
+          <a:xfrm>
+            <a:off x="548640" y="4009644"/>
+            <a:ext cx="411480" cy="411480"/>
+          </a:xfrm>
+          <a:prstGeom prst="ellipse">
+            <a:avLst/>
+          </a:prstGeom>
+          <a:solidFill>
+            <a:srgbClr val="F2B705"/>
+          </a:solidFill>
+          <a:ln>
+            <a:noFill/>
+          </a:ln>
+          <a:effectLst/>
+        </p:spPr>
+        <p:style>
+          <a:lnRef idx="1">
+            <a:schemeClr val="accent1"/>
+          </a:lnRef>
+          <a:fillRef idx="3">
+            <a:schemeClr val="accent1"/>
+          </a:fillRef>
+          <a:effectRef idx="2">
+            <a:schemeClr val="accent1"/>
+          </a:effectRef>
+          <a:fontRef idx="minor">
+            <a:schemeClr val="lt1"/>
+          </a:fontRef>
+        </p:style>
+        <p:txBody>
+          <a:bodyPr rtlCol="0" anchor="ctr" lIns="0" rIns="0" tIns="0" bIns="0"/>
+          <a:lstStyle/>
+          <a:p>
+            <a:pPr algn="ctr"/>
+            <a:r>
+              <a:rPr sz="1400" b="1">
+                <a:solidFill>
+                  <a:srgbClr val="202122"/>
+                </a:solidFill>
+                <a:latin typeface="Calibri"/>
+              </a:rPr>
+              <a:t>3</a:t>
+            </a:r>
+          </a:p>
+        </p:txBody>
+      </p:sp>
+      <p:sp>
+        <p:nvSpPr>
+          <p:cNvPr id="11" name="TextBox 10"/>
+          <p:cNvSpPr txBox="1"/>
+          <p:nvPr/>
+        </p:nvSpPr>
+        <p:spPr>
+          <a:xfrm>
+            <a:off x="1234440" y="3991356"/>
+            <a:ext cx="10408615" cy="1030986"/>
+          </a:xfrm>
+          <a:prstGeom prst="rect">
+            <a:avLst/>
+          </a:prstGeom>
+          <a:noFill/>
+        </p:spPr>
+        <p:txBody>
+          <a:bodyPr wrap="square" anchor="t" lIns="0" rIns="0" tIns="0" bIns="0"/>
+          <a:lstStyle/>
+          <a:p>
+            <a:pPr algn="l"/>
+            <a:r>
+              <a:rPr sz="1800" b="0" i="0">
+                <a:solidFill>
+                  <a:srgbClr val="54595D"/>
+                </a:solidFill>
+                <a:latin typeface="Calibri"/>
+              </a:rPr>
+              <a:t>Which IAAA stage checks permissions?</a:t>
+            </a:r>
+          </a:p>
+          <a:p>
+            <a:r>
+              <a:rPr sz="1800" b="1">
+                <a:solidFill>
+                  <a:srgbClr val="03306E"/>
+                </a:solidFill>
+                <a:latin typeface="Calibri"/>
+              </a:rPr>
+              <a:t>Authorisation.</a:t>
+            </a:r>
+          </a:p>
+        </p:txBody>
+      </p:sp>
+      <p:sp>
+        <p:nvSpPr>
+          <p:cNvPr id="12" name="Oval 11"/>
+          <p:cNvSpPr/>
+          <p:nvPr/>
+        </p:nvSpPr>
+        <p:spPr>
+          <a:xfrm>
+            <a:off x="548640" y="5205221"/>
+            <a:ext cx="411480" cy="411480"/>
+          </a:xfrm>
+          <a:prstGeom prst="ellipse">
+            <a:avLst/>
+          </a:prstGeom>
+          <a:solidFill>
+            <a:srgbClr val="F2B705"/>
+          </a:solidFill>
+          <a:ln>
+            <a:noFill/>
+          </a:ln>
+          <a:effectLst/>
+        </p:spPr>
+        <p:style>
+          <a:lnRef idx="1">
+            <a:schemeClr val="accent1"/>
+          </a:lnRef>
+          <a:fillRef idx="3">
+            <a:schemeClr val="accent1"/>
+          </a:fillRef>
+          <a:effectRef idx="2">
+            <a:schemeClr val="accent1"/>
+          </a:effectRef>
+          <a:fontRef idx="minor">
+            <a:schemeClr val="lt1"/>
+          </a:fontRef>
+        </p:style>
+        <p:txBody>
+          <a:bodyPr rtlCol="0" anchor="ctr" lIns="0" rIns="0" tIns="0" bIns="0"/>
+          <a:lstStyle/>
+          <a:p>
+            <a:pPr algn="ctr"/>
+            <a:r>
+              <a:rPr sz="1400" b="1">
+                <a:solidFill>
+                  <a:srgbClr val="202122"/>
+                </a:solidFill>
+                <a:latin typeface="Calibri"/>
+              </a:rPr>
+              <a:t>4</a:t>
+            </a:r>
+          </a:p>
+        </p:txBody>
+      </p:sp>
+      <p:sp>
+        <p:nvSpPr>
+          <p:cNvPr id="13" name="TextBox 12"/>
+          <p:cNvSpPr txBox="1"/>
+          <p:nvPr/>
+        </p:nvSpPr>
+        <p:spPr>
+          <a:xfrm>
+            <a:off x="1234440" y="5186933"/>
+            <a:ext cx="10408615" cy="1030986"/>
+          </a:xfrm>
+          <a:prstGeom prst="rect">
+            <a:avLst/>
+          </a:prstGeom>
+          <a:noFill/>
+        </p:spPr>
+        <p:txBody>
+          <a:bodyPr wrap="square" anchor="t" lIns="0" rIns="0" tIns="0" bIns="0"/>
+          <a:lstStyle/>
+          <a:p>
+            <a:pPr algn="l"/>
+            <a:r>
+              <a:rPr sz="1800" b="0" i="0">
+                <a:solidFill>
+                  <a:srgbClr val="54595D"/>
+                </a:solidFill>
+                <a:latin typeface="Calibri"/>
+              </a:rPr>
+              <a:t>Which CIA property does a DDoS attack target?</a:t>
+            </a:r>
+          </a:p>
+          <a:p>
+            <a:r>
+              <a:rPr sz="1800" b="1">
+                <a:solidFill>
+                  <a:srgbClr val="03306E"/>
+                </a:solidFill>
+                <a:latin typeface="Calibri"/>
+              </a:rPr>
+              <a:t>Availability.</a:t>
+            </a:r>
+          </a:p>
+        </p:txBody>
+      </p:sp>
+    </p:spTree>
+  </p:cSld>
+  <p:clrMapOvr>
+    <a:masterClrMapping/>
+  </p:clrMapOvr>
+</p:sld>
+</file>
+
+<file path=ppt/slides/slide15.xml><?xml version="1.0" encoding="utf-8"?>
+<p:sld xmlns:a="http://schemas.openxmlformats.org/drawingml/2006/main" xmlns:p="http://schemas.openxmlformats.org/presentationml/2006/main" xmlns:r="http://schemas.openxmlformats.org/officeDocument/2006/relationships">
+  <p:cSld>
+    <p:bg>
+      <p:bgPr>
+        <a:solidFill>
+          <a:srgbClr val="FFFFFF"/>
+        </a:solidFill>
+        <a:effectLst/>
+      </p:bgPr>
+    </p:bg>
+    <p:spTree>
+      <p:nvGrpSpPr>
+        <p:cNvPr id="1" name=""/>
+        <p:cNvGrpSpPr/>
+        <p:nvPr/>
+      </p:nvGrpSpPr>
+      <p:grpSpPr/>
+      <p:sp>
+        <p:nvSpPr>
+          <p:cNvPr id="2" name="TextBox 1"/>
+          <p:cNvSpPr txBox="1"/>
+          <p:nvPr/>
+        </p:nvSpPr>
+        <p:spPr>
+          <a:xfrm>
+            <a:off x="548640" y="320040"/>
+            <a:ext cx="11094415" cy="274320"/>
+          </a:xfrm>
+          <a:prstGeom prst="rect">
+            <a:avLst/>
+          </a:prstGeom>
+          <a:noFill/>
+        </p:spPr>
+        <p:txBody>
+          <a:bodyPr wrap="square" anchor="t" lIns="0" rIns="0" tIns="0" bIns="0"/>
+          <a:lstStyle/>
+          <a:p>
+            <a:pPr algn="l"/>
+            <a:r>
+              <a:rPr sz="1100" b="1" i="0">
+                <a:solidFill>
+                  <a:srgbClr val="54595D"/>
+                </a:solidFill>
+                <a:latin typeface="Calibri"/>
+              </a:rPr>
+              <a:t>CORE COMPONENT  ·  Core Paper 2</a:t>
+            </a:r>
+          </a:p>
+        </p:txBody>
+      </p:sp>
+      <p:sp>
+        <p:nvSpPr>
+          <p:cNvPr id="3" name="TextBox 2"/>
+          <p:cNvSpPr txBox="1"/>
+          <p:nvPr/>
+        </p:nvSpPr>
+        <p:spPr>
+          <a:xfrm>
+            <a:off x="548640" y="566928"/>
+            <a:ext cx="11094415" cy="822960"/>
+          </a:xfrm>
+          <a:prstGeom prst="rect">
+            <a:avLst/>
+          </a:prstGeom>
+          <a:noFill/>
+        </p:spPr>
+        <p:txBody>
+          <a:bodyPr wrap="square" anchor="ctr" lIns="0" rIns="0" tIns="0" bIns="0"/>
+          <a:lstStyle/>
+          <a:p>
+            <a:pPr algn="l"/>
+            <a:r>
+              <a:rPr sz="3200" b="1" i="0">
+                <a:solidFill>
+                  <a:srgbClr val="03306E"/>
+                </a:solidFill>
+                <a:latin typeface="Cambria"/>
+              </a:rPr>
+              <a:t>Activity: Design secure accounts</a:t>
+            </a:r>
+          </a:p>
+        </p:txBody>
+      </p:sp>
+      <p:sp>
+        <p:nvSpPr>
+          <p:cNvPr id="4" name="TextBox 3"/>
+          <p:cNvSpPr txBox="1"/>
+          <p:nvPr/>
+        </p:nvSpPr>
+        <p:spPr>
+          <a:xfrm>
+            <a:off x="548640" y="6446520"/>
+            <a:ext cx="8229600" cy="274320"/>
+          </a:xfrm>
+          <a:prstGeom prst="rect">
+            <a:avLst/>
+          </a:prstGeom>
+          <a:noFill/>
+        </p:spPr>
+        <p:txBody>
+          <a:bodyPr wrap="square" anchor="t" lIns="0" rIns="0" tIns="0" bIns="0"/>
+          <a:lstStyle/>
+          <a:p>
+            <a:pPr algn="l"/>
+            <a:r>
+              <a:rPr sz="1000" b="0" i="0">
+                <a:solidFill>
+                  <a:srgbClr val="54595D"/>
+                </a:solidFill>
+                <a:latin typeface="Calibri"/>
+              </a:rPr>
+              <a:t>Digital Software Development T Level  ·  Threat Mitigation, the CIA Triad and IAAA</a:t>
+            </a:r>
+          </a:p>
+        </p:txBody>
+      </p:sp>
+      <p:sp>
+        <p:nvSpPr>
+          <p:cNvPr id="5" name="TextBox 4"/>
+          <p:cNvSpPr txBox="1"/>
+          <p:nvPr/>
+        </p:nvSpPr>
+        <p:spPr>
+          <a:xfrm>
+            <a:off x="10728655" y="6446520"/>
+            <a:ext cx="914400" cy="274320"/>
+          </a:xfrm>
+          <a:prstGeom prst="rect">
+            <a:avLst/>
+          </a:prstGeom>
+          <a:noFill/>
+        </p:spPr>
+        <p:txBody>
+          <a:bodyPr wrap="square" anchor="t" lIns="0" rIns="0" tIns="0" bIns="0"/>
+          <a:lstStyle/>
+          <a:p>
+            <a:pPr algn="r"/>
+            <a:r>
+              <a:rPr sz="1000" b="0" i="0">
+                <a:solidFill>
+                  <a:srgbClr val="54595D"/>
+                </a:solidFill>
+                <a:latin typeface="Calibri"/>
+              </a:rPr>
+              <a:t>15</a:t>
+            </a:r>
+          </a:p>
+        </p:txBody>
+      </p:sp>
+      <p:sp>
+        <p:nvSpPr>
+          <p:cNvPr id="6" name="Rounded Rectangle 5"/>
+          <p:cNvSpPr/>
+          <p:nvPr/>
+        </p:nvSpPr>
+        <p:spPr>
+          <a:xfrm>
+            <a:off x="548640" y="1508760"/>
+            <a:ext cx="2011680" cy="457200"/>
+          </a:xfrm>
+          <a:prstGeom prst="roundRect">
+            <a:avLst>
+              <a:gd name="adj" fmla="val 50000"/>
+            </a:avLst>
+          </a:prstGeom>
+          <a:solidFill>
+            <a:srgbClr val="F2B705"/>
+          </a:solidFill>
+          <a:ln>
+            <a:noFill/>
+          </a:ln>
+          <a:effectLst/>
+        </p:spPr>
+        <p:style>
+          <a:lnRef idx="1">
+            <a:schemeClr val="accent1"/>
+          </a:lnRef>
+          <a:fillRef idx="3">
+            <a:schemeClr val="accent1"/>
+          </a:fillRef>
+          <a:effectRef idx="2">
+            <a:schemeClr val="accent1"/>
+          </a:effectRef>
+          <a:fontRef idx="minor">
+            <a:schemeClr val="lt1"/>
+          </a:fontRef>
+        </p:style>
+        <p:txBody>
+          <a:bodyPr rtlCol="0" anchor="ctr"/>
+          <a:lstStyle/>
+          <a:p/>
+        </p:txBody>
+      </p:sp>
+      <p:sp>
+        <p:nvSpPr>
+          <p:cNvPr id="7" name="TextBox 6"/>
+          <p:cNvSpPr txBox="1"/>
+          <p:nvPr/>
+        </p:nvSpPr>
+        <p:spPr>
+          <a:xfrm>
+            <a:off x="548640" y="1508760"/>
+            <a:ext cx="2011680" cy="457200"/>
+          </a:xfrm>
+          <a:prstGeom prst="rect">
+            <a:avLst/>
+          </a:prstGeom>
+          <a:noFill/>
+        </p:spPr>
+        <p:txBody>
+          <a:bodyPr wrap="square" anchor="ctr" lIns="0" rIns="0" tIns="0" bIns="0"/>
+          <a:lstStyle/>
+          <a:p>
+            <a:pPr algn="ctr"/>
+            <a:r>
+              <a:rPr sz="1400" b="1" i="0">
+                <a:solidFill>
+                  <a:srgbClr val="202122"/>
+                </a:solidFill>
+                <a:latin typeface="Calibri"/>
+              </a:rPr>
+              <a:t>25 minutes</a:t>
+            </a:r>
+          </a:p>
+        </p:txBody>
+      </p:sp>
+      <p:sp>
+        <p:nvSpPr>
+          <p:cNvPr id="8" name="TextBox 7"/>
+          <p:cNvSpPr txBox="1"/>
+          <p:nvPr/>
+        </p:nvSpPr>
+        <p:spPr>
+          <a:xfrm>
+            <a:off x="2743200" y="1508760"/>
+            <a:ext cx="4754880" cy="457200"/>
+          </a:xfrm>
+          <a:prstGeom prst="rect">
+            <a:avLst/>
+          </a:prstGeom>
+          <a:noFill/>
+        </p:spPr>
+        <p:txBody>
+          <a:bodyPr wrap="square" anchor="ctr" lIns="0" rIns="0" tIns="0" bIns="0"/>
+          <a:lstStyle/>
+          <a:p>
+            <a:pPr algn="l"/>
+            <a:r>
+              <a:rPr sz="1400" b="0" i="1">
+                <a:solidFill>
+                  <a:srgbClr val="54595D"/>
+                </a:solidFill>
+                <a:latin typeface="Calibri"/>
+              </a:rPr>
+              <a:t>Small groups</a:t>
+            </a:r>
+          </a:p>
+        </p:txBody>
+      </p:sp>
+      <p:sp>
+        <p:nvSpPr>
+          <p:cNvPr id="9" name="Oval 8"/>
+          <p:cNvSpPr/>
+          <p:nvPr/>
+        </p:nvSpPr>
+        <p:spPr>
+          <a:xfrm>
+            <a:off x="548640" y="2482596"/>
+            <a:ext cx="384048" cy="384048"/>
+          </a:xfrm>
+          <a:prstGeom prst="ellipse">
+            <a:avLst/>
+          </a:prstGeom>
+          <a:solidFill>
+            <a:srgbClr val="0645AD"/>
+          </a:solidFill>
+          <a:ln>
+            <a:noFill/>
+          </a:ln>
+          <a:effectLst/>
+        </p:spPr>
+        <p:style>
+          <a:lnRef idx="1">
+            <a:schemeClr val="accent1"/>
+          </a:lnRef>
+          <a:fillRef idx="3">
+            <a:schemeClr val="accent1"/>
+          </a:fillRef>
+          <a:effectRef idx="2">
+            <a:schemeClr val="accent1"/>
+          </a:effectRef>
+          <a:fontRef idx="minor">
+            <a:schemeClr val="lt1"/>
+          </a:fontRef>
+        </p:style>
+        <p:txBody>
+          <a:bodyPr rtlCol="0" anchor="ctr" lIns="0" rIns="0" tIns="0" bIns="0"/>
+          <a:lstStyle/>
+          <a:p>
+            <a:pPr algn="ctr"/>
+            <a:r>
+              <a:rPr sz="1300" b="1">
+                <a:solidFill>
+                  <a:srgbClr val="FFFFFF"/>
+                </a:solidFill>
+                <a:latin typeface="Calibri"/>
+              </a:rPr>
+              <a:t>1</a:t>
+            </a:r>
+          </a:p>
+        </p:txBody>
+      </p:sp>
+      <p:sp>
+        <p:nvSpPr>
+          <p:cNvPr id="10" name="TextBox 9"/>
+          <p:cNvSpPr txBox="1"/>
+          <p:nvPr/>
+        </p:nvSpPr>
+        <p:spPr>
+          <a:xfrm>
+            <a:off x="1143000" y="2240280"/>
+            <a:ext cx="5943600" cy="868680"/>
+          </a:xfrm>
+          <a:prstGeom prst="rect">
+            <a:avLst/>
+          </a:prstGeom>
+          <a:noFill/>
+        </p:spPr>
+        <p:txBody>
+          <a:bodyPr wrap="square" anchor="ctr" lIns="0" rIns="0" tIns="0" bIns="0"/>
+          <a:lstStyle/>
+          <a:p>
+            <a:pPr algn="l"/>
+            <a:r>
+              <a:rPr sz="1700" b="0" i="0">
+                <a:solidFill>
+                  <a:srgbClr val="202122"/>
+                </a:solidFill>
+                <a:latin typeface="Calibri"/>
+              </a:rPr>
+              <a:t>Design the account system for a school revision app.</a:t>
+            </a:r>
+          </a:p>
+        </p:txBody>
+      </p:sp>
+      <p:sp>
+        <p:nvSpPr>
+          <p:cNvPr id="11" name="Oval 10"/>
+          <p:cNvSpPr/>
+          <p:nvPr/>
+        </p:nvSpPr>
+        <p:spPr>
+          <a:xfrm>
+            <a:off x="548640" y="3461004"/>
+            <a:ext cx="384048" cy="384048"/>
+          </a:xfrm>
+          <a:prstGeom prst="ellipse">
+            <a:avLst/>
+          </a:prstGeom>
+          <a:solidFill>
+            <a:srgbClr val="0645AD"/>
+          </a:solidFill>
+          <a:ln>
+            <a:noFill/>
+          </a:ln>
+          <a:effectLst/>
+        </p:spPr>
+        <p:style>
+          <a:lnRef idx="1">
+            <a:schemeClr val="accent1"/>
+          </a:lnRef>
+          <a:fillRef idx="3">
+            <a:schemeClr val="accent1"/>
+          </a:fillRef>
+          <a:effectRef idx="2">
+            <a:schemeClr val="accent1"/>
+          </a:effectRef>
+          <a:fontRef idx="minor">
+            <a:schemeClr val="lt1"/>
+          </a:fontRef>
+        </p:style>
+        <p:txBody>
+          <a:bodyPr rtlCol="0" anchor="ctr" lIns="0" rIns="0" tIns="0" bIns="0"/>
+          <a:lstStyle/>
+          <a:p>
+            <a:pPr algn="ctr"/>
+            <a:r>
+              <a:rPr sz="1300" b="1">
+                <a:solidFill>
+                  <a:srgbClr val="FFFFFF"/>
+                </a:solidFill>
+                <a:latin typeface="Calibri"/>
+              </a:rPr>
+              <a:t>2</a:t>
+            </a:r>
+          </a:p>
+        </p:txBody>
+      </p:sp>
+      <p:sp>
+        <p:nvSpPr>
+          <p:cNvPr id="12" name="TextBox 11"/>
+          <p:cNvSpPr txBox="1"/>
+          <p:nvPr/>
+        </p:nvSpPr>
+        <p:spPr>
+          <a:xfrm>
+            <a:off x="1143000" y="3218688"/>
+            <a:ext cx="5943600" cy="868680"/>
+          </a:xfrm>
+          <a:prstGeom prst="rect">
+            <a:avLst/>
+          </a:prstGeom>
+          <a:noFill/>
+        </p:spPr>
+        <p:txBody>
+          <a:bodyPr wrap="square" anchor="ctr" lIns="0" rIns="0" tIns="0" bIns="0"/>
+          <a:lstStyle/>
+          <a:p>
+            <a:pPr algn="l"/>
+            <a:r>
+              <a:rPr sz="1700" b="0" i="0">
+                <a:solidFill>
+                  <a:srgbClr val="202122"/>
+                </a:solidFill>
+                <a:latin typeface="Calibri"/>
+              </a:rPr>
+              <a:t>Map each IAAA stage to a feature.</a:t>
+            </a:r>
+          </a:p>
+        </p:txBody>
+      </p:sp>
+      <p:sp>
+        <p:nvSpPr>
+          <p:cNvPr id="13" name="Oval 12"/>
+          <p:cNvSpPr/>
+          <p:nvPr/>
+        </p:nvSpPr>
+        <p:spPr>
+          <a:xfrm>
+            <a:off x="548640" y="4439412"/>
+            <a:ext cx="384048" cy="384048"/>
+          </a:xfrm>
+          <a:prstGeom prst="ellipse">
+            <a:avLst/>
+          </a:prstGeom>
+          <a:solidFill>
+            <a:srgbClr val="0645AD"/>
+          </a:solidFill>
+          <a:ln>
+            <a:noFill/>
+          </a:ln>
+          <a:effectLst/>
+        </p:spPr>
+        <p:style>
+          <a:lnRef idx="1">
+            <a:schemeClr val="accent1"/>
+          </a:lnRef>
+          <a:fillRef idx="3">
+            <a:schemeClr val="accent1"/>
+          </a:fillRef>
+          <a:effectRef idx="2">
+            <a:schemeClr val="accent1"/>
+          </a:effectRef>
+          <a:fontRef idx="minor">
+            <a:schemeClr val="lt1"/>
+          </a:fontRef>
+        </p:style>
+        <p:txBody>
+          <a:bodyPr rtlCol="0" anchor="ctr" lIns="0" rIns="0" tIns="0" bIns="0"/>
+          <a:lstStyle/>
+          <a:p>
+            <a:pPr algn="ctr"/>
+            <a:r>
+              <a:rPr sz="1300" b="1">
+                <a:solidFill>
+                  <a:srgbClr val="FFFFFF"/>
+                </a:solidFill>
+                <a:latin typeface="Calibri"/>
+              </a:rPr>
+              <a:t>3</a:t>
+            </a:r>
+          </a:p>
+        </p:txBody>
+      </p:sp>
+      <p:sp>
+        <p:nvSpPr>
+          <p:cNvPr id="14" name="TextBox 13"/>
+          <p:cNvSpPr txBox="1"/>
+          <p:nvPr/>
+        </p:nvSpPr>
+        <p:spPr>
+          <a:xfrm>
+            <a:off x="1143000" y="4197096"/>
+            <a:ext cx="5943600" cy="868680"/>
+          </a:xfrm>
+          <a:prstGeom prst="rect">
+            <a:avLst/>
+          </a:prstGeom>
+          <a:noFill/>
+        </p:spPr>
+        <p:txBody>
+          <a:bodyPr wrap="square" anchor="ctr" lIns="0" rIns="0" tIns="0" bIns="0"/>
+          <a:lstStyle/>
+          <a:p>
+            <a:pPr algn="l"/>
+            <a:r>
+              <a:rPr sz="1700" b="0" i="0">
+                <a:solidFill>
+                  <a:srgbClr val="202122"/>
+                </a:solidFill>
+                <a:latin typeface="Calibri"/>
+              </a:rPr>
+              <a:t>Link each feature to C, I or A.</a:t>
+            </a:r>
+          </a:p>
+        </p:txBody>
+      </p:sp>
+      <p:sp>
+        <p:nvSpPr>
+          <p:cNvPr id="15" name="Oval 14"/>
+          <p:cNvSpPr/>
+          <p:nvPr/>
+        </p:nvSpPr>
+        <p:spPr>
+          <a:xfrm>
+            <a:off x="548640" y="5417820"/>
+            <a:ext cx="384048" cy="384048"/>
+          </a:xfrm>
+          <a:prstGeom prst="ellipse">
+            <a:avLst/>
+          </a:prstGeom>
+          <a:solidFill>
+            <a:srgbClr val="0645AD"/>
+          </a:solidFill>
+          <a:ln>
+            <a:noFill/>
+          </a:ln>
+          <a:effectLst/>
+        </p:spPr>
+        <p:style>
+          <a:lnRef idx="1">
+            <a:schemeClr val="accent1"/>
+          </a:lnRef>
+          <a:fillRef idx="3">
+            <a:schemeClr val="accent1"/>
+          </a:fillRef>
+          <a:effectRef idx="2">
+            <a:schemeClr val="accent1"/>
+          </a:effectRef>
+          <a:fontRef idx="minor">
+            <a:schemeClr val="lt1"/>
+          </a:fontRef>
+        </p:style>
+        <p:txBody>
+          <a:bodyPr rtlCol="0" anchor="ctr" lIns="0" rIns="0" tIns="0" bIns="0"/>
+          <a:lstStyle/>
+          <a:p>
+            <a:pPr algn="ctr"/>
+            <a:r>
+              <a:rPr sz="1300" b="1">
+                <a:solidFill>
+                  <a:srgbClr val="FFFFFF"/>
+                </a:solidFill>
+                <a:latin typeface="Calibri"/>
+              </a:rPr>
+              <a:t>4</a:t>
+            </a:r>
+          </a:p>
+        </p:txBody>
+      </p:sp>
+      <p:sp>
+        <p:nvSpPr>
+          <p:cNvPr id="16" name="TextBox 15"/>
+          <p:cNvSpPr txBox="1"/>
+          <p:nvPr/>
+        </p:nvSpPr>
+        <p:spPr>
+          <a:xfrm>
+            <a:off x="1143000" y="5175504"/>
+            <a:ext cx="5943600" cy="868680"/>
+          </a:xfrm>
+          <a:prstGeom prst="rect">
+            <a:avLst/>
+          </a:prstGeom>
+          <a:noFill/>
+        </p:spPr>
+        <p:txBody>
+          <a:bodyPr wrap="square" anchor="ctr" lIns="0" rIns="0" tIns="0" bIns="0"/>
+          <a:lstStyle/>
+          <a:p>
+            <a:pPr algn="l"/>
+            <a:r>
+              <a:rPr sz="1700" b="0" i="0">
+                <a:solidFill>
+                  <a:srgbClr val="202122"/>
+                </a:solidFill>
+                <a:latin typeface="Calibri"/>
+              </a:rPr>
+              <a:t>Choose two mitigation techniques for the server.</a:t>
+            </a:r>
+          </a:p>
+        </p:txBody>
+      </p:sp>
+      <p:sp>
+        <p:nvSpPr>
+          <p:cNvPr id="17" name="Rounded Rectangle 16"/>
+          <p:cNvSpPr/>
+          <p:nvPr/>
+        </p:nvSpPr>
+        <p:spPr>
+          <a:xfrm>
+            <a:off x="7772400" y="1508760"/>
+            <a:ext cx="3867912" cy="4572000"/>
+          </a:xfrm>
+          <a:prstGeom prst="roundRect">
+            <a:avLst>
+              <a:gd name="adj" fmla="val 8000"/>
+            </a:avLst>
+          </a:prstGeom>
+          <a:solidFill>
+            <a:srgbClr val="EAF3FF"/>
+          </a:solidFill>
+          <a:ln>
+            <a:noFill/>
+          </a:ln>
+          <a:effectLst/>
+        </p:spPr>
+        <p:style>
+          <a:lnRef idx="1">
+            <a:schemeClr val="accent1"/>
+          </a:lnRef>
+          <a:fillRef idx="3">
+            <a:schemeClr val="accent1"/>
+          </a:fillRef>
+          <a:effectRef idx="2">
+            <a:schemeClr val="accent1"/>
+          </a:effectRef>
+          <a:fontRef idx="minor">
+            <a:schemeClr val="lt1"/>
+          </a:fontRef>
+        </p:style>
+        <p:txBody>
+          <a:bodyPr rtlCol="0" anchor="ctr"/>
+          <a:lstStyle/>
+          <a:p/>
+        </p:txBody>
+      </p:sp>
+      <p:sp>
+        <p:nvSpPr>
+          <p:cNvPr id="18" name="TextBox 17"/>
+          <p:cNvSpPr txBox="1"/>
+          <p:nvPr/>
+        </p:nvSpPr>
+        <p:spPr>
+          <a:xfrm>
+            <a:off x="8046720" y="1737360"/>
+            <a:ext cx="3291840" cy="365760"/>
+          </a:xfrm>
+          <a:prstGeom prst="rect">
+            <a:avLst/>
+          </a:prstGeom>
+          <a:noFill/>
+        </p:spPr>
+        <p:txBody>
+          <a:bodyPr wrap="square" anchor="t" lIns="0" rIns="0" tIns="0" bIns="0"/>
+          <a:lstStyle/>
+          <a:p>
+            <a:pPr algn="l"/>
+            <a:r>
+              <a:rPr sz="1300" b="1" i="0">
+                <a:solidFill>
+                  <a:srgbClr val="0645AD"/>
+                </a:solidFill>
+                <a:latin typeface="Calibri"/>
+              </a:rPr>
+              <a:t>SUCCESS CRITERIA</a:t>
+            </a:r>
+          </a:p>
+        </p:txBody>
+      </p:sp>
+      <p:sp>
+        <p:nvSpPr>
+          <p:cNvPr id="19" name="TextBox 18"/>
+          <p:cNvSpPr txBox="1"/>
+          <p:nvPr/>
+        </p:nvSpPr>
+        <p:spPr>
+          <a:xfrm>
+            <a:off x="8046720" y="2240280"/>
+            <a:ext cx="3337560" cy="3657600"/>
+          </a:xfrm>
+          <a:prstGeom prst="rect">
+            <a:avLst/>
+          </a:prstGeom>
+          <a:noFill/>
+        </p:spPr>
+        <p:txBody>
+          <a:bodyPr wrap="square" lIns="0" rIns="0" tIns="0" bIns="0">
+            <a:spAutoFit/>
+          </a:bodyPr>
+          <a:lstStyle/>
+          <a:p>
+            <a:pPr marL="274320" indent="-274320">
+              <a:spcAft>
+                <a:spcPts val="810"/>
+              </a:spcAft>
+              <a:buClr>
+                <a:srgbClr val="0645AD"/>
+              </a:buClr>
+              <a:buFont typeface="Arial"/>
+              <a:buChar char="•"/>
+            </a:pPr>
+            <a:r>
+              <a:rPr sz="1800" b="0">
+                <a:solidFill>
+                  <a:srgbClr val="202122"/>
+                </a:solidFill>
+                <a:latin typeface="Calibri"/>
+              </a:rPr>
+              <a:t>All four IAAA stages covered</a:t>
+            </a:r>
+          </a:p>
+          <a:p>
+            <a:pPr marL="274320" indent="-274320">
+              <a:spcAft>
+                <a:spcPts val="810"/>
+              </a:spcAft>
+              <a:buClr>
+                <a:srgbClr val="0645AD"/>
+              </a:buClr>
+              <a:buFont typeface="Arial"/>
+              <a:buChar char="•"/>
+            </a:pPr>
+            <a:r>
+              <a:rPr sz="1800" b="0">
+                <a:solidFill>
+                  <a:srgbClr val="202122"/>
+                </a:solidFill>
+                <a:latin typeface="Calibri"/>
+              </a:rPr>
+              <a:t>Passwords hashed</a:t>
+            </a:r>
+          </a:p>
+          <a:p>
+            <a:pPr marL="274320" indent="-274320">
+              <a:spcAft>
+                <a:spcPts val="810"/>
+              </a:spcAft>
+              <a:buClr>
+                <a:srgbClr val="0645AD"/>
+              </a:buClr>
+              <a:buFont typeface="Arial"/>
+              <a:buChar char="•"/>
+            </a:pPr>
+            <a:r>
+              <a:rPr sz="1800" b="0">
+                <a:solidFill>
+                  <a:srgbClr val="202122"/>
+                </a:solidFill>
+                <a:latin typeface="Calibri"/>
+              </a:rPr>
+              <a:t>Audit logging included</a:t>
+            </a:r>
+          </a:p>
+        </p:txBody>
+      </p:sp>
+    </p:spTree>
+  </p:cSld>
+  <p:clrMapOvr>
+    <a:masterClrMapping/>
+  </p:clrMapOvr>
+</p:sld>
+</file>
+
+<file path=ppt/slides/slide16.xml><?xml version="1.0" encoding="utf-8"?>
+<p:sld xmlns:a="http://schemas.openxmlformats.org/drawingml/2006/main" xmlns:p="http://schemas.openxmlformats.org/presentationml/2006/main" xmlns:r="http://schemas.openxmlformats.org/officeDocument/2006/relationships">
+  <p:cSld>
+    <p:bg>
+      <p:bgPr>
+        <a:solidFill>
           <a:srgbClr val="03306E"/>
         </a:solidFill>
         <a:effectLst/>
@@ -5299,22 +9085,77 @@
       </p:sp>
       <p:sp>
         <p:nvSpPr>
-          <p:cNvPr id="6" name="Rounded Rectangle 5"/>
+          <p:cNvPr id="6" name="TextBox 5"/>
+          <p:cNvSpPr txBox="1"/>
+          <p:nvPr/>
+        </p:nvSpPr>
+        <p:spPr>
+          <a:xfrm>
+            <a:off x="548640" y="1554480"/>
+            <a:ext cx="6720840" cy="4617720"/>
+          </a:xfrm>
+          <a:prstGeom prst="rect">
+            <a:avLst/>
+          </a:prstGeom>
+          <a:noFill/>
+        </p:spPr>
+        <p:txBody>
+          <a:bodyPr wrap="square" lIns="0" rIns="0" tIns="0" bIns="0">
+            <a:spAutoFit/>
+          </a:bodyPr>
+          <a:lstStyle/>
+          <a:p>
+            <a:pPr>
+              <a:spcAft>
+                <a:spcPts val="1320"/>
+              </a:spcAft>
+            </a:pPr>
+            <a:r>
+              <a:rPr sz="2200" b="0">
+                <a:solidFill>
+                  <a:srgbClr val="202122"/>
+                </a:solidFill>
+                <a:latin typeface="Calibri"/>
+              </a:rPr>
+              <a:t>Layered defences protect systems.</a:t>
+            </a:r>
+          </a:p>
+          <a:p>
+            <a:pPr>
+              <a:spcAft>
+                <a:spcPts val="1320"/>
+              </a:spcAft>
+            </a:pPr>
+            <a:r>
+              <a:rPr sz="2200" b="0">
+                <a:solidFill>
+                  <a:srgbClr val="202122"/>
+                </a:solidFill>
+                <a:latin typeface="Calibri"/>
+              </a:rPr>
+              <a:t>Protect devices with security settings, anti-malware, hardening and updates. Control access with access policies, MFA and password managers. Protect data with encryption: hashing (one way, for passwords), symmetric (one shared key) and asymmetric (a public and private key pair); and back it up. Protect networks with intrusion detection, VPNs, air gaps and certified APIs. Vet and train staff, and test defences with port scanning and ethical penetration testing.</a:t>
+            </a:r>
+          </a:p>
+        </p:txBody>
+      </p:sp>
+      <p:sp>
+        <p:nvSpPr>
+          <p:cNvPr id="7" name="Rounded Rectangle 6"/>
           <p:cNvSpPr/>
           <p:nvPr/>
         </p:nvSpPr>
         <p:spPr>
           <a:xfrm>
-            <a:off x="548640" y="1600200"/>
-            <a:ext cx="3515258" cy="2148840"/>
+            <a:off x="7772400" y="1554480"/>
+            <a:ext cx="3867912" cy="4526280"/>
           </a:xfrm>
           <a:prstGeom prst="roundRect">
             <a:avLst>
-              <a:gd name="adj" fmla="val 6000"/>
+              <a:gd name="adj" fmla="val 8000"/>
             </a:avLst>
           </a:prstGeom>
           <a:solidFill>
-            <a:srgbClr val="EAF3FF"/>
+            <a:srgbClr val="03306E"/>
           </a:solidFill>
           <a:ln>
             <a:noFill/>
@@ -5343,14 +9184,14 @@
       </p:sp>
       <p:sp>
         <p:nvSpPr>
-          <p:cNvPr id="7" name="Oval 6"/>
+          <p:cNvPr id="8" name="Oval 7"/>
           <p:cNvSpPr/>
           <p:nvPr/>
         </p:nvSpPr>
         <p:spPr>
           <a:xfrm>
-            <a:off x="777240" y="1828800"/>
-            <a:ext cx="457200" cy="457200"/>
+            <a:off x="8046720" y="1828800"/>
+            <a:ext cx="548640" cy="548640"/>
           </a:xfrm>
           <a:prstGeom prst="ellipse">
             <a:avLst/>
@@ -5383,60 +9224,60 @@
           <a:p>
             <a:pPr algn="ctr"/>
             <a:r>
-              <a:rPr sz="1500" b="1">
+              <a:rPr sz="1300" b="1">
                 <a:solidFill>
                   <a:srgbClr val="202122"/>
                 </a:solidFill>
                 <a:latin typeface="Calibri"/>
               </a:rPr>
-              <a:t>1</a:t>
-            </a:r>
-          </a:p>
-        </p:txBody>
-      </p:sp>
-      <p:sp>
-        <p:nvSpPr>
-          <p:cNvPr id="8" name="TextBox 7"/>
-          <p:cNvSpPr txBox="1"/>
-          <p:nvPr/>
-        </p:nvSpPr>
-        <p:spPr>
-          <a:xfrm>
-            <a:off x="1371600" y="1801368"/>
-            <a:ext cx="2509418" cy="512064"/>
-          </a:xfrm>
-          <a:prstGeom prst="rect">
-            <a:avLst/>
-          </a:prstGeom>
-          <a:noFill/>
-        </p:spPr>
-        <p:txBody>
-          <a:bodyPr wrap="square" anchor="ctr" lIns="0" rIns="0" tIns="0" bIns="0"/>
+              <a:t>e.g.</a:t>
+            </a:r>
+          </a:p>
+        </p:txBody>
+      </p:sp>
+      <p:sp>
+        <p:nvSpPr>
+          <p:cNvPr id="9" name="TextBox 8"/>
+          <p:cNvSpPr txBox="1"/>
+          <p:nvPr/>
+        </p:nvSpPr>
+        <p:spPr>
+          <a:xfrm>
+            <a:off x="8046720" y="2560320"/>
+            <a:ext cx="3291840" cy="365760"/>
+          </a:xfrm>
+          <a:prstGeom prst="rect">
+            <a:avLst/>
+          </a:prstGeom>
+          <a:noFill/>
+        </p:spPr>
+        <p:txBody>
+          <a:bodyPr wrap="square" anchor="t" lIns="0" rIns="0" tIns="0" bIns="0"/>
           <a:lstStyle/>
           <a:p>
             <a:pPr algn="l"/>
             <a:r>
-              <a:rPr sz="1900" b="1" i="0">
-                <a:solidFill>
-                  <a:srgbClr val="03306E"/>
-                </a:solidFill>
-                <a:latin typeface="Calibri"/>
-              </a:rPr>
-              <a:t>Protect devices</a:t>
-            </a:r>
-          </a:p>
-        </p:txBody>
-      </p:sp>
-      <p:sp>
-        <p:nvSpPr>
-          <p:cNvPr id="9" name="TextBox 8"/>
-          <p:cNvSpPr txBox="1"/>
-          <p:nvPr/>
-        </p:nvSpPr>
-        <p:spPr>
-          <a:xfrm>
-            <a:off x="777240" y="2468880"/>
-            <a:ext cx="3058058" cy="1143000"/>
+              <a:rPr sz="1300" b="1" i="0">
+                <a:solidFill>
+                  <a:srgbClr val="A9C8F0"/>
+                </a:solidFill>
+                <a:latin typeface="Calibri"/>
+              </a:rPr>
+              <a:t>EXAMPLE</a:t>
+            </a:r>
+          </a:p>
+        </p:txBody>
+      </p:sp>
+      <p:sp>
+        <p:nvSpPr>
+          <p:cNvPr id="10" name="TextBox 9"/>
+          <p:cNvSpPr txBox="1"/>
+          <p:nvPr/>
+        </p:nvSpPr>
+        <p:spPr>
+          <a:xfrm>
+            <a:off x="8046720" y="2971800"/>
+            <a:ext cx="3291840" cy="2971800"/>
           </a:xfrm>
           <a:prstGeom prst="rect">
             <a:avLst/>
@@ -5449,828 +9290,13 @@
           <a:p>
             <a:pPr algn="l"/>
             <a:r>
-              <a:rPr sz="2000" b="0" i="0">
-                <a:solidFill>
-                  <a:srgbClr val="202122"/>
-                </a:solidFill>
-                <a:latin typeface="Calibri"/>
-              </a:rPr>
-              <a:t>Security settings, anti-malware, hardening, updates.</a:t>
-            </a:r>
-          </a:p>
-        </p:txBody>
-      </p:sp>
-      <p:sp>
-        <p:nvSpPr>
-          <p:cNvPr id="10" name="Rounded Rectangle 9"/>
-          <p:cNvSpPr/>
-          <p:nvPr/>
-        </p:nvSpPr>
-        <p:spPr>
-          <a:xfrm>
-            <a:off x="4338218" y="1600200"/>
-            <a:ext cx="3515258" cy="2148840"/>
-          </a:xfrm>
-          <a:prstGeom prst="roundRect">
-            <a:avLst>
-              <a:gd name="adj" fmla="val 6000"/>
-            </a:avLst>
-          </a:prstGeom>
-          <a:solidFill>
-            <a:srgbClr val="EAF3FF"/>
-          </a:solidFill>
-          <a:ln>
-            <a:noFill/>
-          </a:ln>
-          <a:effectLst/>
-        </p:spPr>
-        <p:style>
-          <a:lnRef idx="1">
-            <a:schemeClr val="accent1"/>
-          </a:lnRef>
-          <a:fillRef idx="3">
-            <a:schemeClr val="accent1"/>
-          </a:fillRef>
-          <a:effectRef idx="2">
-            <a:schemeClr val="accent1"/>
-          </a:effectRef>
-          <a:fontRef idx="minor">
-            <a:schemeClr val="lt1"/>
-          </a:fontRef>
-        </p:style>
-        <p:txBody>
-          <a:bodyPr rtlCol="0" anchor="ctr"/>
-          <a:lstStyle/>
-          <a:p/>
-        </p:txBody>
-      </p:sp>
-      <p:sp>
-        <p:nvSpPr>
-          <p:cNvPr id="11" name="Oval 10"/>
-          <p:cNvSpPr/>
-          <p:nvPr/>
-        </p:nvSpPr>
-        <p:spPr>
-          <a:xfrm>
-            <a:off x="4566818" y="1828800"/>
-            <a:ext cx="457200" cy="457200"/>
-          </a:xfrm>
-          <a:prstGeom prst="ellipse">
-            <a:avLst/>
-          </a:prstGeom>
-          <a:solidFill>
-            <a:srgbClr val="F2B705"/>
-          </a:solidFill>
-          <a:ln>
-            <a:noFill/>
-          </a:ln>
-          <a:effectLst/>
-        </p:spPr>
-        <p:style>
-          <a:lnRef idx="1">
-            <a:schemeClr val="accent1"/>
-          </a:lnRef>
-          <a:fillRef idx="3">
-            <a:schemeClr val="accent1"/>
-          </a:fillRef>
-          <a:effectRef idx="2">
-            <a:schemeClr val="accent1"/>
-          </a:effectRef>
-          <a:fontRef idx="minor">
-            <a:schemeClr val="lt1"/>
-          </a:fontRef>
-        </p:style>
-        <p:txBody>
-          <a:bodyPr rtlCol="0" anchor="ctr" lIns="0" rIns="0" tIns="0" bIns="0"/>
-          <a:lstStyle/>
-          <a:p>
-            <a:pPr algn="ctr"/>
-            <a:r>
-              <a:rPr sz="1500" b="1">
-                <a:solidFill>
-                  <a:srgbClr val="202122"/>
-                </a:solidFill>
-                <a:latin typeface="Calibri"/>
-              </a:rPr>
-              <a:t>2</a:t>
-            </a:r>
-          </a:p>
-        </p:txBody>
-      </p:sp>
-      <p:sp>
-        <p:nvSpPr>
-          <p:cNvPr id="12" name="TextBox 11"/>
-          <p:cNvSpPr txBox="1"/>
-          <p:nvPr/>
-        </p:nvSpPr>
-        <p:spPr>
-          <a:xfrm>
-            <a:off x="5161178" y="1801368"/>
-            <a:ext cx="2509418" cy="512064"/>
-          </a:xfrm>
-          <a:prstGeom prst="rect">
-            <a:avLst/>
-          </a:prstGeom>
-          <a:noFill/>
-        </p:spPr>
-        <p:txBody>
-          <a:bodyPr wrap="square" anchor="ctr" lIns="0" rIns="0" tIns="0" bIns="0"/>
-          <a:lstStyle/>
-          <a:p>
-            <a:pPr algn="l"/>
-            <a:r>
-              <a:rPr sz="1900" b="1" i="0">
-                <a:solidFill>
-                  <a:srgbClr val="03306E"/>
-                </a:solidFill>
-                <a:latin typeface="Calibri"/>
-              </a:rPr>
-              <a:t>Control access</a:t>
-            </a:r>
-          </a:p>
-        </p:txBody>
-      </p:sp>
-      <p:sp>
-        <p:nvSpPr>
-          <p:cNvPr id="13" name="TextBox 12"/>
-          <p:cNvSpPr txBox="1"/>
-          <p:nvPr/>
-        </p:nvSpPr>
-        <p:spPr>
-          <a:xfrm>
-            <a:off x="4566818" y="2468880"/>
-            <a:ext cx="3058058" cy="1143000"/>
-          </a:xfrm>
-          <a:prstGeom prst="rect">
-            <a:avLst/>
-          </a:prstGeom>
-          <a:noFill/>
-        </p:spPr>
-        <p:txBody>
-          <a:bodyPr wrap="square" anchor="t" lIns="0" rIns="0" tIns="0" bIns="0"/>
-          <a:lstStyle/>
-          <a:p>
-            <a:pPr algn="l"/>
-            <a:r>
-              <a:rPr sz="2000" b="0" i="0">
-                <a:solidFill>
-                  <a:srgbClr val="202122"/>
-                </a:solidFill>
-                <a:latin typeface="Calibri"/>
-              </a:rPr>
-              <a:t>Access policies, MFA, password managers.</a:t>
-            </a:r>
-          </a:p>
-        </p:txBody>
-      </p:sp>
-      <p:sp>
-        <p:nvSpPr>
-          <p:cNvPr id="14" name="Rounded Rectangle 13"/>
-          <p:cNvSpPr/>
-          <p:nvPr/>
-        </p:nvSpPr>
-        <p:spPr>
-          <a:xfrm>
-            <a:off x="8127796" y="1600200"/>
-            <a:ext cx="3515258" cy="2148840"/>
-          </a:xfrm>
-          <a:prstGeom prst="roundRect">
-            <a:avLst>
-              <a:gd name="adj" fmla="val 6000"/>
-            </a:avLst>
-          </a:prstGeom>
-          <a:solidFill>
-            <a:srgbClr val="EAF3FF"/>
-          </a:solidFill>
-          <a:ln>
-            <a:noFill/>
-          </a:ln>
-          <a:effectLst/>
-        </p:spPr>
-        <p:style>
-          <a:lnRef idx="1">
-            <a:schemeClr val="accent1"/>
-          </a:lnRef>
-          <a:fillRef idx="3">
-            <a:schemeClr val="accent1"/>
-          </a:fillRef>
-          <a:effectRef idx="2">
-            <a:schemeClr val="accent1"/>
-          </a:effectRef>
-          <a:fontRef idx="minor">
-            <a:schemeClr val="lt1"/>
-          </a:fontRef>
-        </p:style>
-        <p:txBody>
-          <a:bodyPr rtlCol="0" anchor="ctr"/>
-          <a:lstStyle/>
-          <a:p/>
-        </p:txBody>
-      </p:sp>
-      <p:sp>
-        <p:nvSpPr>
-          <p:cNvPr id="15" name="Oval 14"/>
-          <p:cNvSpPr/>
-          <p:nvPr/>
-        </p:nvSpPr>
-        <p:spPr>
-          <a:xfrm>
-            <a:off x="8356396" y="1828800"/>
-            <a:ext cx="457200" cy="457200"/>
-          </a:xfrm>
-          <a:prstGeom prst="ellipse">
-            <a:avLst/>
-          </a:prstGeom>
-          <a:solidFill>
-            <a:srgbClr val="F2B705"/>
-          </a:solidFill>
-          <a:ln>
-            <a:noFill/>
-          </a:ln>
-          <a:effectLst/>
-        </p:spPr>
-        <p:style>
-          <a:lnRef idx="1">
-            <a:schemeClr val="accent1"/>
-          </a:lnRef>
-          <a:fillRef idx="3">
-            <a:schemeClr val="accent1"/>
-          </a:fillRef>
-          <a:effectRef idx="2">
-            <a:schemeClr val="accent1"/>
-          </a:effectRef>
-          <a:fontRef idx="minor">
-            <a:schemeClr val="lt1"/>
-          </a:fontRef>
-        </p:style>
-        <p:txBody>
-          <a:bodyPr rtlCol="0" anchor="ctr" lIns="0" rIns="0" tIns="0" bIns="0"/>
-          <a:lstStyle/>
-          <a:p>
-            <a:pPr algn="ctr"/>
-            <a:r>
-              <a:rPr sz="1500" b="1">
-                <a:solidFill>
-                  <a:srgbClr val="202122"/>
-                </a:solidFill>
-                <a:latin typeface="Calibri"/>
-              </a:rPr>
-              <a:t>3</a:t>
-            </a:r>
-          </a:p>
-        </p:txBody>
-      </p:sp>
-      <p:sp>
-        <p:nvSpPr>
-          <p:cNvPr id="16" name="TextBox 15"/>
-          <p:cNvSpPr txBox="1"/>
-          <p:nvPr/>
-        </p:nvSpPr>
-        <p:spPr>
-          <a:xfrm>
-            <a:off x="8950756" y="1801368"/>
-            <a:ext cx="2509418" cy="512064"/>
-          </a:xfrm>
-          <a:prstGeom prst="rect">
-            <a:avLst/>
-          </a:prstGeom>
-          <a:noFill/>
-        </p:spPr>
-        <p:txBody>
-          <a:bodyPr wrap="square" anchor="ctr" lIns="0" rIns="0" tIns="0" bIns="0"/>
-          <a:lstStyle/>
-          <a:p>
-            <a:pPr algn="l"/>
-            <a:r>
-              <a:rPr sz="1900" b="1" i="0">
-                <a:solidFill>
-                  <a:srgbClr val="03306E"/>
-                </a:solidFill>
-                <a:latin typeface="Calibri"/>
-              </a:rPr>
-              <a:t>Protect data</a:t>
-            </a:r>
-          </a:p>
-        </p:txBody>
-      </p:sp>
-      <p:sp>
-        <p:nvSpPr>
-          <p:cNvPr id="17" name="TextBox 16"/>
-          <p:cNvSpPr txBox="1"/>
-          <p:nvPr/>
-        </p:nvSpPr>
-        <p:spPr>
-          <a:xfrm>
-            <a:off x="8356396" y="2468880"/>
-            <a:ext cx="3058058" cy="1143000"/>
-          </a:xfrm>
-          <a:prstGeom prst="rect">
-            <a:avLst/>
-          </a:prstGeom>
-          <a:noFill/>
-        </p:spPr>
-        <p:txBody>
-          <a:bodyPr wrap="square" anchor="t" lIns="0" rIns="0" tIns="0" bIns="0"/>
-          <a:lstStyle/>
-          <a:p>
-            <a:pPr algn="l"/>
-            <a:r>
-              <a:rPr sz="2000" b="0" i="0">
-                <a:solidFill>
-                  <a:srgbClr val="202122"/>
-                </a:solidFill>
-                <a:latin typeface="Calibri"/>
-              </a:rPr>
-              <a:t>Hashing, symmetric and asymmetric encryption; backups.</a:t>
-            </a:r>
-          </a:p>
-        </p:txBody>
-      </p:sp>
-      <p:sp>
-        <p:nvSpPr>
-          <p:cNvPr id="18" name="Rounded Rectangle 17"/>
-          <p:cNvSpPr/>
-          <p:nvPr/>
-        </p:nvSpPr>
-        <p:spPr>
-          <a:xfrm>
-            <a:off x="548640" y="4023360"/>
-            <a:ext cx="3515258" cy="2148840"/>
-          </a:xfrm>
-          <a:prstGeom prst="roundRect">
-            <a:avLst>
-              <a:gd name="adj" fmla="val 6000"/>
-            </a:avLst>
-          </a:prstGeom>
-          <a:solidFill>
-            <a:srgbClr val="EAF3FF"/>
-          </a:solidFill>
-          <a:ln>
-            <a:noFill/>
-          </a:ln>
-          <a:effectLst/>
-        </p:spPr>
-        <p:style>
-          <a:lnRef idx="1">
-            <a:schemeClr val="accent1"/>
-          </a:lnRef>
-          <a:fillRef idx="3">
-            <a:schemeClr val="accent1"/>
-          </a:fillRef>
-          <a:effectRef idx="2">
-            <a:schemeClr val="accent1"/>
-          </a:effectRef>
-          <a:fontRef idx="minor">
-            <a:schemeClr val="lt1"/>
-          </a:fontRef>
-        </p:style>
-        <p:txBody>
-          <a:bodyPr rtlCol="0" anchor="ctr"/>
-          <a:lstStyle/>
-          <a:p/>
-        </p:txBody>
-      </p:sp>
-      <p:sp>
-        <p:nvSpPr>
-          <p:cNvPr id="19" name="Oval 18"/>
-          <p:cNvSpPr/>
-          <p:nvPr/>
-        </p:nvSpPr>
-        <p:spPr>
-          <a:xfrm>
-            <a:off x="777240" y="4251960"/>
-            <a:ext cx="457200" cy="457200"/>
-          </a:xfrm>
-          <a:prstGeom prst="ellipse">
-            <a:avLst/>
-          </a:prstGeom>
-          <a:solidFill>
-            <a:srgbClr val="F2B705"/>
-          </a:solidFill>
-          <a:ln>
-            <a:noFill/>
-          </a:ln>
-          <a:effectLst/>
-        </p:spPr>
-        <p:style>
-          <a:lnRef idx="1">
-            <a:schemeClr val="accent1"/>
-          </a:lnRef>
-          <a:fillRef idx="3">
-            <a:schemeClr val="accent1"/>
-          </a:fillRef>
-          <a:effectRef idx="2">
-            <a:schemeClr val="accent1"/>
-          </a:effectRef>
-          <a:fontRef idx="minor">
-            <a:schemeClr val="lt1"/>
-          </a:fontRef>
-        </p:style>
-        <p:txBody>
-          <a:bodyPr rtlCol="0" anchor="ctr" lIns="0" rIns="0" tIns="0" bIns="0"/>
-          <a:lstStyle/>
-          <a:p>
-            <a:pPr algn="ctr"/>
-            <a:r>
-              <a:rPr sz="1500" b="1">
-                <a:solidFill>
-                  <a:srgbClr val="202122"/>
-                </a:solidFill>
-                <a:latin typeface="Calibri"/>
-              </a:rPr>
-              <a:t>4</a:t>
-            </a:r>
-          </a:p>
-        </p:txBody>
-      </p:sp>
-      <p:sp>
-        <p:nvSpPr>
-          <p:cNvPr id="20" name="TextBox 19"/>
-          <p:cNvSpPr txBox="1"/>
-          <p:nvPr/>
-        </p:nvSpPr>
-        <p:spPr>
-          <a:xfrm>
-            <a:off x="1371600" y="4224528"/>
-            <a:ext cx="2509418" cy="512064"/>
-          </a:xfrm>
-          <a:prstGeom prst="rect">
-            <a:avLst/>
-          </a:prstGeom>
-          <a:noFill/>
-        </p:spPr>
-        <p:txBody>
-          <a:bodyPr wrap="square" anchor="ctr" lIns="0" rIns="0" tIns="0" bIns="0"/>
-          <a:lstStyle/>
-          <a:p>
-            <a:pPr algn="l"/>
-            <a:r>
-              <a:rPr sz="1900" b="1" i="0">
-                <a:solidFill>
-                  <a:srgbClr val="03306E"/>
-                </a:solidFill>
-                <a:latin typeface="Calibri"/>
-              </a:rPr>
-              <a:t>Protect networks</a:t>
-            </a:r>
-          </a:p>
-        </p:txBody>
-      </p:sp>
-      <p:sp>
-        <p:nvSpPr>
-          <p:cNvPr id="21" name="TextBox 20"/>
-          <p:cNvSpPr txBox="1"/>
-          <p:nvPr/>
-        </p:nvSpPr>
-        <p:spPr>
-          <a:xfrm>
-            <a:off x="777240" y="4892040"/>
-            <a:ext cx="3058058" cy="1143000"/>
-          </a:xfrm>
-          <a:prstGeom prst="rect">
-            <a:avLst/>
-          </a:prstGeom>
-          <a:noFill/>
-        </p:spPr>
-        <p:txBody>
-          <a:bodyPr wrap="square" anchor="t" lIns="0" rIns="0" tIns="0" bIns="0"/>
-          <a:lstStyle/>
-          <a:p>
-            <a:pPr algn="l"/>
-            <a:r>
-              <a:rPr sz="2000" b="0" i="0">
-                <a:solidFill>
-                  <a:srgbClr val="202122"/>
-                </a:solidFill>
-                <a:latin typeface="Calibri"/>
-              </a:rPr>
-              <a:t>Intrusion detection, VPNs, air gaps, API certification.</a:t>
-            </a:r>
-          </a:p>
-        </p:txBody>
-      </p:sp>
-      <p:sp>
-        <p:nvSpPr>
-          <p:cNvPr id="22" name="Rounded Rectangle 21"/>
-          <p:cNvSpPr/>
-          <p:nvPr/>
-        </p:nvSpPr>
-        <p:spPr>
-          <a:xfrm>
-            <a:off x="4338218" y="4023360"/>
-            <a:ext cx="3515258" cy="2148840"/>
-          </a:xfrm>
-          <a:prstGeom prst="roundRect">
-            <a:avLst>
-              <a:gd name="adj" fmla="val 6000"/>
-            </a:avLst>
-          </a:prstGeom>
-          <a:solidFill>
-            <a:srgbClr val="EAF3FF"/>
-          </a:solidFill>
-          <a:ln>
-            <a:noFill/>
-          </a:ln>
-          <a:effectLst/>
-        </p:spPr>
-        <p:style>
-          <a:lnRef idx="1">
-            <a:schemeClr val="accent1"/>
-          </a:lnRef>
-          <a:fillRef idx="3">
-            <a:schemeClr val="accent1"/>
-          </a:fillRef>
-          <a:effectRef idx="2">
-            <a:schemeClr val="accent1"/>
-          </a:effectRef>
-          <a:fontRef idx="minor">
-            <a:schemeClr val="lt1"/>
-          </a:fontRef>
-        </p:style>
-        <p:txBody>
-          <a:bodyPr rtlCol="0" anchor="ctr"/>
-          <a:lstStyle/>
-          <a:p/>
-        </p:txBody>
-      </p:sp>
-      <p:sp>
-        <p:nvSpPr>
-          <p:cNvPr id="23" name="Oval 22"/>
-          <p:cNvSpPr/>
-          <p:nvPr/>
-        </p:nvSpPr>
-        <p:spPr>
-          <a:xfrm>
-            <a:off x="4566818" y="4251960"/>
-            <a:ext cx="457200" cy="457200"/>
-          </a:xfrm>
-          <a:prstGeom prst="ellipse">
-            <a:avLst/>
-          </a:prstGeom>
-          <a:solidFill>
-            <a:srgbClr val="F2B705"/>
-          </a:solidFill>
-          <a:ln>
-            <a:noFill/>
-          </a:ln>
-          <a:effectLst/>
-        </p:spPr>
-        <p:style>
-          <a:lnRef idx="1">
-            <a:schemeClr val="accent1"/>
-          </a:lnRef>
-          <a:fillRef idx="3">
-            <a:schemeClr val="accent1"/>
-          </a:fillRef>
-          <a:effectRef idx="2">
-            <a:schemeClr val="accent1"/>
-          </a:effectRef>
-          <a:fontRef idx="minor">
-            <a:schemeClr val="lt1"/>
-          </a:fontRef>
-        </p:style>
-        <p:txBody>
-          <a:bodyPr rtlCol="0" anchor="ctr" lIns="0" rIns="0" tIns="0" bIns="0"/>
-          <a:lstStyle/>
-          <a:p>
-            <a:pPr algn="ctr"/>
-            <a:r>
-              <a:rPr sz="1500" b="1">
-                <a:solidFill>
-                  <a:srgbClr val="202122"/>
-                </a:solidFill>
-                <a:latin typeface="Calibri"/>
-              </a:rPr>
-              <a:t>5</a:t>
-            </a:r>
-          </a:p>
-        </p:txBody>
-      </p:sp>
-      <p:sp>
-        <p:nvSpPr>
-          <p:cNvPr id="24" name="TextBox 23"/>
-          <p:cNvSpPr txBox="1"/>
-          <p:nvPr/>
-        </p:nvSpPr>
-        <p:spPr>
-          <a:xfrm>
-            <a:off x="5161178" y="4224528"/>
-            <a:ext cx="2509418" cy="512064"/>
-          </a:xfrm>
-          <a:prstGeom prst="rect">
-            <a:avLst/>
-          </a:prstGeom>
-          <a:noFill/>
-        </p:spPr>
-        <p:txBody>
-          <a:bodyPr wrap="square" anchor="ctr" lIns="0" rIns="0" tIns="0" bIns="0"/>
-          <a:lstStyle/>
-          <a:p>
-            <a:pPr algn="l"/>
-            <a:r>
-              <a:rPr sz="1900" b="1" i="0">
-                <a:solidFill>
-                  <a:srgbClr val="03306E"/>
-                </a:solidFill>
-                <a:latin typeface="Calibri"/>
-              </a:rPr>
-              <a:t>People</a:t>
-            </a:r>
-          </a:p>
-        </p:txBody>
-      </p:sp>
-      <p:sp>
-        <p:nvSpPr>
-          <p:cNvPr id="25" name="TextBox 24"/>
-          <p:cNvSpPr txBox="1"/>
-          <p:nvPr/>
-        </p:nvSpPr>
-        <p:spPr>
-          <a:xfrm>
-            <a:off x="4566818" y="4892040"/>
-            <a:ext cx="3058058" cy="1143000"/>
-          </a:xfrm>
-          <a:prstGeom prst="rect">
-            <a:avLst/>
-          </a:prstGeom>
-          <a:noFill/>
-        </p:spPr>
-        <p:txBody>
-          <a:bodyPr wrap="square" anchor="t" lIns="0" rIns="0" tIns="0" bIns="0"/>
-          <a:lstStyle/>
-          <a:p>
-            <a:pPr algn="l"/>
-            <a:r>
-              <a:rPr sz="2000" b="0" i="0">
-                <a:solidFill>
-                  <a:srgbClr val="202122"/>
-                </a:solidFill>
-                <a:latin typeface="Calibri"/>
-              </a:rPr>
-              <a:t>Vetting and training.</a:t>
-            </a:r>
-          </a:p>
-        </p:txBody>
-      </p:sp>
-      <p:sp>
-        <p:nvSpPr>
-          <p:cNvPr id="26" name="Rounded Rectangle 25"/>
-          <p:cNvSpPr/>
-          <p:nvPr/>
-        </p:nvSpPr>
-        <p:spPr>
-          <a:xfrm>
-            <a:off x="8127796" y="4023360"/>
-            <a:ext cx="3515258" cy="2148840"/>
-          </a:xfrm>
-          <a:prstGeom prst="roundRect">
-            <a:avLst>
-              <a:gd name="adj" fmla="val 6000"/>
-            </a:avLst>
-          </a:prstGeom>
-          <a:solidFill>
-            <a:srgbClr val="EAF3FF"/>
-          </a:solidFill>
-          <a:ln>
-            <a:noFill/>
-          </a:ln>
-          <a:effectLst/>
-        </p:spPr>
-        <p:style>
-          <a:lnRef idx="1">
-            <a:schemeClr val="accent1"/>
-          </a:lnRef>
-          <a:fillRef idx="3">
-            <a:schemeClr val="accent1"/>
-          </a:fillRef>
-          <a:effectRef idx="2">
-            <a:schemeClr val="accent1"/>
-          </a:effectRef>
-          <a:fontRef idx="minor">
-            <a:schemeClr val="lt1"/>
-          </a:fontRef>
-        </p:style>
-        <p:txBody>
-          <a:bodyPr rtlCol="0" anchor="ctr"/>
-          <a:lstStyle/>
-          <a:p/>
-        </p:txBody>
-      </p:sp>
-      <p:sp>
-        <p:nvSpPr>
-          <p:cNvPr id="27" name="Oval 26"/>
-          <p:cNvSpPr/>
-          <p:nvPr/>
-        </p:nvSpPr>
-        <p:spPr>
-          <a:xfrm>
-            <a:off x="8356396" y="4251960"/>
-            <a:ext cx="457200" cy="457200"/>
-          </a:xfrm>
-          <a:prstGeom prst="ellipse">
-            <a:avLst/>
-          </a:prstGeom>
-          <a:solidFill>
-            <a:srgbClr val="F2B705"/>
-          </a:solidFill>
-          <a:ln>
-            <a:noFill/>
-          </a:ln>
-          <a:effectLst/>
-        </p:spPr>
-        <p:style>
-          <a:lnRef idx="1">
-            <a:schemeClr val="accent1"/>
-          </a:lnRef>
-          <a:fillRef idx="3">
-            <a:schemeClr val="accent1"/>
-          </a:fillRef>
-          <a:effectRef idx="2">
-            <a:schemeClr val="accent1"/>
-          </a:effectRef>
-          <a:fontRef idx="minor">
-            <a:schemeClr val="lt1"/>
-          </a:fontRef>
-        </p:style>
-        <p:txBody>
-          <a:bodyPr rtlCol="0" anchor="ctr" lIns="0" rIns="0" tIns="0" bIns="0"/>
-          <a:lstStyle/>
-          <a:p>
-            <a:pPr algn="ctr"/>
-            <a:r>
-              <a:rPr sz="1500" b="1">
-                <a:solidFill>
-                  <a:srgbClr val="202122"/>
-                </a:solidFill>
-                <a:latin typeface="Calibri"/>
-              </a:rPr>
-              <a:t>6</a:t>
-            </a:r>
-          </a:p>
-        </p:txBody>
-      </p:sp>
-      <p:sp>
-        <p:nvSpPr>
-          <p:cNvPr id="28" name="TextBox 27"/>
-          <p:cNvSpPr txBox="1"/>
-          <p:nvPr/>
-        </p:nvSpPr>
-        <p:spPr>
-          <a:xfrm>
-            <a:off x="8950756" y="4224528"/>
-            <a:ext cx="2509418" cy="512064"/>
-          </a:xfrm>
-          <a:prstGeom prst="rect">
-            <a:avLst/>
-          </a:prstGeom>
-          <a:noFill/>
-        </p:spPr>
-        <p:txBody>
-          <a:bodyPr wrap="square" anchor="ctr" lIns="0" rIns="0" tIns="0" bIns="0"/>
-          <a:lstStyle/>
-          <a:p>
-            <a:pPr algn="l"/>
-            <a:r>
-              <a:rPr sz="1900" b="1" i="0">
-                <a:solidFill>
-                  <a:srgbClr val="03306E"/>
-                </a:solidFill>
-                <a:latin typeface="Calibri"/>
-              </a:rPr>
-              <a:t>Test</a:t>
-            </a:r>
-          </a:p>
-        </p:txBody>
-      </p:sp>
-      <p:sp>
-        <p:nvSpPr>
-          <p:cNvPr id="29" name="TextBox 28"/>
-          <p:cNvSpPr txBox="1"/>
-          <p:nvPr/>
-        </p:nvSpPr>
-        <p:spPr>
-          <a:xfrm>
-            <a:off x="8356396" y="4892040"/>
-            <a:ext cx="3058058" cy="1143000"/>
-          </a:xfrm>
-          <a:prstGeom prst="rect">
-            <a:avLst/>
-          </a:prstGeom>
-          <a:noFill/>
-        </p:spPr>
-        <p:txBody>
-          <a:bodyPr wrap="square" anchor="t" lIns="0" rIns="0" tIns="0" bIns="0"/>
-          <a:lstStyle/>
-          <a:p>
-            <a:pPr algn="l"/>
-            <a:r>
-              <a:rPr sz="2000" b="0" i="0">
-                <a:solidFill>
-                  <a:srgbClr val="202122"/>
-                </a:solidFill>
-                <a:latin typeface="Calibri"/>
-              </a:rPr>
-              <a:t>Port scanning and ethical penetration testing.</a:t>
+              <a:rPr sz="1900" b="0" i="0">
+                <a:solidFill>
+                  <a:srgbClr val="FFFFFF"/>
+                </a:solidFill>
+                <a:latin typeface="Cambria"/>
+              </a:rPr>
+              <a:t>An API protected by HTTPS, API keys, rate limiting and input validation shrugs off most automated attacks.</a:t>
             </a:r>
           </a:p>
         </p:txBody>
@@ -6362,7 +9388,7 @@
                 </a:solidFill>
                 <a:latin typeface="Cambria"/>
               </a:rPr>
-              <a:t>Internet security processes</a:t>
+              <a:t>Mitigation techniques</a:t>
             </a:r>
           </a:p>
         </p:txBody>
@@ -6442,88 +9468,11 @@
         <p:spPr>
           <a:xfrm>
             <a:off x="548640" y="1600200"/>
-            <a:ext cx="5364327" cy="640080"/>
+            <a:ext cx="3515258" cy="2148840"/>
           </a:xfrm>
           <a:prstGeom prst="roundRect">
             <a:avLst>
-              <a:gd name="adj" fmla="val 15000"/>
-            </a:avLst>
-          </a:prstGeom>
-          <a:solidFill>
-            <a:srgbClr val="03306E"/>
-          </a:solidFill>
-          <a:ln>
-            <a:noFill/>
-          </a:ln>
-          <a:effectLst/>
-        </p:spPr>
-        <p:style>
-          <a:lnRef idx="1">
-            <a:schemeClr val="accent1"/>
-          </a:lnRef>
-          <a:fillRef idx="3">
-            <a:schemeClr val="accent1"/>
-          </a:fillRef>
-          <a:effectRef idx="2">
-            <a:schemeClr val="accent1"/>
-          </a:effectRef>
-          <a:fontRef idx="minor">
-            <a:schemeClr val="lt1"/>
-          </a:fontRef>
-        </p:style>
-        <p:txBody>
-          <a:bodyPr rtlCol="0" anchor="ctr"/>
-          <a:lstStyle/>
-          <a:p/>
-        </p:txBody>
-      </p:sp>
-      <p:sp>
-        <p:nvSpPr>
-          <p:cNvPr id="7" name="TextBox 6"/>
-          <p:cNvSpPr txBox="1"/>
-          <p:nvPr/>
-        </p:nvSpPr>
-        <p:spPr>
-          <a:xfrm>
-            <a:off x="777240" y="1600200"/>
-            <a:ext cx="4907127" cy="640080"/>
-          </a:xfrm>
-          <a:prstGeom prst="rect">
-            <a:avLst/>
-          </a:prstGeom>
-          <a:noFill/>
-        </p:spPr>
-        <p:txBody>
-          <a:bodyPr wrap="square" anchor="ctr" lIns="0" rIns="0" tIns="0" bIns="0"/>
-          <a:lstStyle/>
-          <a:p>
-            <a:pPr algn="l"/>
-            <a:r>
-              <a:rPr sz="2000" b="1" i="0">
-                <a:solidFill>
-                  <a:srgbClr val="FFFFFF"/>
-                </a:solidFill>
-                <a:latin typeface="Calibri"/>
-              </a:rPr>
-              <a:t>Firewall configuration</a:t>
-            </a:r>
-          </a:p>
-        </p:txBody>
-      </p:sp>
-      <p:sp>
-        <p:nvSpPr>
-          <p:cNvPr id="8" name="Rounded Rectangle 7"/>
-          <p:cNvSpPr/>
-          <p:nvPr/>
-        </p:nvSpPr>
-        <p:spPr>
-          <a:xfrm>
-            <a:off x="548640" y="2377440"/>
-            <a:ext cx="5364327" cy="3794760"/>
-          </a:xfrm>
-          <a:prstGeom prst="roundRect">
-            <a:avLst>
-              <a:gd name="adj" fmla="val 4000"/>
+              <a:gd name="adj" fmla="val 6000"/>
             </a:avLst>
           </a:prstGeom>
           <a:solidFill>
@@ -6556,129 +9505,20 @@
       </p:sp>
       <p:sp>
         <p:nvSpPr>
-          <p:cNvPr id="9" name="TextBox 8"/>
-          <p:cNvSpPr txBox="1"/>
-          <p:nvPr/>
-        </p:nvSpPr>
-        <p:spPr>
-          <a:xfrm>
-            <a:off x="822959" y="2606040"/>
-            <a:ext cx="4815687" cy="3337560"/>
-          </a:xfrm>
-          <a:prstGeom prst="rect">
-            <a:avLst/>
-          </a:prstGeom>
-          <a:noFill/>
-        </p:spPr>
-        <p:txBody>
-          <a:bodyPr wrap="square" lIns="0" rIns="0" tIns="0" bIns="0">
-            <a:spAutoFit/>
-          </a:bodyPr>
-          <a:lstStyle/>
-          <a:p>
-            <a:pPr marL="274320" indent="-274320">
-              <a:spcAft>
-                <a:spcPts val="990"/>
-              </a:spcAft>
-              <a:buClr>
-                <a:srgbClr val="0645AD"/>
-              </a:buClr>
-              <a:buFont typeface="Arial"/>
-              <a:buChar char="•"/>
-            </a:pPr>
-            <a:r>
-              <a:rPr sz="2200" b="0">
-                <a:solidFill>
-                  <a:srgbClr val="202122"/>
-                </a:solidFill>
-                <a:latin typeface="Calibri"/>
-              </a:rPr>
-              <a:t>Inbound and outbound rules</a:t>
-            </a:r>
-          </a:p>
-          <a:p>
-            <a:pPr marL="274320" indent="-274320">
-              <a:spcAft>
-                <a:spcPts val="990"/>
-              </a:spcAft>
-              <a:buClr>
-                <a:srgbClr val="0645AD"/>
-              </a:buClr>
-              <a:buFont typeface="Arial"/>
-              <a:buChar char="•"/>
-            </a:pPr>
-            <a:r>
-              <a:rPr sz="2200" b="0">
-                <a:solidFill>
-                  <a:srgbClr val="202122"/>
-                </a:solidFill>
-                <a:latin typeface="Calibri"/>
-              </a:rPr>
-              <a:t>Traffic type rules</a:t>
-            </a:r>
-          </a:p>
-          <a:p>
-            <a:pPr marL="274320" indent="-274320">
-              <a:spcAft>
-                <a:spcPts val="990"/>
-              </a:spcAft>
-              <a:buClr>
-                <a:srgbClr val="0645AD"/>
-              </a:buClr>
-              <a:buFont typeface="Arial"/>
-              <a:buChar char="•"/>
-            </a:pPr>
-            <a:r>
-              <a:rPr sz="2200" b="0">
-                <a:solidFill>
-                  <a:srgbClr val="202122"/>
-                </a:solidFill>
-                <a:latin typeface="Calibri"/>
-              </a:rPr>
-              <a:t>Application rules</a:t>
-            </a:r>
-          </a:p>
-          <a:p>
-            <a:pPr marL="274320" indent="-274320">
-              <a:spcAft>
-                <a:spcPts val="990"/>
-              </a:spcAft>
-              <a:buClr>
-                <a:srgbClr val="0645AD"/>
-              </a:buClr>
-              <a:buFont typeface="Arial"/>
-              <a:buChar char="•"/>
-            </a:pPr>
-            <a:r>
-              <a:rPr sz="2200" b="0">
-                <a:solidFill>
-                  <a:srgbClr val="202122"/>
-                </a:solidFill>
-                <a:latin typeface="Calibri"/>
-              </a:rPr>
-              <a:t>IP address rules</a:t>
-            </a:r>
-          </a:p>
-        </p:txBody>
-      </p:sp>
-      <p:sp>
-        <p:nvSpPr>
-          <p:cNvPr id="10" name="Rounded Rectangle 9"/>
+          <p:cNvPr id="7" name="Oval 6"/>
           <p:cNvSpPr/>
           <p:nvPr/>
         </p:nvSpPr>
         <p:spPr>
           <a:xfrm>
-            <a:off x="6278727" y="1600200"/>
-            <a:ext cx="5364327" cy="640080"/>
-          </a:xfrm>
-          <a:prstGeom prst="roundRect">
-            <a:avLst>
-              <a:gd name="adj" fmla="val 15000"/>
-            </a:avLst>
+            <a:off x="777240" y="1828800"/>
+            <a:ext cx="457200" cy="457200"/>
+          </a:xfrm>
+          <a:prstGeom prst="ellipse">
+            <a:avLst/>
           </a:prstGeom>
           <a:solidFill>
-            <a:srgbClr val="0645AD"/>
+            <a:srgbClr val="F2B705"/>
           </a:solidFill>
           <a:ln>
             <a:noFill/>
@@ -6700,21 +9540,32 @@
           </a:fontRef>
         </p:style>
         <p:txBody>
-          <a:bodyPr rtlCol="0" anchor="ctr"/>
-          <a:lstStyle/>
-          <a:p/>
-        </p:txBody>
-      </p:sp>
-      <p:sp>
-        <p:nvSpPr>
-          <p:cNvPr id="11" name="TextBox 10"/>
-          <p:cNvSpPr txBox="1"/>
-          <p:nvPr/>
-        </p:nvSpPr>
-        <p:spPr>
-          <a:xfrm>
-            <a:off x="6507327" y="1600200"/>
-            <a:ext cx="4907127" cy="640080"/>
+          <a:bodyPr rtlCol="0" anchor="ctr" lIns="0" rIns="0" tIns="0" bIns="0"/>
+          <a:lstStyle/>
+          <a:p>
+            <a:pPr algn="ctr"/>
+            <a:r>
+              <a:rPr sz="1500" b="1">
+                <a:solidFill>
+                  <a:srgbClr val="202122"/>
+                </a:solidFill>
+                <a:latin typeface="Calibri"/>
+              </a:rPr>
+              <a:t>1</a:t>
+            </a:r>
+          </a:p>
+        </p:txBody>
+      </p:sp>
+      <p:sp>
+        <p:nvSpPr>
+          <p:cNvPr id="8" name="TextBox 7"/>
+          <p:cNvSpPr txBox="1"/>
+          <p:nvPr/>
+        </p:nvSpPr>
+        <p:spPr>
+          <a:xfrm>
+            <a:off x="1371600" y="1801368"/>
+            <a:ext cx="2509418" cy="512064"/>
           </a:xfrm>
           <a:prstGeom prst="rect">
             <a:avLst/>
@@ -6727,31 +9578,64 @@
           <a:p>
             <a:pPr algn="l"/>
             <a:r>
-              <a:rPr sz="2000" b="1" i="0">
-                <a:solidFill>
-                  <a:srgbClr val="FFFFFF"/>
-                </a:solidFill>
-                <a:latin typeface="Calibri"/>
-              </a:rPr>
-              <a:t>Network protection</a:t>
-            </a:r>
-          </a:p>
-        </p:txBody>
-      </p:sp>
-      <p:sp>
-        <p:nvSpPr>
-          <p:cNvPr id="12" name="Rounded Rectangle 11"/>
+              <a:rPr sz="1900" b="1" i="0">
+                <a:solidFill>
+                  <a:srgbClr val="03306E"/>
+                </a:solidFill>
+                <a:latin typeface="Calibri"/>
+              </a:rPr>
+              <a:t>Protect devices</a:t>
+            </a:r>
+          </a:p>
+        </p:txBody>
+      </p:sp>
+      <p:sp>
+        <p:nvSpPr>
+          <p:cNvPr id="9" name="TextBox 8"/>
+          <p:cNvSpPr txBox="1"/>
+          <p:nvPr/>
+        </p:nvSpPr>
+        <p:spPr>
+          <a:xfrm>
+            <a:off x="777240" y="2468880"/>
+            <a:ext cx="3058058" cy="1143000"/>
+          </a:xfrm>
+          <a:prstGeom prst="rect">
+            <a:avLst/>
+          </a:prstGeom>
+          <a:noFill/>
+        </p:spPr>
+        <p:txBody>
+          <a:bodyPr wrap="square" anchor="t" lIns="0" rIns="0" tIns="0" bIns="0"/>
+          <a:lstStyle/>
+          <a:p>
+            <a:pPr algn="l"/>
+            <a:r>
+              <a:rPr sz="2000" b="0" i="0">
+                <a:solidFill>
+                  <a:srgbClr val="202122"/>
+                </a:solidFill>
+                <a:latin typeface="Calibri"/>
+              </a:rPr>
+              <a:t>Security settings, anti-malware, hardening, updates.</a:t>
+            </a:r>
+          </a:p>
+        </p:txBody>
+      </p:sp>
+      <p:sp>
+        <p:nvSpPr>
+          <p:cNvPr id="10" name="Rounded Rectangle 9"/>
           <p:cNvSpPr/>
           <p:nvPr/>
         </p:nvSpPr>
         <p:spPr>
           <a:xfrm>
-            <a:off x="6278727" y="2377440"/>
-            <a:ext cx="5364327" cy="3794760"/>
+            <a:off x="4338218" y="1600200"/>
+            <a:ext cx="3515258" cy="2148840"/>
           </a:xfrm>
           <a:prstGeom prst="roundRect">
             <a:avLst>
-              <a:gd name="adj" fmla="val 4000"/>
+              <a:gd name="adj" fmla="val 6000"/>
             </a:avLst>
           </a:prstGeom>
           <a:solidFill>
@@ -6784,95 +9668,771 @@
       </p:sp>
       <p:sp>
         <p:nvSpPr>
+          <p:cNvPr id="11" name="Oval 10"/>
+          <p:cNvSpPr/>
+          <p:nvPr/>
+        </p:nvSpPr>
+        <p:spPr>
+          <a:xfrm>
+            <a:off x="4566818" y="1828800"/>
+            <a:ext cx="457200" cy="457200"/>
+          </a:xfrm>
+          <a:prstGeom prst="ellipse">
+            <a:avLst/>
+          </a:prstGeom>
+          <a:solidFill>
+            <a:srgbClr val="F2B705"/>
+          </a:solidFill>
+          <a:ln>
+            <a:noFill/>
+          </a:ln>
+          <a:effectLst/>
+        </p:spPr>
+        <p:style>
+          <a:lnRef idx="1">
+            <a:schemeClr val="accent1"/>
+          </a:lnRef>
+          <a:fillRef idx="3">
+            <a:schemeClr val="accent1"/>
+          </a:fillRef>
+          <a:effectRef idx="2">
+            <a:schemeClr val="accent1"/>
+          </a:effectRef>
+          <a:fontRef idx="minor">
+            <a:schemeClr val="lt1"/>
+          </a:fontRef>
+        </p:style>
+        <p:txBody>
+          <a:bodyPr rtlCol="0" anchor="ctr" lIns="0" rIns="0" tIns="0" bIns="0"/>
+          <a:lstStyle/>
+          <a:p>
+            <a:pPr algn="ctr"/>
+            <a:r>
+              <a:rPr sz="1500" b="1">
+                <a:solidFill>
+                  <a:srgbClr val="202122"/>
+                </a:solidFill>
+                <a:latin typeface="Calibri"/>
+              </a:rPr>
+              <a:t>2</a:t>
+            </a:r>
+          </a:p>
+        </p:txBody>
+      </p:sp>
+      <p:sp>
+        <p:nvSpPr>
+          <p:cNvPr id="12" name="TextBox 11"/>
+          <p:cNvSpPr txBox="1"/>
+          <p:nvPr/>
+        </p:nvSpPr>
+        <p:spPr>
+          <a:xfrm>
+            <a:off x="5161178" y="1801368"/>
+            <a:ext cx="2509418" cy="512064"/>
+          </a:xfrm>
+          <a:prstGeom prst="rect">
+            <a:avLst/>
+          </a:prstGeom>
+          <a:noFill/>
+        </p:spPr>
+        <p:txBody>
+          <a:bodyPr wrap="square" anchor="ctr" lIns="0" rIns="0" tIns="0" bIns="0"/>
+          <a:lstStyle/>
+          <a:p>
+            <a:pPr algn="l"/>
+            <a:r>
+              <a:rPr sz="1900" b="1" i="0">
+                <a:solidFill>
+                  <a:srgbClr val="03306E"/>
+                </a:solidFill>
+                <a:latin typeface="Calibri"/>
+              </a:rPr>
+              <a:t>Control access</a:t>
+            </a:r>
+          </a:p>
+        </p:txBody>
+      </p:sp>
+      <p:sp>
+        <p:nvSpPr>
           <p:cNvPr id="13" name="TextBox 12"/>
           <p:cNvSpPr txBox="1"/>
           <p:nvPr/>
         </p:nvSpPr>
         <p:spPr>
           <a:xfrm>
-            <a:off x="6553047" y="2606040"/>
-            <a:ext cx="4815687" cy="3337560"/>
-          </a:xfrm>
-          <a:prstGeom prst="rect">
-            <a:avLst/>
-          </a:prstGeom>
-          <a:noFill/>
-        </p:spPr>
-        <p:txBody>
-          <a:bodyPr wrap="square" lIns="0" rIns="0" tIns="0" bIns="0">
-            <a:spAutoFit/>
-          </a:bodyPr>
-          <a:lstStyle/>
-          <a:p>
-            <a:pPr marL="274320" indent="-274320">
-              <a:spcAft>
-                <a:spcPts val="990"/>
-              </a:spcAft>
-              <a:buClr>
-                <a:srgbClr val="0645AD"/>
-              </a:buClr>
-              <a:buFont typeface="Arial"/>
-              <a:buChar char="•"/>
-            </a:pPr>
-            <a:r>
-              <a:rPr sz="2200" b="1">
+            <a:off x="4566818" y="2468880"/>
+            <a:ext cx="3058058" cy="1143000"/>
+          </a:xfrm>
+          <a:prstGeom prst="rect">
+            <a:avLst/>
+          </a:prstGeom>
+          <a:noFill/>
+        </p:spPr>
+        <p:txBody>
+          <a:bodyPr wrap="square" anchor="t" lIns="0" rIns="0" tIns="0" bIns="0"/>
+          <a:lstStyle/>
+          <a:p>
+            <a:pPr algn="l"/>
+            <a:r>
+              <a:rPr sz="2000" b="0" i="0">
                 <a:solidFill>
                   <a:srgbClr val="202122"/>
                 </a:solidFill>
                 <a:latin typeface="Calibri"/>
               </a:rPr>
-              <a:t>Segregation:</a:t>
-            </a:r>
-            <a:r>
-              <a:rPr sz="2200" b="0">
+              <a:t>Access policies, MFA, password managers.</a:t>
+            </a:r>
+          </a:p>
+        </p:txBody>
+      </p:sp>
+      <p:sp>
+        <p:nvSpPr>
+          <p:cNvPr id="14" name="Rounded Rectangle 13"/>
+          <p:cNvSpPr/>
+          <p:nvPr/>
+        </p:nvSpPr>
+        <p:spPr>
+          <a:xfrm>
+            <a:off x="8127796" y="1600200"/>
+            <a:ext cx="3515258" cy="2148840"/>
+          </a:xfrm>
+          <a:prstGeom prst="roundRect">
+            <a:avLst>
+              <a:gd name="adj" fmla="val 6000"/>
+            </a:avLst>
+          </a:prstGeom>
+          <a:solidFill>
+            <a:srgbClr val="EAF3FF"/>
+          </a:solidFill>
+          <a:ln>
+            <a:noFill/>
+          </a:ln>
+          <a:effectLst/>
+        </p:spPr>
+        <p:style>
+          <a:lnRef idx="1">
+            <a:schemeClr val="accent1"/>
+          </a:lnRef>
+          <a:fillRef idx="3">
+            <a:schemeClr val="accent1"/>
+          </a:fillRef>
+          <a:effectRef idx="2">
+            <a:schemeClr val="accent1"/>
+          </a:effectRef>
+          <a:fontRef idx="minor">
+            <a:schemeClr val="lt1"/>
+          </a:fontRef>
+        </p:style>
+        <p:txBody>
+          <a:bodyPr rtlCol="0" anchor="ctr"/>
+          <a:lstStyle/>
+          <a:p/>
+        </p:txBody>
+      </p:sp>
+      <p:sp>
+        <p:nvSpPr>
+          <p:cNvPr id="15" name="Oval 14"/>
+          <p:cNvSpPr/>
+          <p:nvPr/>
+        </p:nvSpPr>
+        <p:spPr>
+          <a:xfrm>
+            <a:off x="8356396" y="1828800"/>
+            <a:ext cx="457200" cy="457200"/>
+          </a:xfrm>
+          <a:prstGeom prst="ellipse">
+            <a:avLst/>
+          </a:prstGeom>
+          <a:solidFill>
+            <a:srgbClr val="F2B705"/>
+          </a:solidFill>
+          <a:ln>
+            <a:noFill/>
+          </a:ln>
+          <a:effectLst/>
+        </p:spPr>
+        <p:style>
+          <a:lnRef idx="1">
+            <a:schemeClr val="accent1"/>
+          </a:lnRef>
+          <a:fillRef idx="3">
+            <a:schemeClr val="accent1"/>
+          </a:fillRef>
+          <a:effectRef idx="2">
+            <a:schemeClr val="accent1"/>
+          </a:effectRef>
+          <a:fontRef idx="minor">
+            <a:schemeClr val="lt1"/>
+          </a:fontRef>
+        </p:style>
+        <p:txBody>
+          <a:bodyPr rtlCol="0" anchor="ctr" lIns="0" rIns="0" tIns="0" bIns="0"/>
+          <a:lstStyle/>
+          <a:p>
+            <a:pPr algn="ctr"/>
+            <a:r>
+              <a:rPr sz="1500" b="1">
                 <a:solidFill>
                   <a:srgbClr val="202122"/>
                 </a:solidFill>
                 <a:latin typeface="Calibri"/>
               </a:rPr>
-              <a:t> virtual, physical, offline</a:t>
-            </a:r>
-          </a:p>
-          <a:p>
-            <a:pPr marL="274320" indent="-274320">
-              <a:spcAft>
-                <a:spcPts val="990"/>
-              </a:spcAft>
-              <a:buClr>
-                <a:srgbClr val="0645AD"/>
-              </a:buClr>
-              <a:buFont typeface="Arial"/>
-              <a:buChar char="•"/>
-            </a:pPr>
-            <a:r>
-              <a:rPr sz="2200" b="0">
+              <a:t>3</a:t>
+            </a:r>
+          </a:p>
+        </p:txBody>
+      </p:sp>
+      <p:sp>
+        <p:nvSpPr>
+          <p:cNvPr id="16" name="TextBox 15"/>
+          <p:cNvSpPr txBox="1"/>
+          <p:nvPr/>
+        </p:nvSpPr>
+        <p:spPr>
+          <a:xfrm>
+            <a:off x="8950756" y="1801368"/>
+            <a:ext cx="2509418" cy="512064"/>
+          </a:xfrm>
+          <a:prstGeom prst="rect">
+            <a:avLst/>
+          </a:prstGeom>
+          <a:noFill/>
+        </p:spPr>
+        <p:txBody>
+          <a:bodyPr wrap="square" anchor="ctr" lIns="0" rIns="0" tIns="0" bIns="0"/>
+          <a:lstStyle/>
+          <a:p>
+            <a:pPr algn="l"/>
+            <a:r>
+              <a:rPr sz="1900" b="1" i="0">
+                <a:solidFill>
+                  <a:srgbClr val="03306E"/>
+                </a:solidFill>
+                <a:latin typeface="Calibri"/>
+              </a:rPr>
+              <a:t>Protect data</a:t>
+            </a:r>
+          </a:p>
+        </p:txBody>
+      </p:sp>
+      <p:sp>
+        <p:nvSpPr>
+          <p:cNvPr id="17" name="TextBox 16"/>
+          <p:cNvSpPr txBox="1"/>
+          <p:nvPr/>
+        </p:nvSpPr>
+        <p:spPr>
+          <a:xfrm>
+            <a:off x="8356396" y="2468880"/>
+            <a:ext cx="3058058" cy="1143000"/>
+          </a:xfrm>
+          <a:prstGeom prst="rect">
+            <a:avLst/>
+          </a:prstGeom>
+          <a:noFill/>
+        </p:spPr>
+        <p:txBody>
+          <a:bodyPr wrap="square" anchor="t" lIns="0" rIns="0" tIns="0" bIns="0"/>
+          <a:lstStyle/>
+          <a:p>
+            <a:pPr algn="l"/>
+            <a:r>
+              <a:rPr sz="2000" b="0" i="0">
                 <a:solidFill>
                   <a:srgbClr val="202122"/>
                 </a:solidFill>
                 <a:latin typeface="Calibri"/>
               </a:rPr>
-              <a:t>Network monitoring</a:t>
-            </a:r>
-          </a:p>
-          <a:p>
-            <a:pPr marL="274320" indent="-274320">
-              <a:spcAft>
-                <a:spcPts val="990"/>
-              </a:spcAft>
-              <a:buClr>
-                <a:srgbClr val="0645AD"/>
-              </a:buClr>
-              <a:buFont typeface="Arial"/>
-              <a:buChar char="•"/>
-            </a:pPr>
-            <a:r>
-              <a:rPr sz="2200" b="0">
+              <a:t>Hashing, symmetric and asymmetric encryption; backups.</a:t>
+            </a:r>
+          </a:p>
+        </p:txBody>
+      </p:sp>
+      <p:sp>
+        <p:nvSpPr>
+          <p:cNvPr id="18" name="Rounded Rectangle 17"/>
+          <p:cNvSpPr/>
+          <p:nvPr/>
+        </p:nvSpPr>
+        <p:spPr>
+          <a:xfrm>
+            <a:off x="548640" y="4023360"/>
+            <a:ext cx="3515258" cy="2148840"/>
+          </a:xfrm>
+          <a:prstGeom prst="roundRect">
+            <a:avLst>
+              <a:gd name="adj" fmla="val 6000"/>
+            </a:avLst>
+          </a:prstGeom>
+          <a:solidFill>
+            <a:srgbClr val="EAF3FF"/>
+          </a:solidFill>
+          <a:ln>
+            <a:noFill/>
+          </a:ln>
+          <a:effectLst/>
+        </p:spPr>
+        <p:style>
+          <a:lnRef idx="1">
+            <a:schemeClr val="accent1"/>
+          </a:lnRef>
+          <a:fillRef idx="3">
+            <a:schemeClr val="accent1"/>
+          </a:fillRef>
+          <a:effectRef idx="2">
+            <a:schemeClr val="accent1"/>
+          </a:effectRef>
+          <a:fontRef idx="minor">
+            <a:schemeClr val="lt1"/>
+          </a:fontRef>
+        </p:style>
+        <p:txBody>
+          <a:bodyPr rtlCol="0" anchor="ctr"/>
+          <a:lstStyle/>
+          <a:p/>
+        </p:txBody>
+      </p:sp>
+      <p:sp>
+        <p:nvSpPr>
+          <p:cNvPr id="19" name="Oval 18"/>
+          <p:cNvSpPr/>
+          <p:nvPr/>
+        </p:nvSpPr>
+        <p:spPr>
+          <a:xfrm>
+            <a:off x="777240" y="4251960"/>
+            <a:ext cx="457200" cy="457200"/>
+          </a:xfrm>
+          <a:prstGeom prst="ellipse">
+            <a:avLst/>
+          </a:prstGeom>
+          <a:solidFill>
+            <a:srgbClr val="F2B705"/>
+          </a:solidFill>
+          <a:ln>
+            <a:noFill/>
+          </a:ln>
+          <a:effectLst/>
+        </p:spPr>
+        <p:style>
+          <a:lnRef idx="1">
+            <a:schemeClr val="accent1"/>
+          </a:lnRef>
+          <a:fillRef idx="3">
+            <a:schemeClr val="accent1"/>
+          </a:fillRef>
+          <a:effectRef idx="2">
+            <a:schemeClr val="accent1"/>
+          </a:effectRef>
+          <a:fontRef idx="minor">
+            <a:schemeClr val="lt1"/>
+          </a:fontRef>
+        </p:style>
+        <p:txBody>
+          <a:bodyPr rtlCol="0" anchor="ctr" lIns="0" rIns="0" tIns="0" bIns="0"/>
+          <a:lstStyle/>
+          <a:p>
+            <a:pPr algn="ctr"/>
+            <a:r>
+              <a:rPr sz="1500" b="1">
                 <a:solidFill>
                   <a:srgbClr val="202122"/>
                 </a:solidFill>
                 <a:latin typeface="Calibri"/>
               </a:rPr>
-              <a:t>Port scanning</a:t>
+              <a:t>4</a:t>
+            </a:r>
+          </a:p>
+        </p:txBody>
+      </p:sp>
+      <p:sp>
+        <p:nvSpPr>
+          <p:cNvPr id="20" name="TextBox 19"/>
+          <p:cNvSpPr txBox="1"/>
+          <p:nvPr/>
+        </p:nvSpPr>
+        <p:spPr>
+          <a:xfrm>
+            <a:off x="1371600" y="4224528"/>
+            <a:ext cx="2509418" cy="512064"/>
+          </a:xfrm>
+          <a:prstGeom prst="rect">
+            <a:avLst/>
+          </a:prstGeom>
+          <a:noFill/>
+        </p:spPr>
+        <p:txBody>
+          <a:bodyPr wrap="square" anchor="ctr" lIns="0" rIns="0" tIns="0" bIns="0"/>
+          <a:lstStyle/>
+          <a:p>
+            <a:pPr algn="l"/>
+            <a:r>
+              <a:rPr sz="1900" b="1" i="0">
+                <a:solidFill>
+                  <a:srgbClr val="03306E"/>
+                </a:solidFill>
+                <a:latin typeface="Calibri"/>
+              </a:rPr>
+              <a:t>Protect networks</a:t>
+            </a:r>
+          </a:p>
+        </p:txBody>
+      </p:sp>
+      <p:sp>
+        <p:nvSpPr>
+          <p:cNvPr id="21" name="TextBox 20"/>
+          <p:cNvSpPr txBox="1"/>
+          <p:nvPr/>
+        </p:nvSpPr>
+        <p:spPr>
+          <a:xfrm>
+            <a:off x="777240" y="4892040"/>
+            <a:ext cx="3058058" cy="1143000"/>
+          </a:xfrm>
+          <a:prstGeom prst="rect">
+            <a:avLst/>
+          </a:prstGeom>
+          <a:noFill/>
+        </p:spPr>
+        <p:txBody>
+          <a:bodyPr wrap="square" anchor="t" lIns="0" rIns="0" tIns="0" bIns="0"/>
+          <a:lstStyle/>
+          <a:p>
+            <a:pPr algn="l"/>
+            <a:r>
+              <a:rPr sz="2000" b="0" i="0">
+                <a:solidFill>
+                  <a:srgbClr val="202122"/>
+                </a:solidFill>
+                <a:latin typeface="Calibri"/>
+              </a:rPr>
+              <a:t>Intrusion detection, VPNs, air gaps, API certification.</a:t>
+            </a:r>
+          </a:p>
+        </p:txBody>
+      </p:sp>
+      <p:sp>
+        <p:nvSpPr>
+          <p:cNvPr id="22" name="Rounded Rectangle 21"/>
+          <p:cNvSpPr/>
+          <p:nvPr/>
+        </p:nvSpPr>
+        <p:spPr>
+          <a:xfrm>
+            <a:off x="4338218" y="4023360"/>
+            <a:ext cx="3515258" cy="2148840"/>
+          </a:xfrm>
+          <a:prstGeom prst="roundRect">
+            <a:avLst>
+              <a:gd name="adj" fmla="val 6000"/>
+            </a:avLst>
+          </a:prstGeom>
+          <a:solidFill>
+            <a:srgbClr val="EAF3FF"/>
+          </a:solidFill>
+          <a:ln>
+            <a:noFill/>
+          </a:ln>
+          <a:effectLst/>
+        </p:spPr>
+        <p:style>
+          <a:lnRef idx="1">
+            <a:schemeClr val="accent1"/>
+          </a:lnRef>
+          <a:fillRef idx="3">
+            <a:schemeClr val="accent1"/>
+          </a:fillRef>
+          <a:effectRef idx="2">
+            <a:schemeClr val="accent1"/>
+          </a:effectRef>
+          <a:fontRef idx="minor">
+            <a:schemeClr val="lt1"/>
+          </a:fontRef>
+        </p:style>
+        <p:txBody>
+          <a:bodyPr rtlCol="0" anchor="ctr"/>
+          <a:lstStyle/>
+          <a:p/>
+        </p:txBody>
+      </p:sp>
+      <p:sp>
+        <p:nvSpPr>
+          <p:cNvPr id="23" name="Oval 22"/>
+          <p:cNvSpPr/>
+          <p:nvPr/>
+        </p:nvSpPr>
+        <p:spPr>
+          <a:xfrm>
+            <a:off x="4566818" y="4251960"/>
+            <a:ext cx="457200" cy="457200"/>
+          </a:xfrm>
+          <a:prstGeom prst="ellipse">
+            <a:avLst/>
+          </a:prstGeom>
+          <a:solidFill>
+            <a:srgbClr val="F2B705"/>
+          </a:solidFill>
+          <a:ln>
+            <a:noFill/>
+          </a:ln>
+          <a:effectLst/>
+        </p:spPr>
+        <p:style>
+          <a:lnRef idx="1">
+            <a:schemeClr val="accent1"/>
+          </a:lnRef>
+          <a:fillRef idx="3">
+            <a:schemeClr val="accent1"/>
+          </a:fillRef>
+          <a:effectRef idx="2">
+            <a:schemeClr val="accent1"/>
+          </a:effectRef>
+          <a:fontRef idx="minor">
+            <a:schemeClr val="lt1"/>
+          </a:fontRef>
+        </p:style>
+        <p:txBody>
+          <a:bodyPr rtlCol="0" anchor="ctr" lIns="0" rIns="0" tIns="0" bIns="0"/>
+          <a:lstStyle/>
+          <a:p>
+            <a:pPr algn="ctr"/>
+            <a:r>
+              <a:rPr sz="1500" b="1">
+                <a:solidFill>
+                  <a:srgbClr val="202122"/>
+                </a:solidFill>
+                <a:latin typeface="Calibri"/>
+              </a:rPr>
+              <a:t>5</a:t>
+            </a:r>
+          </a:p>
+        </p:txBody>
+      </p:sp>
+      <p:sp>
+        <p:nvSpPr>
+          <p:cNvPr id="24" name="TextBox 23"/>
+          <p:cNvSpPr txBox="1"/>
+          <p:nvPr/>
+        </p:nvSpPr>
+        <p:spPr>
+          <a:xfrm>
+            <a:off x="5161178" y="4224528"/>
+            <a:ext cx="2509418" cy="512064"/>
+          </a:xfrm>
+          <a:prstGeom prst="rect">
+            <a:avLst/>
+          </a:prstGeom>
+          <a:noFill/>
+        </p:spPr>
+        <p:txBody>
+          <a:bodyPr wrap="square" anchor="ctr" lIns="0" rIns="0" tIns="0" bIns="0"/>
+          <a:lstStyle/>
+          <a:p>
+            <a:pPr algn="l"/>
+            <a:r>
+              <a:rPr sz="1900" b="1" i="0">
+                <a:solidFill>
+                  <a:srgbClr val="03306E"/>
+                </a:solidFill>
+                <a:latin typeface="Calibri"/>
+              </a:rPr>
+              <a:t>People</a:t>
+            </a:r>
+          </a:p>
+        </p:txBody>
+      </p:sp>
+      <p:sp>
+        <p:nvSpPr>
+          <p:cNvPr id="25" name="TextBox 24"/>
+          <p:cNvSpPr txBox="1"/>
+          <p:nvPr/>
+        </p:nvSpPr>
+        <p:spPr>
+          <a:xfrm>
+            <a:off x="4566818" y="4892040"/>
+            <a:ext cx="3058058" cy="1143000"/>
+          </a:xfrm>
+          <a:prstGeom prst="rect">
+            <a:avLst/>
+          </a:prstGeom>
+          <a:noFill/>
+        </p:spPr>
+        <p:txBody>
+          <a:bodyPr wrap="square" anchor="t" lIns="0" rIns="0" tIns="0" bIns="0"/>
+          <a:lstStyle/>
+          <a:p>
+            <a:pPr algn="l"/>
+            <a:r>
+              <a:rPr sz="2000" b="0" i="0">
+                <a:solidFill>
+                  <a:srgbClr val="202122"/>
+                </a:solidFill>
+                <a:latin typeface="Calibri"/>
+              </a:rPr>
+              <a:t>Vetting and training.</a:t>
+            </a:r>
+          </a:p>
+        </p:txBody>
+      </p:sp>
+      <p:sp>
+        <p:nvSpPr>
+          <p:cNvPr id="26" name="Rounded Rectangle 25"/>
+          <p:cNvSpPr/>
+          <p:nvPr/>
+        </p:nvSpPr>
+        <p:spPr>
+          <a:xfrm>
+            <a:off x="8127796" y="4023360"/>
+            <a:ext cx="3515258" cy="2148840"/>
+          </a:xfrm>
+          <a:prstGeom prst="roundRect">
+            <a:avLst>
+              <a:gd name="adj" fmla="val 6000"/>
+            </a:avLst>
+          </a:prstGeom>
+          <a:solidFill>
+            <a:srgbClr val="EAF3FF"/>
+          </a:solidFill>
+          <a:ln>
+            <a:noFill/>
+          </a:ln>
+          <a:effectLst/>
+        </p:spPr>
+        <p:style>
+          <a:lnRef idx="1">
+            <a:schemeClr val="accent1"/>
+          </a:lnRef>
+          <a:fillRef idx="3">
+            <a:schemeClr val="accent1"/>
+          </a:fillRef>
+          <a:effectRef idx="2">
+            <a:schemeClr val="accent1"/>
+          </a:effectRef>
+          <a:fontRef idx="minor">
+            <a:schemeClr val="lt1"/>
+          </a:fontRef>
+        </p:style>
+        <p:txBody>
+          <a:bodyPr rtlCol="0" anchor="ctr"/>
+          <a:lstStyle/>
+          <a:p/>
+        </p:txBody>
+      </p:sp>
+      <p:sp>
+        <p:nvSpPr>
+          <p:cNvPr id="27" name="Oval 26"/>
+          <p:cNvSpPr/>
+          <p:nvPr/>
+        </p:nvSpPr>
+        <p:spPr>
+          <a:xfrm>
+            <a:off x="8356396" y="4251960"/>
+            <a:ext cx="457200" cy="457200"/>
+          </a:xfrm>
+          <a:prstGeom prst="ellipse">
+            <a:avLst/>
+          </a:prstGeom>
+          <a:solidFill>
+            <a:srgbClr val="F2B705"/>
+          </a:solidFill>
+          <a:ln>
+            <a:noFill/>
+          </a:ln>
+          <a:effectLst/>
+        </p:spPr>
+        <p:style>
+          <a:lnRef idx="1">
+            <a:schemeClr val="accent1"/>
+          </a:lnRef>
+          <a:fillRef idx="3">
+            <a:schemeClr val="accent1"/>
+          </a:fillRef>
+          <a:effectRef idx="2">
+            <a:schemeClr val="accent1"/>
+          </a:effectRef>
+          <a:fontRef idx="minor">
+            <a:schemeClr val="lt1"/>
+          </a:fontRef>
+        </p:style>
+        <p:txBody>
+          <a:bodyPr rtlCol="0" anchor="ctr" lIns="0" rIns="0" tIns="0" bIns="0"/>
+          <a:lstStyle/>
+          <a:p>
+            <a:pPr algn="ctr"/>
+            <a:r>
+              <a:rPr sz="1500" b="1">
+                <a:solidFill>
+                  <a:srgbClr val="202122"/>
+                </a:solidFill>
+                <a:latin typeface="Calibri"/>
+              </a:rPr>
+              <a:t>6</a:t>
+            </a:r>
+          </a:p>
+        </p:txBody>
+      </p:sp>
+      <p:sp>
+        <p:nvSpPr>
+          <p:cNvPr id="28" name="TextBox 27"/>
+          <p:cNvSpPr txBox="1"/>
+          <p:nvPr/>
+        </p:nvSpPr>
+        <p:spPr>
+          <a:xfrm>
+            <a:off x="8950756" y="4224528"/>
+            <a:ext cx="2509418" cy="512064"/>
+          </a:xfrm>
+          <a:prstGeom prst="rect">
+            <a:avLst/>
+          </a:prstGeom>
+          <a:noFill/>
+        </p:spPr>
+        <p:txBody>
+          <a:bodyPr wrap="square" anchor="ctr" lIns="0" rIns="0" tIns="0" bIns="0"/>
+          <a:lstStyle/>
+          <a:p>
+            <a:pPr algn="l"/>
+            <a:r>
+              <a:rPr sz="1900" b="1" i="0">
+                <a:solidFill>
+                  <a:srgbClr val="03306E"/>
+                </a:solidFill>
+                <a:latin typeface="Calibri"/>
+              </a:rPr>
+              <a:t>Test</a:t>
+            </a:r>
+          </a:p>
+        </p:txBody>
+      </p:sp>
+      <p:sp>
+        <p:nvSpPr>
+          <p:cNvPr id="29" name="TextBox 28"/>
+          <p:cNvSpPr txBox="1"/>
+          <p:nvPr/>
+        </p:nvSpPr>
+        <p:spPr>
+          <a:xfrm>
+            <a:off x="8356396" y="4892040"/>
+            <a:ext cx="3058058" cy="1143000"/>
+          </a:xfrm>
+          <a:prstGeom prst="rect">
+            <a:avLst/>
+          </a:prstGeom>
+          <a:noFill/>
+        </p:spPr>
+        <p:txBody>
+          <a:bodyPr wrap="square" anchor="t" lIns="0" rIns="0" tIns="0" bIns="0"/>
+          <a:lstStyle/>
+          <a:p>
+            <a:pPr algn="l"/>
+            <a:r>
+              <a:rPr sz="2000" b="0" i="0">
+                <a:solidFill>
+                  <a:srgbClr val="202122"/>
+                </a:solidFill>
+                <a:latin typeface="Calibri"/>
+              </a:rPr>
+              <a:t>Port scanning and ethical penetration testing.</a:t>
             </a:r>
           </a:p>
         </p:txBody>
@@ -6964,7 +10524,7 @@
                 </a:solidFill>
                 <a:latin typeface="Cambria"/>
               </a:rPr>
-              <a:t>The CIA triad</a:t>
+              <a:t>Quick check: Mitigation techniques</a:t>
             </a:r>
           </a:p>
         </p:txBody>
@@ -7037,58 +10597,14 @@
       </p:sp>
       <p:sp>
         <p:nvSpPr>
-          <p:cNvPr id="6" name="Rounded Rectangle 5"/>
+          <p:cNvPr id="6" name="Oval 5"/>
           <p:cNvSpPr/>
           <p:nvPr/>
         </p:nvSpPr>
         <p:spPr>
           <a:xfrm>
-            <a:off x="548640" y="1600200"/>
-            <a:ext cx="3515258" cy="4572000"/>
-          </a:xfrm>
-          <a:prstGeom prst="roundRect">
-            <a:avLst>
-              <a:gd name="adj" fmla="val 6000"/>
-            </a:avLst>
-          </a:prstGeom>
-          <a:solidFill>
-            <a:srgbClr val="EAF3FF"/>
-          </a:solidFill>
-          <a:ln>
-            <a:noFill/>
-          </a:ln>
-          <a:effectLst/>
-        </p:spPr>
-        <p:style>
-          <a:lnRef idx="1">
-            <a:schemeClr val="accent1"/>
-          </a:lnRef>
-          <a:fillRef idx="3">
-            <a:schemeClr val="accent1"/>
-          </a:fillRef>
-          <a:effectRef idx="2">
-            <a:schemeClr val="accent1"/>
-          </a:effectRef>
-          <a:fontRef idx="minor">
-            <a:schemeClr val="lt1"/>
-          </a:fontRef>
-        </p:style>
-        <p:txBody>
-          <a:bodyPr rtlCol="0" anchor="ctr"/>
-          <a:lstStyle/>
-          <a:p/>
-        </p:txBody>
-      </p:sp>
-      <p:sp>
-        <p:nvSpPr>
-          <p:cNvPr id="7" name="Oval 6"/>
-          <p:cNvSpPr/>
-          <p:nvPr/>
-        </p:nvSpPr>
-        <p:spPr>
-          <a:xfrm>
-            <a:off x="777240" y="1828800"/>
-            <a:ext cx="457200" cy="457200"/>
+            <a:off x="548640" y="1691640"/>
+            <a:ext cx="502920" cy="502920"/>
           </a:xfrm>
           <a:prstGeom prst="ellipse">
             <a:avLst/>
@@ -7121,7 +10637,7 @@
           <a:p>
             <a:pPr algn="ctr"/>
             <a:r>
-              <a:rPr sz="1500" b="1">
+              <a:rPr sz="1600" b="1">
                 <a:solidFill>
                   <a:srgbClr val="202122"/>
                 </a:solidFill>
@@ -7134,124 +10650,47 @@
       </p:sp>
       <p:sp>
         <p:nvSpPr>
-          <p:cNvPr id="8" name="TextBox 7"/>
-          <p:cNvSpPr txBox="1"/>
-          <p:nvPr/>
-        </p:nvSpPr>
-        <p:spPr>
-          <a:xfrm>
-            <a:off x="1371600" y="1801368"/>
-            <a:ext cx="2509418" cy="512064"/>
-          </a:xfrm>
-          <a:prstGeom prst="rect">
-            <a:avLst/>
-          </a:prstGeom>
-          <a:noFill/>
-        </p:spPr>
-        <p:txBody>
-          <a:bodyPr wrap="square" anchor="ctr" lIns="0" rIns="0" tIns="0" bIns="0"/>
+          <p:cNvPr id="7" name="TextBox 6"/>
+          <p:cNvSpPr txBox="1"/>
+          <p:nvPr/>
+        </p:nvSpPr>
+        <p:spPr>
+          <a:xfrm>
+            <a:off x="1371600" y="1645920"/>
+            <a:ext cx="10271455" cy="1188720"/>
+          </a:xfrm>
+          <a:prstGeom prst="rect">
+            <a:avLst/>
+          </a:prstGeom>
+          <a:noFill/>
+        </p:spPr>
+        <p:txBody>
+          <a:bodyPr wrap="square" anchor="t" lIns="0" rIns="0" tIns="0" bIns="0"/>
           <a:lstStyle/>
           <a:p>
             <a:pPr algn="l"/>
             <a:r>
-              <a:rPr sz="1900" b="1" i="0">
-                <a:solidFill>
-                  <a:srgbClr val="03306E"/>
-                </a:solidFill>
-                <a:latin typeface="Calibri"/>
-              </a:rPr>
-              <a:t>Confidentiality</a:t>
-            </a:r>
-          </a:p>
-        </p:txBody>
-      </p:sp>
-      <p:sp>
-        <p:nvSpPr>
-          <p:cNvPr id="9" name="TextBox 8"/>
-          <p:cNvSpPr txBox="1"/>
-          <p:nvPr/>
-        </p:nvSpPr>
-        <p:spPr>
-          <a:xfrm>
-            <a:off x="777240" y="2468880"/>
-            <a:ext cx="3058058" cy="3566160"/>
-          </a:xfrm>
-          <a:prstGeom prst="rect">
-            <a:avLst/>
-          </a:prstGeom>
-          <a:noFill/>
-        </p:spPr>
-        <p:txBody>
-          <a:bodyPr wrap="square" anchor="t" lIns="0" rIns="0" tIns="0" bIns="0"/>
-          <a:lstStyle/>
-          <a:p>
-            <a:pPr algn="l"/>
-            <a:r>
-              <a:rPr sz="2000" b="0" i="0">
+              <a:rPr sz="2400" b="0" i="0">
                 <a:solidFill>
                   <a:srgbClr val="202122"/>
                 </a:solidFill>
                 <a:latin typeface="Calibri"/>
               </a:rPr>
-              <a:t>Controlling who can access data.</a:t>
-            </a:r>
-          </a:p>
-        </p:txBody>
-      </p:sp>
-      <p:sp>
-        <p:nvSpPr>
-          <p:cNvPr id="10" name="Rounded Rectangle 9"/>
+              <a:t>Which encryption type is one way?</a:t>
+            </a:r>
+          </a:p>
+        </p:txBody>
+      </p:sp>
+      <p:sp>
+        <p:nvSpPr>
+          <p:cNvPr id="8" name="Oval 7"/>
           <p:cNvSpPr/>
           <p:nvPr/>
         </p:nvSpPr>
         <p:spPr>
           <a:xfrm>
-            <a:off x="4338218" y="1600200"/>
-            <a:ext cx="3515258" cy="4572000"/>
-          </a:xfrm>
-          <a:prstGeom prst="roundRect">
-            <a:avLst>
-              <a:gd name="adj" fmla="val 6000"/>
-            </a:avLst>
-          </a:prstGeom>
-          <a:solidFill>
-            <a:srgbClr val="EAF3FF"/>
-          </a:solidFill>
-          <a:ln>
-            <a:noFill/>
-          </a:ln>
-          <a:effectLst/>
-        </p:spPr>
-        <p:style>
-          <a:lnRef idx="1">
-            <a:schemeClr val="accent1"/>
-          </a:lnRef>
-          <a:fillRef idx="3">
-            <a:schemeClr val="accent1"/>
-          </a:fillRef>
-          <a:effectRef idx="2">
-            <a:schemeClr val="accent1"/>
-          </a:effectRef>
-          <a:fontRef idx="minor">
-            <a:schemeClr val="lt1"/>
-          </a:fontRef>
-        </p:style>
-        <p:txBody>
-          <a:bodyPr rtlCol="0" anchor="ctr"/>
-          <a:lstStyle/>
-          <a:p/>
-        </p:txBody>
-      </p:sp>
-      <p:sp>
-        <p:nvSpPr>
-          <p:cNvPr id="11" name="Oval 10"/>
-          <p:cNvSpPr/>
-          <p:nvPr/>
-        </p:nvSpPr>
-        <p:spPr>
-          <a:xfrm>
-            <a:off x="4566818" y="1828800"/>
-            <a:ext cx="457200" cy="457200"/>
+            <a:off x="548640" y="3108960"/>
+            <a:ext cx="502920" cy="502920"/>
           </a:xfrm>
           <a:prstGeom prst="ellipse">
             <a:avLst/>
@@ -7284,7 +10723,7 @@
           <a:p>
             <a:pPr algn="ctr"/>
             <a:r>
-              <a:rPr sz="1500" b="1">
+              <a:rPr sz="1600" b="1">
                 <a:solidFill>
                   <a:srgbClr val="202122"/>
                 </a:solidFill>
@@ -7297,124 +10736,47 @@
       </p:sp>
       <p:sp>
         <p:nvSpPr>
-          <p:cNvPr id="12" name="TextBox 11"/>
-          <p:cNvSpPr txBox="1"/>
-          <p:nvPr/>
-        </p:nvSpPr>
-        <p:spPr>
-          <a:xfrm>
-            <a:off x="5161178" y="1801368"/>
-            <a:ext cx="2509418" cy="512064"/>
-          </a:xfrm>
-          <a:prstGeom prst="rect">
-            <a:avLst/>
-          </a:prstGeom>
-          <a:noFill/>
-        </p:spPr>
-        <p:txBody>
-          <a:bodyPr wrap="square" anchor="ctr" lIns="0" rIns="0" tIns="0" bIns="0"/>
+          <p:cNvPr id="9" name="TextBox 8"/>
+          <p:cNvSpPr txBox="1"/>
+          <p:nvPr/>
+        </p:nvSpPr>
+        <p:spPr>
+          <a:xfrm>
+            <a:off x="1371600" y="3063240"/>
+            <a:ext cx="10271455" cy="1188720"/>
+          </a:xfrm>
+          <a:prstGeom prst="rect">
+            <a:avLst/>
+          </a:prstGeom>
+          <a:noFill/>
+        </p:spPr>
+        <p:txBody>
+          <a:bodyPr wrap="square" anchor="t" lIns="0" rIns="0" tIns="0" bIns="0"/>
           <a:lstStyle/>
           <a:p>
             <a:pPr algn="l"/>
             <a:r>
-              <a:rPr sz="1900" b="1" i="0">
-                <a:solidFill>
-                  <a:srgbClr val="03306E"/>
-                </a:solidFill>
-                <a:latin typeface="Calibri"/>
-              </a:rPr>
-              <a:t>Integrity</a:t>
-            </a:r>
-          </a:p>
-        </p:txBody>
-      </p:sp>
-      <p:sp>
-        <p:nvSpPr>
-          <p:cNvPr id="13" name="TextBox 12"/>
-          <p:cNvSpPr txBox="1"/>
-          <p:nvPr/>
-        </p:nvSpPr>
-        <p:spPr>
-          <a:xfrm>
-            <a:off x="4566818" y="2468880"/>
-            <a:ext cx="3058058" cy="3566160"/>
-          </a:xfrm>
-          <a:prstGeom prst="rect">
-            <a:avLst/>
-          </a:prstGeom>
-          <a:noFill/>
-        </p:spPr>
-        <p:txBody>
-          <a:bodyPr wrap="square" anchor="t" lIns="0" rIns="0" tIns="0" bIns="0"/>
-          <a:lstStyle/>
-          <a:p>
-            <a:pPr algn="l"/>
-            <a:r>
-              <a:rPr sz="2000" b="0" i="0">
+              <a:rPr sz="2400" b="0" i="0">
                 <a:solidFill>
                   <a:srgbClr val="202122"/>
                 </a:solidFill>
                 <a:latin typeface="Calibri"/>
               </a:rPr>
-              <a:t>Data is not tampered with. Supported by confidentiality.</a:t>
-            </a:r>
-          </a:p>
-        </p:txBody>
-      </p:sp>
-      <p:sp>
-        <p:nvSpPr>
-          <p:cNvPr id="14" name="Rounded Rectangle 13"/>
+              <a:t>What is ethical hacking?</a:t>
+            </a:r>
+          </a:p>
+        </p:txBody>
+      </p:sp>
+      <p:sp>
+        <p:nvSpPr>
+          <p:cNvPr id="10" name="Oval 9"/>
           <p:cNvSpPr/>
           <p:nvPr/>
         </p:nvSpPr>
         <p:spPr>
           <a:xfrm>
-            <a:off x="8127796" y="1600200"/>
-            <a:ext cx="3515258" cy="4572000"/>
-          </a:xfrm>
-          <a:prstGeom prst="roundRect">
-            <a:avLst>
-              <a:gd name="adj" fmla="val 6000"/>
-            </a:avLst>
-          </a:prstGeom>
-          <a:solidFill>
-            <a:srgbClr val="EAF3FF"/>
-          </a:solidFill>
-          <a:ln>
-            <a:noFill/>
-          </a:ln>
-          <a:effectLst/>
-        </p:spPr>
-        <p:style>
-          <a:lnRef idx="1">
-            <a:schemeClr val="accent1"/>
-          </a:lnRef>
-          <a:fillRef idx="3">
-            <a:schemeClr val="accent1"/>
-          </a:fillRef>
-          <a:effectRef idx="2">
-            <a:schemeClr val="accent1"/>
-          </a:effectRef>
-          <a:fontRef idx="minor">
-            <a:schemeClr val="lt1"/>
-          </a:fontRef>
-        </p:style>
-        <p:txBody>
-          <a:bodyPr rtlCol="0" anchor="ctr"/>
-          <a:lstStyle/>
-          <a:p/>
-        </p:txBody>
-      </p:sp>
-      <p:sp>
-        <p:nvSpPr>
-          <p:cNvPr id="15" name="Oval 14"/>
-          <p:cNvSpPr/>
-          <p:nvPr/>
-        </p:nvSpPr>
-        <p:spPr>
-          <a:xfrm>
-            <a:off x="8356396" y="1828800"/>
-            <a:ext cx="457200" cy="457200"/>
+            <a:off x="548640" y="4526280"/>
+            <a:ext cx="502920" cy="502920"/>
           </a:xfrm>
           <a:prstGeom prst="ellipse">
             <a:avLst/>
@@ -7447,7 +10809,7 @@
           <a:p>
             <a:pPr algn="ctr"/>
             <a:r>
-              <a:rPr sz="1500" b="1">
+              <a:rPr sz="1600" b="1">
                 <a:solidFill>
                   <a:srgbClr val="202122"/>
                 </a:solidFill>
@@ -7460,47 +10822,47 @@
       </p:sp>
       <p:sp>
         <p:nvSpPr>
-          <p:cNvPr id="16" name="TextBox 15"/>
-          <p:cNvSpPr txBox="1"/>
-          <p:nvPr/>
-        </p:nvSpPr>
-        <p:spPr>
-          <a:xfrm>
-            <a:off x="8950756" y="1801368"/>
-            <a:ext cx="2509418" cy="512064"/>
-          </a:xfrm>
-          <a:prstGeom prst="rect">
-            <a:avLst/>
-          </a:prstGeom>
-          <a:noFill/>
-        </p:spPr>
-        <p:txBody>
-          <a:bodyPr wrap="square" anchor="ctr" lIns="0" rIns="0" tIns="0" bIns="0"/>
+          <p:cNvPr id="11" name="TextBox 10"/>
+          <p:cNvSpPr txBox="1"/>
+          <p:nvPr/>
+        </p:nvSpPr>
+        <p:spPr>
+          <a:xfrm>
+            <a:off x="1371600" y="4480560"/>
+            <a:ext cx="10271455" cy="1188720"/>
+          </a:xfrm>
+          <a:prstGeom prst="rect">
+            <a:avLst/>
+          </a:prstGeom>
+          <a:noFill/>
+        </p:spPr>
+        <p:txBody>
+          <a:bodyPr wrap="square" anchor="t" lIns="0" rIns="0" tIns="0" bIns="0"/>
           <a:lstStyle/>
           <a:p>
             <a:pPr algn="l"/>
             <a:r>
-              <a:rPr sz="1900" b="1" i="0">
-                <a:solidFill>
-                  <a:srgbClr val="03306E"/>
-                </a:solidFill>
-                <a:latin typeface="Calibri"/>
-              </a:rPr>
-              <a:t>Availability</a:t>
-            </a:r>
-          </a:p>
-        </p:txBody>
-      </p:sp>
-      <p:sp>
-        <p:nvSpPr>
-          <p:cNvPr id="17" name="TextBox 16"/>
-          <p:cNvSpPr txBox="1"/>
-          <p:nvPr/>
-        </p:nvSpPr>
-        <p:spPr>
-          <a:xfrm>
-            <a:off x="8356396" y="2468880"/>
-            <a:ext cx="3058058" cy="3566160"/>
+              <a:rPr sz="2400" b="0" i="0">
+                <a:solidFill>
+                  <a:srgbClr val="202122"/>
+                </a:solidFill>
+                <a:latin typeface="Calibri"/>
+              </a:rPr>
+              <a:t>Why use MFA?</a:t>
+            </a:r>
+          </a:p>
+        </p:txBody>
+      </p:sp>
+      <p:sp>
+        <p:nvSpPr>
+          <p:cNvPr id="12" name="TextBox 11"/>
+          <p:cNvSpPr txBox="1"/>
+          <p:nvPr/>
+        </p:nvSpPr>
+        <p:spPr>
+          <a:xfrm>
+            <a:off x="548640" y="5852160"/>
+            <a:ext cx="11094415" cy="365760"/>
           </a:xfrm>
           <a:prstGeom prst="rect">
             <a:avLst/>
@@ -7513,13 +10875,13 @@
           <a:p>
             <a:pPr algn="l"/>
             <a:r>
-              <a:rPr sz="2000" b="0" i="0">
-                <a:solidFill>
-                  <a:srgbClr val="202122"/>
-                </a:solidFill>
-                <a:latin typeface="Calibri"/>
-              </a:rPr>
-              <a:t>Data is there when needed. Supported by integrity.</a:t>
+              <a:rPr sz="1300" b="0" i="1">
+                <a:solidFill>
+                  <a:srgbClr val="54595D"/>
+                </a:solidFill>
+                <a:latin typeface="Calibri"/>
+              </a:rPr>
+              <a:t>Answer on mini whiteboards or in your book. Answers are in the speaker notes.</a:t>
             </a:r>
           </a:p>
         </p:txBody>
@@ -7611,7 +10973,7 @@
                 </a:solidFill>
                 <a:latin typeface="Cambria"/>
               </a:rPr>
-              <a:t>The IAAA model</a:t>
+              <a:t>Internet security processes</a:t>
             </a:r>
           </a:p>
         </p:txBody>
@@ -7684,20 +11046,22 @@
       </p:sp>
       <p:sp>
         <p:nvSpPr>
-          <p:cNvPr id="6" name="Rectangle 5"/>
+          <p:cNvPr id="6" name="Rounded Rectangle 5"/>
           <p:cNvSpPr/>
           <p:nvPr/>
         </p:nvSpPr>
         <p:spPr>
           <a:xfrm>
-            <a:off x="1884006" y="2793492"/>
-            <a:ext cx="8423681" cy="36576"/>
-          </a:xfrm>
-          <a:prstGeom prst="rect">
-            <a:avLst/>
+            <a:off x="548640" y="1600200"/>
+            <a:ext cx="5364327" cy="640080"/>
+          </a:xfrm>
+          <a:prstGeom prst="roundRect">
+            <a:avLst>
+              <a:gd name="adj" fmla="val 15000"/>
+            </a:avLst>
           </a:prstGeom>
           <a:solidFill>
-            <a:srgbClr val="A9C8F0"/>
+            <a:srgbClr val="03306E"/>
           </a:solidFill>
           <a:ln>
             <a:noFill/>
@@ -7726,104 +11090,51 @@
       </p:sp>
       <p:sp>
         <p:nvSpPr>
-          <p:cNvPr id="7" name="Oval 6"/>
+          <p:cNvPr id="7" name="TextBox 6"/>
+          <p:cNvSpPr txBox="1"/>
+          <p:nvPr/>
+        </p:nvSpPr>
+        <p:spPr>
+          <a:xfrm>
+            <a:off x="777240" y="1600200"/>
+            <a:ext cx="4907127" cy="640080"/>
+          </a:xfrm>
+          <a:prstGeom prst="rect">
+            <a:avLst/>
+          </a:prstGeom>
+          <a:noFill/>
+        </p:spPr>
+        <p:txBody>
+          <a:bodyPr wrap="square" anchor="ctr" lIns="0" rIns="0" tIns="0" bIns="0"/>
+          <a:lstStyle/>
+          <a:p>
+            <a:pPr algn="l"/>
+            <a:r>
+              <a:rPr sz="2000" b="1" i="0">
+                <a:solidFill>
+                  <a:srgbClr val="FFFFFF"/>
+                </a:solidFill>
+                <a:latin typeface="Calibri"/>
+              </a:rPr>
+              <a:t>Firewall configuration</a:t>
+            </a:r>
+          </a:p>
+        </p:txBody>
+      </p:sp>
+      <p:sp>
+        <p:nvSpPr>
+          <p:cNvPr id="8" name="Rounded Rectangle 7"/>
           <p:cNvSpPr/>
           <p:nvPr/>
         </p:nvSpPr>
         <p:spPr>
           <a:xfrm>
-            <a:off x="1563966" y="2491740"/>
-            <a:ext cx="640080" cy="640080"/>
-          </a:xfrm>
-          <a:prstGeom prst="ellipse">
-            <a:avLst/>
-          </a:prstGeom>
-          <a:solidFill>
-            <a:srgbClr val="F2B705"/>
-          </a:solidFill>
-          <a:ln>
-            <a:noFill/>
-          </a:ln>
-          <a:effectLst/>
-        </p:spPr>
-        <p:style>
-          <a:lnRef idx="1">
-            <a:schemeClr val="accent1"/>
-          </a:lnRef>
-          <a:fillRef idx="3">
-            <a:schemeClr val="accent1"/>
-          </a:fillRef>
-          <a:effectRef idx="2">
-            <a:schemeClr val="accent1"/>
-          </a:effectRef>
-          <a:fontRef idx="minor">
-            <a:schemeClr val="lt1"/>
-          </a:fontRef>
-        </p:style>
-        <p:txBody>
-          <a:bodyPr rtlCol="0" anchor="ctr" lIns="0" rIns="0" tIns="0" bIns="0"/>
-          <a:lstStyle/>
-          <a:p>
-            <a:pPr algn="ctr"/>
-            <a:r>
-              <a:rPr sz="2000" b="1">
-                <a:solidFill>
-                  <a:srgbClr val="202122"/>
-                </a:solidFill>
-                <a:latin typeface="Calibri"/>
-              </a:rPr>
-              <a:t>1</a:t>
-            </a:r>
-          </a:p>
-        </p:txBody>
-      </p:sp>
-      <p:sp>
-        <p:nvSpPr>
-          <p:cNvPr id="8" name="TextBox 7"/>
-          <p:cNvSpPr txBox="1"/>
-          <p:nvPr/>
-        </p:nvSpPr>
-        <p:spPr>
-          <a:xfrm>
-            <a:off x="548640" y="3268979"/>
-            <a:ext cx="2670733" cy="731520"/>
-          </a:xfrm>
-          <a:prstGeom prst="rect">
-            <a:avLst/>
-          </a:prstGeom>
-          <a:noFill/>
-        </p:spPr>
-        <p:txBody>
-          <a:bodyPr wrap="square" anchor="t" lIns="0" rIns="0" tIns="0" bIns="0"/>
-          <a:lstStyle/>
-          <a:p>
-            <a:pPr algn="ctr"/>
-            <a:r>
-              <a:rPr sz="1700" b="1" i="0">
-                <a:solidFill>
-                  <a:srgbClr val="03306E"/>
-                </a:solidFill>
-                <a:latin typeface="Calibri"/>
-              </a:rPr>
-              <a:t>Identification</a:t>
-            </a:r>
-          </a:p>
-        </p:txBody>
-      </p:sp>
-      <p:sp>
-        <p:nvSpPr>
-          <p:cNvPr id="9" name="Rounded Rectangle 8"/>
-          <p:cNvSpPr/>
-          <p:nvPr/>
-        </p:nvSpPr>
-        <p:spPr>
-          <a:xfrm>
-            <a:off x="548640" y="4046220"/>
-            <a:ext cx="2670733" cy="1234439"/>
+            <a:off x="548640" y="2377440"/>
+            <a:ext cx="5364327" cy="3794760"/>
           </a:xfrm>
           <a:prstGeom prst="roundRect">
             <a:avLst>
-              <a:gd name="adj" fmla="val 6000"/>
+              <a:gd name="adj" fmla="val 4000"/>
             </a:avLst>
           </a:prstGeom>
           <a:solidFill>
@@ -7856,53 +11167,129 @@
       </p:sp>
       <p:sp>
         <p:nvSpPr>
-          <p:cNvPr id="10" name="TextBox 9"/>
-          <p:cNvSpPr txBox="1"/>
-          <p:nvPr/>
-        </p:nvSpPr>
-        <p:spPr>
-          <a:xfrm>
-            <a:off x="685800" y="4183380"/>
-            <a:ext cx="2396413" cy="960119"/>
-          </a:xfrm>
-          <a:prstGeom prst="rect">
-            <a:avLst/>
-          </a:prstGeom>
-          <a:noFill/>
-        </p:spPr>
-        <p:txBody>
-          <a:bodyPr wrap="square" anchor="t" lIns="0" rIns="0" tIns="0" bIns="0"/>
-          <a:lstStyle/>
-          <a:p>
-            <a:pPr algn="l"/>
-            <a:r>
-              <a:rPr sz="1800" b="0" i="0">
+          <p:cNvPr id="9" name="TextBox 8"/>
+          <p:cNvSpPr txBox="1"/>
+          <p:nvPr/>
+        </p:nvSpPr>
+        <p:spPr>
+          <a:xfrm>
+            <a:off x="822959" y="2606040"/>
+            <a:ext cx="4815687" cy="3337560"/>
+          </a:xfrm>
+          <a:prstGeom prst="rect">
+            <a:avLst/>
+          </a:prstGeom>
+          <a:noFill/>
+        </p:spPr>
+        <p:txBody>
+          <a:bodyPr wrap="square" lIns="0" rIns="0" tIns="0" bIns="0">
+            <a:spAutoFit/>
+          </a:bodyPr>
+          <a:lstStyle/>
+          <a:p>
+            <a:pPr marL="274320" indent="-274320">
+              <a:spcAft>
+                <a:spcPts val="990"/>
+              </a:spcAft>
+              <a:buClr>
+                <a:srgbClr val="0645AD"/>
+              </a:buClr>
+              <a:buFont typeface="Arial"/>
+              <a:buChar char="•"/>
+            </a:pPr>
+            <a:r>
+              <a:rPr sz="2200" b="0">
                 <a:solidFill>
                   <a:srgbClr val="202122"/>
                 </a:solidFill>
                 <a:latin typeface="Calibri"/>
               </a:rPr>
-              <a:t>Who are you? Username, card or biometric.</a:t>
-            </a:r>
-          </a:p>
-        </p:txBody>
-      </p:sp>
-      <p:sp>
-        <p:nvSpPr>
-          <p:cNvPr id="11" name="Oval 10"/>
+              <a:t>Inbound and outbound rules</a:t>
+            </a:r>
+          </a:p>
+          <a:p>
+            <a:pPr marL="274320" indent="-274320">
+              <a:spcAft>
+                <a:spcPts val="990"/>
+              </a:spcAft>
+              <a:buClr>
+                <a:srgbClr val="0645AD"/>
+              </a:buClr>
+              <a:buFont typeface="Arial"/>
+              <a:buChar char="•"/>
+            </a:pPr>
+            <a:r>
+              <a:rPr sz="2200" b="0">
+                <a:solidFill>
+                  <a:srgbClr val="202122"/>
+                </a:solidFill>
+                <a:latin typeface="Calibri"/>
+              </a:rPr>
+              <a:t>Traffic type rules</a:t>
+            </a:r>
+          </a:p>
+          <a:p>
+            <a:pPr marL="274320" indent="-274320">
+              <a:spcAft>
+                <a:spcPts val="990"/>
+              </a:spcAft>
+              <a:buClr>
+                <a:srgbClr val="0645AD"/>
+              </a:buClr>
+              <a:buFont typeface="Arial"/>
+              <a:buChar char="•"/>
+            </a:pPr>
+            <a:r>
+              <a:rPr sz="2200" b="0">
+                <a:solidFill>
+                  <a:srgbClr val="202122"/>
+                </a:solidFill>
+                <a:latin typeface="Calibri"/>
+              </a:rPr>
+              <a:t>Application rules</a:t>
+            </a:r>
+          </a:p>
+          <a:p>
+            <a:pPr marL="274320" indent="-274320">
+              <a:spcAft>
+                <a:spcPts val="990"/>
+              </a:spcAft>
+              <a:buClr>
+                <a:srgbClr val="0645AD"/>
+              </a:buClr>
+              <a:buFont typeface="Arial"/>
+              <a:buChar char="•"/>
+            </a:pPr>
+            <a:r>
+              <a:rPr sz="2200" b="0">
+                <a:solidFill>
+                  <a:srgbClr val="202122"/>
+                </a:solidFill>
+                <a:latin typeface="Calibri"/>
+              </a:rPr>
+              <a:t>IP address rules</a:t>
+            </a:r>
+          </a:p>
+        </p:txBody>
+      </p:sp>
+      <p:sp>
+        <p:nvSpPr>
+          <p:cNvPr id="10" name="Rounded Rectangle 9"/>
           <p:cNvSpPr/>
           <p:nvPr/>
         </p:nvSpPr>
         <p:spPr>
           <a:xfrm>
-            <a:off x="4371860" y="2491740"/>
-            <a:ext cx="640080" cy="640080"/>
-          </a:xfrm>
-          <a:prstGeom prst="ellipse">
-            <a:avLst/>
+            <a:off x="6278727" y="1600200"/>
+            <a:ext cx="5364327" cy="640080"/>
+          </a:xfrm>
+          <a:prstGeom prst="roundRect">
+            <a:avLst>
+              <a:gd name="adj" fmla="val 15000"/>
+            </a:avLst>
           </a:prstGeom>
           <a:solidFill>
-            <a:srgbClr val="F2B705"/>
+            <a:srgbClr val="0645AD"/>
           </a:solidFill>
           <a:ln>
             <a:noFill/>
@@ -7924,69 +11311,58 @@
           </a:fontRef>
         </p:style>
         <p:txBody>
-          <a:bodyPr rtlCol="0" anchor="ctr" lIns="0" rIns="0" tIns="0" bIns="0"/>
-          <a:lstStyle/>
-          <a:p>
-            <a:pPr algn="ctr"/>
-            <a:r>
-              <a:rPr sz="2000" b="1">
-                <a:solidFill>
-                  <a:srgbClr val="202122"/>
-                </a:solidFill>
-                <a:latin typeface="Calibri"/>
-              </a:rPr>
-              <a:t>2</a:t>
-            </a:r>
-          </a:p>
-        </p:txBody>
-      </p:sp>
-      <p:sp>
-        <p:nvSpPr>
-          <p:cNvPr id="12" name="TextBox 11"/>
-          <p:cNvSpPr txBox="1"/>
-          <p:nvPr/>
-        </p:nvSpPr>
-        <p:spPr>
-          <a:xfrm>
-            <a:off x="3356533" y="3268979"/>
-            <a:ext cx="2670733" cy="731520"/>
-          </a:xfrm>
-          <a:prstGeom prst="rect">
-            <a:avLst/>
-          </a:prstGeom>
-          <a:noFill/>
-        </p:spPr>
-        <p:txBody>
-          <a:bodyPr wrap="square" anchor="t" lIns="0" rIns="0" tIns="0" bIns="0"/>
-          <a:lstStyle/>
-          <a:p>
-            <a:pPr algn="ctr"/>
-            <a:r>
-              <a:rPr sz="1700" b="1" i="0">
-                <a:solidFill>
-                  <a:srgbClr val="03306E"/>
-                </a:solidFill>
-                <a:latin typeface="Calibri"/>
-              </a:rPr>
-              <a:t>Authentication</a:t>
-            </a:r>
-          </a:p>
-        </p:txBody>
-      </p:sp>
-      <p:sp>
-        <p:nvSpPr>
-          <p:cNvPr id="13" name="Rounded Rectangle 12"/>
+          <a:bodyPr rtlCol="0" anchor="ctr"/>
+          <a:lstStyle/>
+          <a:p/>
+        </p:txBody>
+      </p:sp>
+      <p:sp>
+        <p:nvSpPr>
+          <p:cNvPr id="11" name="TextBox 10"/>
+          <p:cNvSpPr txBox="1"/>
+          <p:nvPr/>
+        </p:nvSpPr>
+        <p:spPr>
+          <a:xfrm>
+            <a:off x="6507327" y="1600200"/>
+            <a:ext cx="4907127" cy="640080"/>
+          </a:xfrm>
+          <a:prstGeom prst="rect">
+            <a:avLst/>
+          </a:prstGeom>
+          <a:noFill/>
+        </p:spPr>
+        <p:txBody>
+          <a:bodyPr wrap="square" anchor="ctr" lIns="0" rIns="0" tIns="0" bIns="0"/>
+          <a:lstStyle/>
+          <a:p>
+            <a:pPr algn="l"/>
+            <a:r>
+              <a:rPr sz="2000" b="1" i="0">
+                <a:solidFill>
+                  <a:srgbClr val="FFFFFF"/>
+                </a:solidFill>
+                <a:latin typeface="Calibri"/>
+              </a:rPr>
+              <a:t>Network protection</a:t>
+            </a:r>
+          </a:p>
+        </p:txBody>
+      </p:sp>
+      <p:sp>
+        <p:nvSpPr>
+          <p:cNvPr id="12" name="Rounded Rectangle 11"/>
           <p:cNvSpPr/>
           <p:nvPr/>
         </p:nvSpPr>
         <p:spPr>
           <a:xfrm>
-            <a:off x="3356533" y="4046220"/>
-            <a:ext cx="2670733" cy="1234439"/>
+            <a:off x="6278727" y="2377440"/>
+            <a:ext cx="5364327" cy="3794760"/>
           </a:xfrm>
           <a:prstGeom prst="roundRect">
             <a:avLst>
-              <a:gd name="adj" fmla="val 6000"/>
+              <a:gd name="adj" fmla="val 4000"/>
             </a:avLst>
           </a:prstGeom>
           <a:solidFill>
@@ -8019,359 +11395,95 @@
       </p:sp>
       <p:sp>
         <p:nvSpPr>
-          <p:cNvPr id="14" name="TextBox 13"/>
-          <p:cNvSpPr txBox="1"/>
-          <p:nvPr/>
-        </p:nvSpPr>
-        <p:spPr>
-          <a:xfrm>
-            <a:off x="3493693" y="4183380"/>
-            <a:ext cx="2396413" cy="960119"/>
-          </a:xfrm>
-          <a:prstGeom prst="rect">
-            <a:avLst/>
-          </a:prstGeom>
-          <a:noFill/>
-        </p:spPr>
-        <p:txBody>
-          <a:bodyPr wrap="square" anchor="t" lIns="0" rIns="0" tIns="0" bIns="0"/>
-          <a:lstStyle/>
-          <a:p>
-            <a:pPr algn="l"/>
-            <a:r>
-              <a:rPr sz="1800" b="0" i="0">
+          <p:cNvPr id="13" name="TextBox 12"/>
+          <p:cNvSpPr txBox="1"/>
+          <p:nvPr/>
+        </p:nvSpPr>
+        <p:spPr>
+          <a:xfrm>
+            <a:off x="6553047" y="2606040"/>
+            <a:ext cx="4815687" cy="3337560"/>
+          </a:xfrm>
+          <a:prstGeom prst="rect">
+            <a:avLst/>
+          </a:prstGeom>
+          <a:noFill/>
+        </p:spPr>
+        <p:txBody>
+          <a:bodyPr wrap="square" lIns="0" rIns="0" tIns="0" bIns="0">
+            <a:spAutoFit/>
+          </a:bodyPr>
+          <a:lstStyle/>
+          <a:p>
+            <a:pPr marL="274320" indent="-274320">
+              <a:spcAft>
+                <a:spcPts val="990"/>
+              </a:spcAft>
+              <a:buClr>
+                <a:srgbClr val="0645AD"/>
+              </a:buClr>
+              <a:buFont typeface="Arial"/>
+              <a:buChar char="•"/>
+            </a:pPr>
+            <a:r>
+              <a:rPr sz="2200" b="1">
                 <a:solidFill>
                   <a:srgbClr val="202122"/>
                 </a:solidFill>
                 <a:latin typeface="Calibri"/>
               </a:rPr>
-              <a:t>Prove it: password, MFA, biometrics.</a:t>
-            </a:r>
-          </a:p>
-        </p:txBody>
-      </p:sp>
-      <p:sp>
-        <p:nvSpPr>
-          <p:cNvPr id="15" name="Oval 14"/>
-          <p:cNvSpPr/>
-          <p:nvPr/>
-        </p:nvSpPr>
-        <p:spPr>
-          <a:xfrm>
-            <a:off x="7179754" y="2491740"/>
-            <a:ext cx="640080" cy="640080"/>
-          </a:xfrm>
-          <a:prstGeom prst="ellipse">
-            <a:avLst/>
-          </a:prstGeom>
-          <a:solidFill>
-            <a:srgbClr val="F2B705"/>
-          </a:solidFill>
-          <a:ln>
-            <a:noFill/>
-          </a:ln>
-          <a:effectLst/>
-        </p:spPr>
-        <p:style>
-          <a:lnRef idx="1">
-            <a:schemeClr val="accent1"/>
-          </a:lnRef>
-          <a:fillRef idx="3">
-            <a:schemeClr val="accent1"/>
-          </a:fillRef>
-          <a:effectRef idx="2">
-            <a:schemeClr val="accent1"/>
-          </a:effectRef>
-          <a:fontRef idx="minor">
-            <a:schemeClr val="lt1"/>
-          </a:fontRef>
-        </p:style>
-        <p:txBody>
-          <a:bodyPr rtlCol="0" anchor="ctr" lIns="0" rIns="0" tIns="0" bIns="0"/>
-          <a:lstStyle/>
-          <a:p>
-            <a:pPr algn="ctr"/>
-            <a:r>
-              <a:rPr sz="2000" b="1">
+              <a:t>Segregation:</a:t>
+            </a:r>
+            <a:r>
+              <a:rPr sz="2200" b="0">
                 <a:solidFill>
                   <a:srgbClr val="202122"/>
                 </a:solidFill>
                 <a:latin typeface="Calibri"/>
               </a:rPr>
-              <a:t>3</a:t>
-            </a:r>
-          </a:p>
-        </p:txBody>
-      </p:sp>
-      <p:sp>
-        <p:nvSpPr>
-          <p:cNvPr id="16" name="TextBox 15"/>
-          <p:cNvSpPr txBox="1"/>
-          <p:nvPr/>
-        </p:nvSpPr>
-        <p:spPr>
-          <a:xfrm>
-            <a:off x="6164427" y="3268979"/>
-            <a:ext cx="2670733" cy="731520"/>
-          </a:xfrm>
-          <a:prstGeom prst="rect">
-            <a:avLst/>
-          </a:prstGeom>
-          <a:noFill/>
-        </p:spPr>
-        <p:txBody>
-          <a:bodyPr wrap="square" anchor="t" lIns="0" rIns="0" tIns="0" bIns="0"/>
-          <a:lstStyle/>
-          <a:p>
-            <a:pPr algn="ctr"/>
-            <a:r>
-              <a:rPr sz="1700" b="1" i="0">
-                <a:solidFill>
-                  <a:srgbClr val="03306E"/>
-                </a:solidFill>
-                <a:latin typeface="Calibri"/>
-              </a:rPr>
-              <a:t>Authorisation</a:t>
-            </a:r>
-          </a:p>
-        </p:txBody>
-      </p:sp>
-      <p:sp>
-        <p:nvSpPr>
-          <p:cNvPr id="17" name="Rounded Rectangle 16"/>
-          <p:cNvSpPr/>
-          <p:nvPr/>
-        </p:nvSpPr>
-        <p:spPr>
-          <a:xfrm>
-            <a:off x="6164427" y="4046220"/>
-            <a:ext cx="2670733" cy="1234439"/>
-          </a:xfrm>
-          <a:prstGeom prst="roundRect">
-            <a:avLst>
-              <a:gd name="adj" fmla="val 6000"/>
-            </a:avLst>
-          </a:prstGeom>
-          <a:solidFill>
-            <a:srgbClr val="EAF3FF"/>
-          </a:solidFill>
-          <a:ln>
-            <a:noFill/>
-          </a:ln>
-          <a:effectLst/>
-        </p:spPr>
-        <p:style>
-          <a:lnRef idx="1">
-            <a:schemeClr val="accent1"/>
-          </a:lnRef>
-          <a:fillRef idx="3">
-            <a:schemeClr val="accent1"/>
-          </a:fillRef>
-          <a:effectRef idx="2">
-            <a:schemeClr val="accent1"/>
-          </a:effectRef>
-          <a:fontRef idx="minor">
-            <a:schemeClr val="lt1"/>
-          </a:fontRef>
-        </p:style>
-        <p:txBody>
-          <a:bodyPr rtlCol="0" anchor="ctr"/>
-          <a:lstStyle/>
-          <a:p/>
-        </p:txBody>
-      </p:sp>
-      <p:sp>
-        <p:nvSpPr>
-          <p:cNvPr id="18" name="TextBox 17"/>
-          <p:cNvSpPr txBox="1"/>
-          <p:nvPr/>
-        </p:nvSpPr>
-        <p:spPr>
-          <a:xfrm>
-            <a:off x="6301587" y="4183380"/>
-            <a:ext cx="2396413" cy="960119"/>
-          </a:xfrm>
-          <a:prstGeom prst="rect">
-            <a:avLst/>
-          </a:prstGeom>
-          <a:noFill/>
-        </p:spPr>
-        <p:txBody>
-          <a:bodyPr wrap="square" anchor="t" lIns="0" rIns="0" tIns="0" bIns="0"/>
-          <a:lstStyle/>
-          <a:p>
-            <a:pPr algn="l"/>
-            <a:r>
-              <a:rPr sz="1800" b="0" i="0">
+              <a:t> virtual, physical, offline</a:t>
+            </a:r>
+          </a:p>
+          <a:p>
+            <a:pPr marL="274320" indent="-274320">
+              <a:spcAft>
+                <a:spcPts val="990"/>
+              </a:spcAft>
+              <a:buClr>
+                <a:srgbClr val="0645AD"/>
+              </a:buClr>
+              <a:buFont typeface="Arial"/>
+              <a:buChar char="•"/>
+            </a:pPr>
+            <a:r>
+              <a:rPr sz="2200" b="0">
                 <a:solidFill>
                   <a:srgbClr val="202122"/>
                 </a:solidFill>
                 <a:latin typeface="Calibri"/>
               </a:rPr>
-              <a:t>What can you do? Roles and access control lists.</a:t>
-            </a:r>
-          </a:p>
-        </p:txBody>
-      </p:sp>
-      <p:sp>
-        <p:nvSpPr>
-          <p:cNvPr id="19" name="Oval 18"/>
-          <p:cNvSpPr/>
-          <p:nvPr/>
-        </p:nvSpPr>
-        <p:spPr>
-          <a:xfrm>
-            <a:off x="9987648" y="2491740"/>
-            <a:ext cx="640080" cy="640080"/>
-          </a:xfrm>
-          <a:prstGeom prst="ellipse">
-            <a:avLst/>
-          </a:prstGeom>
-          <a:solidFill>
-            <a:srgbClr val="F2B705"/>
-          </a:solidFill>
-          <a:ln>
-            <a:noFill/>
-          </a:ln>
-          <a:effectLst/>
-        </p:spPr>
-        <p:style>
-          <a:lnRef idx="1">
-            <a:schemeClr val="accent1"/>
-          </a:lnRef>
-          <a:fillRef idx="3">
-            <a:schemeClr val="accent1"/>
-          </a:fillRef>
-          <a:effectRef idx="2">
-            <a:schemeClr val="accent1"/>
-          </a:effectRef>
-          <a:fontRef idx="minor">
-            <a:schemeClr val="lt1"/>
-          </a:fontRef>
-        </p:style>
-        <p:txBody>
-          <a:bodyPr rtlCol="0" anchor="ctr" lIns="0" rIns="0" tIns="0" bIns="0"/>
-          <a:lstStyle/>
-          <a:p>
-            <a:pPr algn="ctr"/>
-            <a:r>
-              <a:rPr sz="2000" b="1">
+              <a:t>Network monitoring</a:t>
+            </a:r>
+          </a:p>
+          <a:p>
+            <a:pPr marL="274320" indent="-274320">
+              <a:spcAft>
+                <a:spcPts val="990"/>
+              </a:spcAft>
+              <a:buClr>
+                <a:srgbClr val="0645AD"/>
+              </a:buClr>
+              <a:buFont typeface="Arial"/>
+              <a:buChar char="•"/>
+            </a:pPr>
+            <a:r>
+              <a:rPr sz="2200" b="0">
                 <a:solidFill>
                   <a:srgbClr val="202122"/>
                 </a:solidFill>
                 <a:latin typeface="Calibri"/>
               </a:rPr>
-              <a:t>4</a:t>
-            </a:r>
-          </a:p>
-        </p:txBody>
-      </p:sp>
-      <p:sp>
-        <p:nvSpPr>
-          <p:cNvPr id="20" name="TextBox 19"/>
-          <p:cNvSpPr txBox="1"/>
-          <p:nvPr/>
-        </p:nvSpPr>
-        <p:spPr>
-          <a:xfrm>
-            <a:off x="8972321" y="3268979"/>
-            <a:ext cx="2670733" cy="731520"/>
-          </a:xfrm>
-          <a:prstGeom prst="rect">
-            <a:avLst/>
-          </a:prstGeom>
-          <a:noFill/>
-        </p:spPr>
-        <p:txBody>
-          <a:bodyPr wrap="square" anchor="t" lIns="0" rIns="0" tIns="0" bIns="0"/>
-          <a:lstStyle/>
-          <a:p>
-            <a:pPr algn="ctr"/>
-            <a:r>
-              <a:rPr sz="1700" b="1" i="0">
-                <a:solidFill>
-                  <a:srgbClr val="03306E"/>
-                </a:solidFill>
-                <a:latin typeface="Calibri"/>
-              </a:rPr>
-              <a:t>Accountability</a:t>
-            </a:r>
-          </a:p>
-        </p:txBody>
-      </p:sp>
-      <p:sp>
-        <p:nvSpPr>
-          <p:cNvPr id="21" name="Rounded Rectangle 20"/>
-          <p:cNvSpPr/>
-          <p:nvPr/>
-        </p:nvSpPr>
-        <p:spPr>
-          <a:xfrm>
-            <a:off x="8972321" y="4046220"/>
-            <a:ext cx="2670733" cy="1234439"/>
-          </a:xfrm>
-          <a:prstGeom prst="roundRect">
-            <a:avLst>
-              <a:gd name="adj" fmla="val 6000"/>
-            </a:avLst>
-          </a:prstGeom>
-          <a:solidFill>
-            <a:srgbClr val="EAF3FF"/>
-          </a:solidFill>
-          <a:ln>
-            <a:noFill/>
-          </a:ln>
-          <a:effectLst/>
-        </p:spPr>
-        <p:style>
-          <a:lnRef idx="1">
-            <a:schemeClr val="accent1"/>
-          </a:lnRef>
-          <a:fillRef idx="3">
-            <a:schemeClr val="accent1"/>
-          </a:fillRef>
-          <a:effectRef idx="2">
-            <a:schemeClr val="accent1"/>
-          </a:effectRef>
-          <a:fontRef idx="minor">
-            <a:schemeClr val="lt1"/>
-          </a:fontRef>
-        </p:style>
-        <p:txBody>
-          <a:bodyPr rtlCol="0" anchor="ctr"/>
-          <a:lstStyle/>
-          <a:p/>
-        </p:txBody>
-      </p:sp>
-      <p:sp>
-        <p:nvSpPr>
-          <p:cNvPr id="22" name="TextBox 21"/>
-          <p:cNvSpPr txBox="1"/>
-          <p:nvPr/>
-        </p:nvSpPr>
-        <p:spPr>
-          <a:xfrm>
-            <a:off x="9109481" y="4183380"/>
-            <a:ext cx="2396413" cy="960119"/>
-          </a:xfrm>
-          <a:prstGeom prst="rect">
-            <a:avLst/>
-          </a:prstGeom>
-          <a:noFill/>
-        </p:spPr>
-        <p:txBody>
-          <a:bodyPr wrap="square" anchor="t" lIns="0" rIns="0" tIns="0" bIns="0"/>
-          <a:lstStyle/>
-          <a:p>
-            <a:pPr algn="l"/>
-            <a:r>
-              <a:rPr sz="1800" b="0" i="0">
-                <a:solidFill>
-                  <a:srgbClr val="202122"/>
-                </a:solidFill>
-                <a:latin typeface="Calibri"/>
-              </a:rPr>
-              <a:t>What did you do? Audit logs.</a:t>
+              <a:t>Port scanning</a:t>
             </a:r>
           </a:p>
         </p:txBody>
@@ -8463,7 +11575,7 @@
                 </a:solidFill>
                 <a:latin typeface="Cambria"/>
               </a:rPr>
-              <a:t>Check your understanding</a:t>
+              <a:t>The CIA triad</a:t>
             </a:r>
           </a:p>
         </p:txBody>
@@ -8536,14 +11648,172 @@
       </p:sp>
       <p:sp>
         <p:nvSpPr>
-          <p:cNvPr id="6" name="Oval 5"/>
+          <p:cNvPr id="6" name="TextBox 5"/>
+          <p:cNvSpPr txBox="1"/>
+          <p:nvPr/>
+        </p:nvSpPr>
+        <p:spPr>
+          <a:xfrm>
+            <a:off x="548640" y="1554480"/>
+            <a:ext cx="6720840" cy="4617720"/>
+          </a:xfrm>
+          <a:prstGeom prst="rect">
+            <a:avLst/>
+          </a:prstGeom>
+          <a:noFill/>
+        </p:spPr>
+        <p:txBody>
+          <a:bodyPr wrap="square" lIns="0" rIns="0" tIns="0" bIns="0">
+            <a:spAutoFit/>
+          </a:bodyPr>
+          <a:lstStyle/>
+          <a:p>
+            <a:pPr>
+              <a:spcAft>
+                <a:spcPts val="1320"/>
+              </a:spcAft>
+            </a:pPr>
+            <a:r>
+              <a:rPr sz="2200" b="0">
+                <a:solidFill>
+                  <a:srgbClr val="202122"/>
+                </a:solidFill>
+                <a:latin typeface="Calibri"/>
+              </a:rPr>
+              <a:t>The CIA triad is the three goals of security.</a:t>
+            </a:r>
+          </a:p>
+          <a:p>
+            <a:pPr>
+              <a:spcAft>
+                <a:spcPts val="1320"/>
+              </a:spcAft>
+            </a:pPr>
+            <a:r>
+              <a:rPr sz="2200" b="1">
+                <a:solidFill>
+                  <a:srgbClr val="202122"/>
+                </a:solidFill>
+                <a:latin typeface="Calibri"/>
+              </a:rPr>
+              <a:t>Confidentiality:</a:t>
+            </a:r>
+            <a:r>
+              <a:rPr sz="2200" b="0">
+                <a:solidFill>
+                  <a:srgbClr val="202122"/>
+                </a:solidFill>
+                <a:latin typeface="Calibri"/>
+              </a:rPr>
+              <a:t> only authorised people can access data, using access control and encryption.</a:t>
+            </a:r>
+          </a:p>
+          <a:p>
+            <a:pPr>
+              <a:spcAft>
+                <a:spcPts val="1320"/>
+              </a:spcAft>
+            </a:pPr>
+            <a:r>
+              <a:rPr sz="2200" b="1">
+                <a:solidFill>
+                  <a:srgbClr val="202122"/>
+                </a:solidFill>
+                <a:latin typeface="Calibri"/>
+              </a:rPr>
+              <a:t>Integrity:</a:t>
+            </a:r>
+            <a:r>
+              <a:rPr sz="2200" b="0">
+                <a:solidFill>
+                  <a:srgbClr val="202122"/>
+                </a:solidFill>
+                <a:latin typeface="Calibri"/>
+              </a:rPr>
+              <a:t> data isn't tampered with, using permissions, hashing and validation. Confidentiality supports integrity.</a:t>
+            </a:r>
+          </a:p>
+          <a:p>
+            <a:pPr>
+              <a:spcAft>
+                <a:spcPts val="1320"/>
+              </a:spcAft>
+            </a:pPr>
+            <a:r>
+              <a:rPr sz="2200" b="1">
+                <a:solidFill>
+                  <a:srgbClr val="202122"/>
+                </a:solidFill>
+                <a:latin typeface="Calibri"/>
+              </a:rPr>
+              <a:t>Availability:</a:t>
+            </a:r>
+            <a:r>
+              <a:rPr sz="2200" b="0">
+                <a:solidFill>
+                  <a:srgbClr val="202122"/>
+                </a:solidFill>
+                <a:latin typeface="Calibri"/>
+              </a:rPr>
+              <a:t> data and systems are there when needed, using backups, redundancy and DDoS protection. Integrity makes availability worthwhile.</a:t>
+            </a:r>
+          </a:p>
+        </p:txBody>
+      </p:sp>
+      <p:sp>
+        <p:nvSpPr>
+          <p:cNvPr id="7" name="Rounded Rectangle 6"/>
           <p:cNvSpPr/>
           <p:nvPr/>
         </p:nvSpPr>
         <p:spPr>
           <a:xfrm>
-            <a:off x="548640" y="1618488"/>
-            <a:ext cx="411480" cy="411480"/>
+            <a:off x="7772400" y="1554480"/>
+            <a:ext cx="3867912" cy="4526280"/>
+          </a:xfrm>
+          <a:prstGeom prst="roundRect">
+            <a:avLst>
+              <a:gd name="adj" fmla="val 8000"/>
+            </a:avLst>
+          </a:prstGeom>
+          <a:solidFill>
+            <a:srgbClr val="03306E"/>
+          </a:solidFill>
+          <a:ln>
+            <a:noFill/>
+          </a:ln>
+          <a:effectLst/>
+        </p:spPr>
+        <p:style>
+          <a:lnRef idx="1">
+            <a:schemeClr val="accent1"/>
+          </a:lnRef>
+          <a:fillRef idx="3">
+            <a:schemeClr val="accent1"/>
+          </a:fillRef>
+          <a:effectRef idx="2">
+            <a:schemeClr val="accent1"/>
+          </a:effectRef>
+          <a:fontRef idx="minor">
+            <a:schemeClr val="lt1"/>
+          </a:fontRef>
+        </p:style>
+        <p:txBody>
+          <a:bodyPr rtlCol="0" anchor="ctr"/>
+          <a:lstStyle/>
+          <a:p/>
+        </p:txBody>
+      </p:sp>
+      <p:sp>
+        <p:nvSpPr>
+          <p:cNvPr id="8" name="Oval 7"/>
+          <p:cNvSpPr/>
+          <p:nvPr/>
+        </p:nvSpPr>
+        <p:spPr>
+          <a:xfrm>
+            <a:off x="8046720" y="1828800"/>
+            <a:ext cx="548640" cy="548640"/>
           </a:xfrm>
           <a:prstGeom prst="ellipse">
             <a:avLst/>
@@ -8576,27 +11846,27 @@
           <a:p>
             <a:pPr algn="ctr"/>
             <a:r>
-              <a:rPr sz="1400" b="1">
+              <a:rPr sz="1300" b="1">
                 <a:solidFill>
                   <a:srgbClr val="202122"/>
                 </a:solidFill>
                 <a:latin typeface="Calibri"/>
               </a:rPr>
-              <a:t>1</a:t>
-            </a:r>
-          </a:p>
-        </p:txBody>
-      </p:sp>
-      <p:sp>
-        <p:nvSpPr>
-          <p:cNvPr id="7" name="TextBox 6"/>
-          <p:cNvSpPr txBox="1"/>
-          <p:nvPr/>
-        </p:nvSpPr>
-        <p:spPr>
-          <a:xfrm>
-            <a:off x="1234440" y="1600200"/>
-            <a:ext cx="10408615" cy="1030986"/>
+              <a:t>e.g.</a:t>
+            </a:r>
+          </a:p>
+        </p:txBody>
+      </p:sp>
+      <p:sp>
+        <p:nvSpPr>
+          <p:cNvPr id="9" name="TextBox 8"/>
+          <p:cNvSpPr txBox="1"/>
+          <p:nvPr/>
+        </p:nvSpPr>
+        <p:spPr>
+          <a:xfrm>
+            <a:off x="8046720" y="2560320"/>
+            <a:ext cx="3291840" cy="365760"/>
           </a:xfrm>
           <a:prstGeom prst="rect">
             <a:avLst/>
@@ -8609,80 +11879,27 @@
           <a:p>
             <a:pPr algn="l"/>
             <a:r>
-              <a:rPr sz="2200" b="0" i="0">
-                <a:solidFill>
-                  <a:srgbClr val="202122"/>
-                </a:solidFill>
-                <a:latin typeface="Calibri"/>
-              </a:rPr>
-              <a:t>Why hash passwords rather than encrypt them?</a:t>
-            </a:r>
-          </a:p>
-        </p:txBody>
-      </p:sp>
-      <p:sp>
-        <p:nvSpPr>
-          <p:cNvPr id="8" name="Oval 7"/>
-          <p:cNvSpPr/>
-          <p:nvPr/>
-        </p:nvSpPr>
-        <p:spPr>
-          <a:xfrm>
-            <a:off x="548640" y="2814066"/>
-            <a:ext cx="411480" cy="411480"/>
-          </a:xfrm>
-          <a:prstGeom prst="ellipse">
-            <a:avLst/>
-          </a:prstGeom>
-          <a:solidFill>
-            <a:srgbClr val="F2B705"/>
-          </a:solidFill>
-          <a:ln>
-            <a:noFill/>
-          </a:ln>
-          <a:effectLst/>
-        </p:spPr>
-        <p:style>
-          <a:lnRef idx="1">
-            <a:schemeClr val="accent1"/>
-          </a:lnRef>
-          <a:fillRef idx="3">
-            <a:schemeClr val="accent1"/>
-          </a:fillRef>
-          <a:effectRef idx="2">
-            <a:schemeClr val="accent1"/>
-          </a:effectRef>
-          <a:fontRef idx="minor">
-            <a:schemeClr val="lt1"/>
-          </a:fontRef>
-        </p:style>
-        <p:txBody>
-          <a:bodyPr rtlCol="0" anchor="ctr" lIns="0" rIns="0" tIns="0" bIns="0"/>
-          <a:lstStyle/>
-          <a:p>
-            <a:pPr algn="ctr"/>
-            <a:r>
-              <a:rPr sz="1400" b="1">
-                <a:solidFill>
-                  <a:srgbClr val="202122"/>
-                </a:solidFill>
-                <a:latin typeface="Calibri"/>
-              </a:rPr>
-              <a:t>2</a:t>
-            </a:r>
-          </a:p>
-        </p:txBody>
-      </p:sp>
-      <p:sp>
-        <p:nvSpPr>
-          <p:cNvPr id="9" name="TextBox 8"/>
-          <p:cNvSpPr txBox="1"/>
-          <p:nvPr/>
-        </p:nvSpPr>
-        <p:spPr>
-          <a:xfrm>
-            <a:off x="1234440" y="2795778"/>
-            <a:ext cx="10408615" cy="1030986"/>
+              <a:rPr sz="1300" b="1" i="0">
+                <a:solidFill>
+                  <a:srgbClr val="A9C8F0"/>
+                </a:solidFill>
+                <a:latin typeface="Calibri"/>
+              </a:rPr>
+              <a:t>EXAMPLE</a:t>
+            </a:r>
+          </a:p>
+        </p:txBody>
+      </p:sp>
+      <p:sp>
+        <p:nvSpPr>
+          <p:cNvPr id="10" name="TextBox 9"/>
+          <p:cNvSpPr txBox="1"/>
+          <p:nvPr/>
+        </p:nvSpPr>
+        <p:spPr>
+          <a:xfrm>
+            <a:off x="8046720" y="2971800"/>
+            <a:ext cx="3291840" cy="2971800"/>
           </a:xfrm>
           <a:prstGeom prst="rect">
             <a:avLst/>
@@ -8695,185 +11912,13 @@
           <a:p>
             <a:pPr algn="l"/>
             <a:r>
-              <a:rPr sz="2200" b="0" i="0">
-                <a:solidFill>
-                  <a:srgbClr val="202122"/>
-                </a:solidFill>
-                <a:latin typeface="Calibri"/>
-              </a:rPr>
-              <a:t>What is an air gap?</a:t>
-            </a:r>
-          </a:p>
-        </p:txBody>
-      </p:sp>
-      <p:sp>
-        <p:nvSpPr>
-          <p:cNvPr id="10" name="Oval 9"/>
-          <p:cNvSpPr/>
-          <p:nvPr/>
-        </p:nvSpPr>
-        <p:spPr>
-          <a:xfrm>
-            <a:off x="548640" y="4009644"/>
-            <a:ext cx="411480" cy="411480"/>
-          </a:xfrm>
-          <a:prstGeom prst="ellipse">
-            <a:avLst/>
-          </a:prstGeom>
-          <a:solidFill>
-            <a:srgbClr val="F2B705"/>
-          </a:solidFill>
-          <a:ln>
-            <a:noFill/>
-          </a:ln>
-          <a:effectLst/>
-        </p:spPr>
-        <p:style>
-          <a:lnRef idx="1">
-            <a:schemeClr val="accent1"/>
-          </a:lnRef>
-          <a:fillRef idx="3">
-            <a:schemeClr val="accent1"/>
-          </a:fillRef>
-          <a:effectRef idx="2">
-            <a:schemeClr val="accent1"/>
-          </a:effectRef>
-          <a:fontRef idx="minor">
-            <a:schemeClr val="lt1"/>
-          </a:fontRef>
-        </p:style>
-        <p:txBody>
-          <a:bodyPr rtlCol="0" anchor="ctr" lIns="0" rIns="0" tIns="0" bIns="0"/>
-          <a:lstStyle/>
-          <a:p>
-            <a:pPr algn="ctr"/>
-            <a:r>
-              <a:rPr sz="1400" b="1">
-                <a:solidFill>
-                  <a:srgbClr val="202122"/>
-                </a:solidFill>
-                <a:latin typeface="Calibri"/>
-              </a:rPr>
-              <a:t>3</a:t>
-            </a:r>
-          </a:p>
-        </p:txBody>
-      </p:sp>
-      <p:sp>
-        <p:nvSpPr>
-          <p:cNvPr id="11" name="TextBox 10"/>
-          <p:cNvSpPr txBox="1"/>
-          <p:nvPr/>
-        </p:nvSpPr>
-        <p:spPr>
-          <a:xfrm>
-            <a:off x="1234440" y="3991356"/>
-            <a:ext cx="10408615" cy="1030986"/>
-          </a:xfrm>
-          <a:prstGeom prst="rect">
-            <a:avLst/>
-          </a:prstGeom>
-          <a:noFill/>
-        </p:spPr>
-        <p:txBody>
-          <a:bodyPr wrap="square" anchor="t" lIns="0" rIns="0" tIns="0" bIns="0"/>
-          <a:lstStyle/>
-          <a:p>
-            <a:pPr algn="l"/>
-            <a:r>
-              <a:rPr sz="2200" b="0" i="0">
-                <a:solidFill>
-                  <a:srgbClr val="202122"/>
-                </a:solidFill>
-                <a:latin typeface="Calibri"/>
-              </a:rPr>
-              <a:t>Which IAAA stage checks permissions?</a:t>
-            </a:r>
-          </a:p>
-        </p:txBody>
-      </p:sp>
-      <p:sp>
-        <p:nvSpPr>
-          <p:cNvPr id="12" name="Oval 11"/>
-          <p:cNvSpPr/>
-          <p:nvPr/>
-        </p:nvSpPr>
-        <p:spPr>
-          <a:xfrm>
-            <a:off x="548640" y="5205221"/>
-            <a:ext cx="411480" cy="411480"/>
-          </a:xfrm>
-          <a:prstGeom prst="ellipse">
-            <a:avLst/>
-          </a:prstGeom>
-          <a:solidFill>
-            <a:srgbClr val="F2B705"/>
-          </a:solidFill>
-          <a:ln>
-            <a:noFill/>
-          </a:ln>
-          <a:effectLst/>
-        </p:spPr>
-        <p:style>
-          <a:lnRef idx="1">
-            <a:schemeClr val="accent1"/>
-          </a:lnRef>
-          <a:fillRef idx="3">
-            <a:schemeClr val="accent1"/>
-          </a:fillRef>
-          <a:effectRef idx="2">
-            <a:schemeClr val="accent1"/>
-          </a:effectRef>
-          <a:fontRef idx="minor">
-            <a:schemeClr val="lt1"/>
-          </a:fontRef>
-        </p:style>
-        <p:txBody>
-          <a:bodyPr rtlCol="0" anchor="ctr" lIns="0" rIns="0" tIns="0" bIns="0"/>
-          <a:lstStyle/>
-          <a:p>
-            <a:pPr algn="ctr"/>
-            <a:r>
-              <a:rPr sz="1400" b="1">
-                <a:solidFill>
-                  <a:srgbClr val="202122"/>
-                </a:solidFill>
-                <a:latin typeface="Calibri"/>
-              </a:rPr>
-              <a:t>4</a:t>
-            </a:r>
-          </a:p>
-        </p:txBody>
-      </p:sp>
-      <p:sp>
-        <p:nvSpPr>
-          <p:cNvPr id="13" name="TextBox 12"/>
-          <p:cNvSpPr txBox="1"/>
-          <p:nvPr/>
-        </p:nvSpPr>
-        <p:spPr>
-          <a:xfrm>
-            <a:off x="1234440" y="5186933"/>
-            <a:ext cx="10408615" cy="1030986"/>
-          </a:xfrm>
-          <a:prstGeom prst="rect">
-            <a:avLst/>
-          </a:prstGeom>
-          <a:noFill/>
-        </p:spPr>
-        <p:txBody>
-          <a:bodyPr wrap="square" anchor="t" lIns="0" rIns="0" tIns="0" bIns="0"/>
-          <a:lstStyle/>
-          <a:p>
-            <a:pPr algn="l"/>
-            <a:r>
-              <a:rPr sz="2200" b="0" i="0">
-                <a:solidFill>
-                  <a:srgbClr val="202122"/>
-                </a:solidFill>
-                <a:latin typeface="Calibri"/>
-              </a:rPr>
-              <a:t>Which CIA property does a DDoS attack target?</a:t>
+              <a:rPr sz="1900" b="0" i="0">
+                <a:solidFill>
+                  <a:srgbClr val="FFFFFF"/>
+                </a:solidFill>
+                <a:latin typeface="Cambria"/>
+              </a:rPr>
+              <a:t>A DDoS attack on an online shop breaks availability; an attacker changing prices breaks integrity; leaked customer data breaks confidentiality.</a:t>
             </a:r>
           </a:p>
         </p:txBody>
@@ -8965,7 +12010,7 @@
                 </a:solidFill>
                 <a:latin typeface="Cambria"/>
               </a:rPr>
-              <a:t>Answers</a:t>
+              <a:t>The CIA triad</a:t>
             </a:r>
           </a:p>
         </p:txBody>
@@ -9038,14 +12083,58 @@
       </p:sp>
       <p:sp>
         <p:nvSpPr>
-          <p:cNvPr id="6" name="Oval 5"/>
+          <p:cNvPr id="6" name="Rounded Rectangle 5"/>
           <p:cNvSpPr/>
           <p:nvPr/>
         </p:nvSpPr>
         <p:spPr>
           <a:xfrm>
-            <a:off x="548640" y="1618488"/>
-            <a:ext cx="411480" cy="411480"/>
+            <a:off x="548640" y="1600200"/>
+            <a:ext cx="3515258" cy="4572000"/>
+          </a:xfrm>
+          <a:prstGeom prst="roundRect">
+            <a:avLst>
+              <a:gd name="adj" fmla="val 6000"/>
+            </a:avLst>
+          </a:prstGeom>
+          <a:solidFill>
+            <a:srgbClr val="EAF3FF"/>
+          </a:solidFill>
+          <a:ln>
+            <a:noFill/>
+          </a:ln>
+          <a:effectLst/>
+        </p:spPr>
+        <p:style>
+          <a:lnRef idx="1">
+            <a:schemeClr val="accent1"/>
+          </a:lnRef>
+          <a:fillRef idx="3">
+            <a:schemeClr val="accent1"/>
+          </a:fillRef>
+          <a:effectRef idx="2">
+            <a:schemeClr val="accent1"/>
+          </a:effectRef>
+          <a:fontRef idx="minor">
+            <a:schemeClr val="lt1"/>
+          </a:fontRef>
+        </p:style>
+        <p:txBody>
+          <a:bodyPr rtlCol="0" anchor="ctr"/>
+          <a:lstStyle/>
+          <a:p/>
+        </p:txBody>
+      </p:sp>
+      <p:sp>
+        <p:nvSpPr>
+          <p:cNvPr id="7" name="Oval 6"/>
+          <p:cNvSpPr/>
+          <p:nvPr/>
+        </p:nvSpPr>
+        <p:spPr>
+          <a:xfrm>
+            <a:off x="777240" y="1828800"/>
+            <a:ext cx="457200" cy="457200"/>
           </a:xfrm>
           <a:prstGeom prst="ellipse">
             <a:avLst/>
@@ -9078,7 +12167,7 @@
           <a:p>
             <a:pPr algn="ctr"/>
             <a:r>
-              <a:rPr sz="1400" b="1">
+              <a:rPr sz="1500" b="1">
                 <a:solidFill>
                   <a:srgbClr val="202122"/>
                 </a:solidFill>
@@ -9091,14 +12180,47 @@
       </p:sp>
       <p:sp>
         <p:nvSpPr>
-          <p:cNvPr id="7" name="TextBox 6"/>
-          <p:cNvSpPr txBox="1"/>
-          <p:nvPr/>
-        </p:nvSpPr>
-        <p:spPr>
-          <a:xfrm>
-            <a:off x="1234440" y="1600200"/>
-            <a:ext cx="10408615" cy="1030986"/>
+          <p:cNvPr id="8" name="TextBox 7"/>
+          <p:cNvSpPr txBox="1"/>
+          <p:nvPr/>
+        </p:nvSpPr>
+        <p:spPr>
+          <a:xfrm>
+            <a:off x="1371600" y="1801368"/>
+            <a:ext cx="2509418" cy="512064"/>
+          </a:xfrm>
+          <a:prstGeom prst="rect">
+            <a:avLst/>
+          </a:prstGeom>
+          <a:noFill/>
+        </p:spPr>
+        <p:txBody>
+          <a:bodyPr wrap="square" anchor="ctr" lIns="0" rIns="0" tIns="0" bIns="0"/>
+          <a:lstStyle/>
+          <a:p>
+            <a:pPr algn="l"/>
+            <a:r>
+              <a:rPr sz="1900" b="1" i="0">
+                <a:solidFill>
+                  <a:srgbClr val="03306E"/>
+                </a:solidFill>
+                <a:latin typeface="Calibri"/>
+              </a:rPr>
+              <a:t>Confidentiality</a:t>
+            </a:r>
+          </a:p>
+        </p:txBody>
+      </p:sp>
+      <p:sp>
+        <p:nvSpPr>
+          <p:cNvPr id="9" name="TextBox 8"/>
+          <p:cNvSpPr txBox="1"/>
+          <p:nvPr/>
+        </p:nvSpPr>
+        <p:spPr>
+          <a:xfrm>
+            <a:off x="777240" y="2468880"/>
+            <a:ext cx="3058058" cy="3566160"/>
           </a:xfrm>
           <a:prstGeom prst="rect">
             <a:avLst/>
@@ -9111,38 +12233,71 @@
           <a:p>
             <a:pPr algn="l"/>
             <a:r>
-              <a:rPr sz="1800" b="0" i="0">
-                <a:solidFill>
-                  <a:srgbClr val="54595D"/>
-                </a:solidFill>
-                <a:latin typeface="Calibri"/>
-              </a:rPr>
-              <a:t>Why hash passwords rather than encrypt them?</a:t>
-            </a:r>
-          </a:p>
-          <a:p>
-            <a:r>
-              <a:rPr sz="1800" b="1">
-                <a:solidFill>
-                  <a:srgbClr val="03306E"/>
-                </a:solidFill>
-                <a:latin typeface="Calibri"/>
-              </a:rPr>
-              <a:t>Hashing is one way, so stored passwords cannot be reversed.</a:t>
-            </a:r>
-          </a:p>
-        </p:txBody>
-      </p:sp>
-      <p:sp>
-        <p:nvSpPr>
-          <p:cNvPr id="8" name="Oval 7"/>
+              <a:rPr sz="2000" b="0" i="0">
+                <a:solidFill>
+                  <a:srgbClr val="202122"/>
+                </a:solidFill>
+                <a:latin typeface="Calibri"/>
+              </a:rPr>
+              <a:t>Controlling who can access data.</a:t>
+            </a:r>
+          </a:p>
+        </p:txBody>
+      </p:sp>
+      <p:sp>
+        <p:nvSpPr>
+          <p:cNvPr id="10" name="Rounded Rectangle 9"/>
           <p:cNvSpPr/>
           <p:nvPr/>
         </p:nvSpPr>
         <p:spPr>
           <a:xfrm>
-            <a:off x="548640" y="2814066"/>
-            <a:ext cx="411480" cy="411480"/>
+            <a:off x="4338218" y="1600200"/>
+            <a:ext cx="3515258" cy="4572000"/>
+          </a:xfrm>
+          <a:prstGeom prst="roundRect">
+            <a:avLst>
+              <a:gd name="adj" fmla="val 6000"/>
+            </a:avLst>
+          </a:prstGeom>
+          <a:solidFill>
+            <a:srgbClr val="EAF3FF"/>
+          </a:solidFill>
+          <a:ln>
+            <a:noFill/>
+          </a:ln>
+          <a:effectLst/>
+        </p:spPr>
+        <p:style>
+          <a:lnRef idx="1">
+            <a:schemeClr val="accent1"/>
+          </a:lnRef>
+          <a:fillRef idx="3">
+            <a:schemeClr val="accent1"/>
+          </a:fillRef>
+          <a:effectRef idx="2">
+            <a:schemeClr val="accent1"/>
+          </a:effectRef>
+          <a:fontRef idx="minor">
+            <a:schemeClr val="lt1"/>
+          </a:fontRef>
+        </p:style>
+        <p:txBody>
+          <a:bodyPr rtlCol="0" anchor="ctr"/>
+          <a:lstStyle/>
+          <a:p/>
+        </p:txBody>
+      </p:sp>
+      <p:sp>
+        <p:nvSpPr>
+          <p:cNvPr id="11" name="Oval 10"/>
+          <p:cNvSpPr/>
+          <p:nvPr/>
+        </p:nvSpPr>
+        <p:spPr>
+          <a:xfrm>
+            <a:off x="4566818" y="1828800"/>
+            <a:ext cx="457200" cy="457200"/>
           </a:xfrm>
           <a:prstGeom prst="ellipse">
             <a:avLst/>
@@ -9175,7 +12330,7 @@
           <a:p>
             <a:pPr algn="ctr"/>
             <a:r>
-              <a:rPr sz="1400" b="1">
+              <a:rPr sz="1500" b="1">
                 <a:solidFill>
                   <a:srgbClr val="202122"/>
                 </a:solidFill>
@@ -9188,14 +12343,47 @@
       </p:sp>
       <p:sp>
         <p:nvSpPr>
-          <p:cNvPr id="9" name="TextBox 8"/>
-          <p:cNvSpPr txBox="1"/>
-          <p:nvPr/>
-        </p:nvSpPr>
-        <p:spPr>
-          <a:xfrm>
-            <a:off x="1234440" y="2795778"/>
-            <a:ext cx="10408615" cy="1030986"/>
+          <p:cNvPr id="12" name="TextBox 11"/>
+          <p:cNvSpPr txBox="1"/>
+          <p:nvPr/>
+        </p:nvSpPr>
+        <p:spPr>
+          <a:xfrm>
+            <a:off x="5161178" y="1801368"/>
+            <a:ext cx="2509418" cy="512064"/>
+          </a:xfrm>
+          <a:prstGeom prst="rect">
+            <a:avLst/>
+          </a:prstGeom>
+          <a:noFill/>
+        </p:spPr>
+        <p:txBody>
+          <a:bodyPr wrap="square" anchor="ctr" lIns="0" rIns="0" tIns="0" bIns="0"/>
+          <a:lstStyle/>
+          <a:p>
+            <a:pPr algn="l"/>
+            <a:r>
+              <a:rPr sz="1900" b="1" i="0">
+                <a:solidFill>
+                  <a:srgbClr val="03306E"/>
+                </a:solidFill>
+                <a:latin typeface="Calibri"/>
+              </a:rPr>
+              <a:t>Integrity</a:t>
+            </a:r>
+          </a:p>
+        </p:txBody>
+      </p:sp>
+      <p:sp>
+        <p:nvSpPr>
+          <p:cNvPr id="13" name="TextBox 12"/>
+          <p:cNvSpPr txBox="1"/>
+          <p:nvPr/>
+        </p:nvSpPr>
+        <p:spPr>
+          <a:xfrm>
+            <a:off x="4566818" y="2468880"/>
+            <a:ext cx="3058058" cy="3566160"/>
           </a:xfrm>
           <a:prstGeom prst="rect">
             <a:avLst/>
@@ -9208,38 +12396,71 @@
           <a:p>
             <a:pPr algn="l"/>
             <a:r>
-              <a:rPr sz="1800" b="0" i="0">
-                <a:solidFill>
-                  <a:srgbClr val="54595D"/>
-                </a:solidFill>
-                <a:latin typeface="Calibri"/>
-              </a:rPr>
-              <a:t>What is an air gap?</a:t>
-            </a:r>
-          </a:p>
-          <a:p>
-            <a:r>
-              <a:rPr sz="1800" b="1">
-                <a:solidFill>
-                  <a:srgbClr val="03306E"/>
-                </a:solidFill>
-                <a:latin typeface="Calibri"/>
-              </a:rPr>
-              <a:t>Physically isolating a system from other networks.</a:t>
-            </a:r>
-          </a:p>
-        </p:txBody>
-      </p:sp>
-      <p:sp>
-        <p:nvSpPr>
-          <p:cNvPr id="10" name="Oval 9"/>
+              <a:rPr sz="2000" b="0" i="0">
+                <a:solidFill>
+                  <a:srgbClr val="202122"/>
+                </a:solidFill>
+                <a:latin typeface="Calibri"/>
+              </a:rPr>
+              <a:t>Data is not tampered with. Supported by confidentiality.</a:t>
+            </a:r>
+          </a:p>
+        </p:txBody>
+      </p:sp>
+      <p:sp>
+        <p:nvSpPr>
+          <p:cNvPr id="14" name="Rounded Rectangle 13"/>
           <p:cNvSpPr/>
           <p:nvPr/>
         </p:nvSpPr>
         <p:spPr>
           <a:xfrm>
-            <a:off x="548640" y="4009644"/>
-            <a:ext cx="411480" cy="411480"/>
+            <a:off x="8127796" y="1600200"/>
+            <a:ext cx="3515258" cy="4572000"/>
+          </a:xfrm>
+          <a:prstGeom prst="roundRect">
+            <a:avLst>
+              <a:gd name="adj" fmla="val 6000"/>
+            </a:avLst>
+          </a:prstGeom>
+          <a:solidFill>
+            <a:srgbClr val="EAF3FF"/>
+          </a:solidFill>
+          <a:ln>
+            <a:noFill/>
+          </a:ln>
+          <a:effectLst/>
+        </p:spPr>
+        <p:style>
+          <a:lnRef idx="1">
+            <a:schemeClr val="accent1"/>
+          </a:lnRef>
+          <a:fillRef idx="3">
+            <a:schemeClr val="accent1"/>
+          </a:fillRef>
+          <a:effectRef idx="2">
+            <a:schemeClr val="accent1"/>
+          </a:effectRef>
+          <a:fontRef idx="minor">
+            <a:schemeClr val="lt1"/>
+          </a:fontRef>
+        </p:style>
+        <p:txBody>
+          <a:bodyPr rtlCol="0" anchor="ctr"/>
+          <a:lstStyle/>
+          <a:p/>
+        </p:txBody>
+      </p:sp>
+      <p:sp>
+        <p:nvSpPr>
+          <p:cNvPr id="15" name="Oval 14"/>
+          <p:cNvSpPr/>
+          <p:nvPr/>
+        </p:nvSpPr>
+        <p:spPr>
+          <a:xfrm>
+            <a:off x="8356396" y="1828800"/>
+            <a:ext cx="457200" cy="457200"/>
           </a:xfrm>
           <a:prstGeom prst="ellipse">
             <a:avLst/>
@@ -9272,7 +12493,7 @@
           <a:p>
             <a:pPr algn="ctr"/>
             <a:r>
-              <a:rPr sz="1400" b="1">
+              <a:rPr sz="1500" b="1">
                 <a:solidFill>
                   <a:srgbClr val="202122"/>
                 </a:solidFill>
@@ -9285,14 +12506,47 @@
       </p:sp>
       <p:sp>
         <p:nvSpPr>
-          <p:cNvPr id="11" name="TextBox 10"/>
-          <p:cNvSpPr txBox="1"/>
-          <p:nvPr/>
-        </p:nvSpPr>
-        <p:spPr>
-          <a:xfrm>
-            <a:off x="1234440" y="3991356"/>
-            <a:ext cx="10408615" cy="1030986"/>
+          <p:cNvPr id="16" name="TextBox 15"/>
+          <p:cNvSpPr txBox="1"/>
+          <p:nvPr/>
+        </p:nvSpPr>
+        <p:spPr>
+          <a:xfrm>
+            <a:off x="8950756" y="1801368"/>
+            <a:ext cx="2509418" cy="512064"/>
+          </a:xfrm>
+          <a:prstGeom prst="rect">
+            <a:avLst/>
+          </a:prstGeom>
+          <a:noFill/>
+        </p:spPr>
+        <p:txBody>
+          <a:bodyPr wrap="square" anchor="ctr" lIns="0" rIns="0" tIns="0" bIns="0"/>
+          <a:lstStyle/>
+          <a:p>
+            <a:pPr algn="l"/>
+            <a:r>
+              <a:rPr sz="1900" b="1" i="0">
+                <a:solidFill>
+                  <a:srgbClr val="03306E"/>
+                </a:solidFill>
+                <a:latin typeface="Calibri"/>
+              </a:rPr>
+              <a:t>Availability</a:t>
+            </a:r>
+          </a:p>
+        </p:txBody>
+      </p:sp>
+      <p:sp>
+        <p:nvSpPr>
+          <p:cNvPr id="17" name="TextBox 16"/>
+          <p:cNvSpPr txBox="1"/>
+          <p:nvPr/>
+        </p:nvSpPr>
+        <p:spPr>
+          <a:xfrm>
+            <a:off x="8356396" y="2468880"/>
+            <a:ext cx="3058058" cy="3566160"/>
           </a:xfrm>
           <a:prstGeom prst="rect">
             <a:avLst/>
@@ -9305,121 +12559,13 @@
           <a:p>
             <a:pPr algn="l"/>
             <a:r>
-              <a:rPr sz="1800" b="0" i="0">
-                <a:solidFill>
-                  <a:srgbClr val="54595D"/>
-                </a:solidFill>
-                <a:latin typeface="Calibri"/>
-              </a:rPr>
-              <a:t>Which IAAA stage checks permissions?</a:t>
-            </a:r>
-          </a:p>
-          <a:p>
-            <a:r>
-              <a:rPr sz="1800" b="1">
-                <a:solidFill>
-                  <a:srgbClr val="03306E"/>
-                </a:solidFill>
-                <a:latin typeface="Calibri"/>
-              </a:rPr>
-              <a:t>Authorisation.</a:t>
-            </a:r>
-          </a:p>
-        </p:txBody>
-      </p:sp>
-      <p:sp>
-        <p:nvSpPr>
-          <p:cNvPr id="12" name="Oval 11"/>
-          <p:cNvSpPr/>
-          <p:nvPr/>
-        </p:nvSpPr>
-        <p:spPr>
-          <a:xfrm>
-            <a:off x="548640" y="5205221"/>
-            <a:ext cx="411480" cy="411480"/>
-          </a:xfrm>
-          <a:prstGeom prst="ellipse">
-            <a:avLst/>
-          </a:prstGeom>
-          <a:solidFill>
-            <a:srgbClr val="F2B705"/>
-          </a:solidFill>
-          <a:ln>
-            <a:noFill/>
-          </a:ln>
-          <a:effectLst/>
-        </p:spPr>
-        <p:style>
-          <a:lnRef idx="1">
-            <a:schemeClr val="accent1"/>
-          </a:lnRef>
-          <a:fillRef idx="3">
-            <a:schemeClr val="accent1"/>
-          </a:fillRef>
-          <a:effectRef idx="2">
-            <a:schemeClr val="accent1"/>
-          </a:effectRef>
-          <a:fontRef idx="minor">
-            <a:schemeClr val="lt1"/>
-          </a:fontRef>
-        </p:style>
-        <p:txBody>
-          <a:bodyPr rtlCol="0" anchor="ctr" lIns="0" rIns="0" tIns="0" bIns="0"/>
-          <a:lstStyle/>
-          <a:p>
-            <a:pPr algn="ctr"/>
-            <a:r>
-              <a:rPr sz="1400" b="1">
+              <a:rPr sz="2000" b="0" i="0">
                 <a:solidFill>
                   <a:srgbClr val="202122"/>
                 </a:solidFill>
                 <a:latin typeface="Calibri"/>
               </a:rPr>
-              <a:t>4</a:t>
-            </a:r>
-          </a:p>
-        </p:txBody>
-      </p:sp>
-      <p:sp>
-        <p:nvSpPr>
-          <p:cNvPr id="13" name="TextBox 12"/>
-          <p:cNvSpPr txBox="1"/>
-          <p:nvPr/>
-        </p:nvSpPr>
-        <p:spPr>
-          <a:xfrm>
-            <a:off x="1234440" y="5186933"/>
-            <a:ext cx="10408615" cy="1030986"/>
-          </a:xfrm>
-          <a:prstGeom prst="rect">
-            <a:avLst/>
-          </a:prstGeom>
-          <a:noFill/>
-        </p:spPr>
-        <p:txBody>
-          <a:bodyPr wrap="square" anchor="t" lIns="0" rIns="0" tIns="0" bIns="0"/>
-          <a:lstStyle/>
-          <a:p>
-            <a:pPr algn="l"/>
-            <a:r>
-              <a:rPr sz="1800" b="0" i="0">
-                <a:solidFill>
-                  <a:srgbClr val="54595D"/>
-                </a:solidFill>
-                <a:latin typeface="Calibri"/>
-              </a:rPr>
-              <a:t>Which CIA property does a DDoS attack target?</a:t>
-            </a:r>
-          </a:p>
-          <a:p>
-            <a:r>
-              <a:rPr sz="1800" b="1">
-                <a:solidFill>
-                  <a:srgbClr val="03306E"/>
-                </a:solidFill>
-                <a:latin typeface="Calibri"/>
-              </a:rPr>
-              <a:t>Availability.</a:t>
+              <a:t>Data is there when needed. Supported by integrity.</a:t>
             </a:r>
           </a:p>
         </p:txBody>
@@ -9511,7 +12657,7 @@
                 </a:solidFill>
                 <a:latin typeface="Cambria"/>
               </a:rPr>
-              <a:t>Activity: Design secure accounts</a:t>
+              <a:t>Quick check: The CIA triad</a:t>
             </a:r>
           </a:p>
         </p:txBody>
@@ -9584,19 +12730,17 @@
       </p:sp>
       <p:sp>
         <p:nvSpPr>
-          <p:cNvPr id="6" name="Rounded Rectangle 5"/>
+          <p:cNvPr id="6" name="Oval 5"/>
           <p:cNvSpPr/>
           <p:nvPr/>
         </p:nvSpPr>
         <p:spPr>
           <a:xfrm>
-            <a:off x="548640" y="1508760"/>
-            <a:ext cx="2011680" cy="457200"/>
-          </a:xfrm>
-          <a:prstGeom prst="roundRect">
-            <a:avLst>
-              <a:gd name="adj" fmla="val 50000"/>
-            </a:avLst>
+            <a:off x="548640" y="1691640"/>
+            <a:ext cx="502920" cy="502920"/>
+          </a:xfrm>
+          <a:prstGeom prst="ellipse">
+            <a:avLst/>
           </a:prstGeom>
           <a:solidFill>
             <a:srgbClr val="F2B705"/>
@@ -9621,9 +12765,20 @@
           </a:fontRef>
         </p:style>
         <p:txBody>
-          <a:bodyPr rtlCol="0" anchor="ctr"/>
-          <a:lstStyle/>
-          <a:p/>
+          <a:bodyPr rtlCol="0" anchor="ctr" lIns="0" rIns="0" tIns="0" bIns="0"/>
+          <a:lstStyle/>
+          <a:p>
+            <a:pPr algn="ctr"/>
+            <a:r>
+              <a:rPr sz="1600" b="1">
+                <a:solidFill>
+                  <a:srgbClr val="202122"/>
+                </a:solidFill>
+                <a:latin typeface="Calibri"/>
+              </a:rPr>
+              <a:t>1</a:t>
+            </a:r>
+          </a:p>
         </p:txBody>
       </p:sp>
       <p:sp>
@@ -9634,80 +12789,47 @@
         </p:nvSpPr>
         <p:spPr>
           <a:xfrm>
-            <a:off x="548640" y="1508760"/>
-            <a:ext cx="2011680" cy="457200"/>
-          </a:xfrm>
-          <a:prstGeom prst="rect">
-            <a:avLst/>
-          </a:prstGeom>
-          <a:noFill/>
-        </p:spPr>
-        <p:txBody>
-          <a:bodyPr wrap="square" anchor="ctr" lIns="0" rIns="0" tIns="0" bIns="0"/>
-          <a:lstStyle/>
-          <a:p>
-            <a:pPr algn="ctr"/>
-            <a:r>
-              <a:rPr sz="1400" b="1" i="0">
+            <a:off x="1371600" y="1645920"/>
+            <a:ext cx="10271455" cy="1188720"/>
+          </a:xfrm>
+          <a:prstGeom prst="rect">
+            <a:avLst/>
+          </a:prstGeom>
+          <a:noFill/>
+        </p:spPr>
+        <p:txBody>
+          <a:bodyPr wrap="square" anchor="t" lIns="0" rIns="0" tIns="0" bIns="0"/>
+          <a:lstStyle/>
+          <a:p>
+            <a:pPr algn="l"/>
+            <a:r>
+              <a:rPr sz="2400" b="0" i="0">
                 <a:solidFill>
                   <a:srgbClr val="202122"/>
                 </a:solidFill>
                 <a:latin typeface="Calibri"/>
               </a:rPr>
-              <a:t>25 minutes</a:t>
-            </a:r>
-          </a:p>
-        </p:txBody>
-      </p:sp>
-      <p:sp>
-        <p:nvSpPr>
-          <p:cNvPr id="8" name="TextBox 7"/>
-          <p:cNvSpPr txBox="1"/>
-          <p:nvPr/>
-        </p:nvSpPr>
-        <p:spPr>
-          <a:xfrm>
-            <a:off x="2743200" y="1508760"/>
-            <a:ext cx="4754880" cy="457200"/>
-          </a:xfrm>
-          <a:prstGeom prst="rect">
-            <a:avLst/>
-          </a:prstGeom>
-          <a:noFill/>
-        </p:spPr>
-        <p:txBody>
-          <a:bodyPr wrap="square" anchor="ctr" lIns="0" rIns="0" tIns="0" bIns="0"/>
-          <a:lstStyle/>
-          <a:p>
-            <a:pPr algn="l"/>
-            <a:r>
-              <a:rPr sz="1400" b="0" i="1">
-                <a:solidFill>
-                  <a:srgbClr val="54595D"/>
-                </a:solidFill>
-                <a:latin typeface="Calibri"/>
-              </a:rPr>
-              <a:t>Small groups</a:t>
-            </a:r>
-          </a:p>
-        </p:txBody>
-      </p:sp>
-      <p:sp>
-        <p:nvSpPr>
-          <p:cNvPr id="9" name="Oval 8"/>
+              <a:t>Which property does a DDoS attack target?</a:t>
+            </a:r>
+          </a:p>
+        </p:txBody>
+      </p:sp>
+      <p:sp>
+        <p:nvSpPr>
+          <p:cNvPr id="8" name="Oval 7"/>
           <p:cNvSpPr/>
           <p:nvPr/>
         </p:nvSpPr>
         <p:spPr>
           <a:xfrm>
-            <a:off x="548640" y="2482596"/>
-            <a:ext cx="384048" cy="384048"/>
+            <a:off x="548640" y="3108960"/>
+            <a:ext cx="502920" cy="502920"/>
           </a:xfrm>
           <a:prstGeom prst="ellipse">
             <a:avLst/>
           </a:prstGeom>
           <a:solidFill>
-            <a:srgbClr val="0645AD"/>
+            <a:srgbClr val="F2B705"/>
           </a:solidFill>
           <a:ln>
             <a:noFill/>
@@ -9734,66 +12856,66 @@
           <a:p>
             <a:pPr algn="ctr"/>
             <a:r>
-              <a:rPr sz="1300" b="1">
-                <a:solidFill>
-                  <a:srgbClr val="FFFFFF"/>
-                </a:solidFill>
-                <a:latin typeface="Calibri"/>
-              </a:rPr>
-              <a:t>1</a:t>
-            </a:r>
-          </a:p>
-        </p:txBody>
-      </p:sp>
-      <p:sp>
-        <p:nvSpPr>
-          <p:cNvPr id="10" name="TextBox 9"/>
-          <p:cNvSpPr txBox="1"/>
-          <p:nvPr/>
-        </p:nvSpPr>
-        <p:spPr>
-          <a:xfrm>
-            <a:off x="1143000" y="2240280"/>
-            <a:ext cx="5943600" cy="868680"/>
-          </a:xfrm>
-          <a:prstGeom prst="rect">
-            <a:avLst/>
-          </a:prstGeom>
-          <a:noFill/>
-        </p:spPr>
-        <p:txBody>
-          <a:bodyPr wrap="square" anchor="ctr" lIns="0" rIns="0" tIns="0" bIns="0"/>
+              <a:rPr sz="1600" b="1">
+                <a:solidFill>
+                  <a:srgbClr val="202122"/>
+                </a:solidFill>
+                <a:latin typeface="Calibri"/>
+              </a:rPr>
+              <a:t>2</a:t>
+            </a:r>
+          </a:p>
+        </p:txBody>
+      </p:sp>
+      <p:sp>
+        <p:nvSpPr>
+          <p:cNvPr id="9" name="TextBox 8"/>
+          <p:cNvSpPr txBox="1"/>
+          <p:nvPr/>
+        </p:nvSpPr>
+        <p:spPr>
+          <a:xfrm>
+            <a:off x="1371600" y="3063240"/>
+            <a:ext cx="10271455" cy="1188720"/>
+          </a:xfrm>
+          <a:prstGeom prst="rect">
+            <a:avLst/>
+          </a:prstGeom>
+          <a:noFill/>
+        </p:spPr>
+        <p:txBody>
+          <a:bodyPr wrap="square" anchor="t" lIns="0" rIns="0" tIns="0" bIns="0"/>
           <a:lstStyle/>
           <a:p>
             <a:pPr algn="l"/>
             <a:r>
-              <a:rPr sz="1700" b="0" i="0">
+              <a:rPr sz="2400" b="0" i="0">
                 <a:solidFill>
                   <a:srgbClr val="202122"/>
                 </a:solidFill>
                 <a:latin typeface="Calibri"/>
               </a:rPr>
-              <a:t>Design the account system for a school revision app.</a:t>
-            </a:r>
-          </a:p>
-        </p:txBody>
-      </p:sp>
-      <p:sp>
-        <p:nvSpPr>
-          <p:cNvPr id="11" name="Oval 10"/>
+              <a:t>What does integrity mean?</a:t>
+            </a:r>
+          </a:p>
+        </p:txBody>
+      </p:sp>
+      <p:sp>
+        <p:nvSpPr>
+          <p:cNvPr id="10" name="Oval 9"/>
           <p:cNvSpPr/>
           <p:nvPr/>
         </p:nvSpPr>
         <p:spPr>
           <a:xfrm>
-            <a:off x="548640" y="3461004"/>
-            <a:ext cx="384048" cy="384048"/>
+            <a:off x="548640" y="4526280"/>
+            <a:ext cx="502920" cy="502920"/>
           </a:xfrm>
           <a:prstGeom prst="ellipse">
             <a:avLst/>
           </a:prstGeom>
           <a:solidFill>
-            <a:srgbClr val="0645AD"/>
+            <a:srgbClr val="F2B705"/>
           </a:solidFill>
           <a:ln>
             <a:noFill/>
@@ -9820,13 +12942,46 @@
           <a:p>
             <a:pPr algn="ctr"/>
             <a:r>
-              <a:rPr sz="1300" b="1">
-                <a:solidFill>
-                  <a:srgbClr val="FFFFFF"/>
-                </a:solidFill>
-                <a:latin typeface="Calibri"/>
-              </a:rPr>
-              <a:t>2</a:t>
+              <a:rPr sz="1600" b="1">
+                <a:solidFill>
+                  <a:srgbClr val="202122"/>
+                </a:solidFill>
+                <a:latin typeface="Calibri"/>
+              </a:rPr>
+              <a:t>3</a:t>
+            </a:r>
+          </a:p>
+        </p:txBody>
+      </p:sp>
+      <p:sp>
+        <p:nvSpPr>
+          <p:cNvPr id="11" name="TextBox 10"/>
+          <p:cNvSpPr txBox="1"/>
+          <p:nvPr/>
+        </p:nvSpPr>
+        <p:spPr>
+          <a:xfrm>
+            <a:off x="1371600" y="4480560"/>
+            <a:ext cx="10271455" cy="1188720"/>
+          </a:xfrm>
+          <a:prstGeom prst="rect">
+            <a:avLst/>
+          </a:prstGeom>
+          <a:noFill/>
+        </p:spPr>
+        <p:txBody>
+          <a:bodyPr wrap="square" anchor="t" lIns="0" rIns="0" tIns="0" bIns="0"/>
+          <a:lstStyle/>
+          <a:p>
+            <a:pPr algn="l"/>
+            <a:r>
+              <a:rPr sz="2400" b="0" i="0">
+                <a:solidFill>
+                  <a:srgbClr val="202122"/>
+                </a:solidFill>
+                <a:latin typeface="Calibri"/>
+              </a:rPr>
+              <a:t>How is confidentiality protected?</a:t>
             </a:r>
           </a:p>
         </p:txBody>
@@ -9839,362 +12994,27 @@
         </p:nvSpPr>
         <p:spPr>
           <a:xfrm>
-            <a:off x="1143000" y="3218688"/>
-            <a:ext cx="5943600" cy="868680"/>
-          </a:xfrm>
-          <a:prstGeom prst="rect">
-            <a:avLst/>
-          </a:prstGeom>
-          <a:noFill/>
-        </p:spPr>
-        <p:txBody>
-          <a:bodyPr wrap="square" anchor="ctr" lIns="0" rIns="0" tIns="0" bIns="0"/>
+            <a:off x="548640" y="5852160"/>
+            <a:ext cx="11094415" cy="365760"/>
+          </a:xfrm>
+          <a:prstGeom prst="rect">
+            <a:avLst/>
+          </a:prstGeom>
+          <a:noFill/>
+        </p:spPr>
+        <p:txBody>
+          <a:bodyPr wrap="square" anchor="t" lIns="0" rIns="0" tIns="0" bIns="0"/>
           <a:lstStyle/>
           <a:p>
             <a:pPr algn="l"/>
             <a:r>
-              <a:rPr sz="1700" b="0" i="0">
-                <a:solidFill>
-                  <a:srgbClr val="202122"/>
-                </a:solidFill>
-                <a:latin typeface="Calibri"/>
-              </a:rPr>
-              <a:t>Map each IAAA stage to a feature.</a:t>
-            </a:r>
-          </a:p>
-        </p:txBody>
-      </p:sp>
-      <p:sp>
-        <p:nvSpPr>
-          <p:cNvPr id="13" name="Oval 12"/>
-          <p:cNvSpPr/>
-          <p:nvPr/>
-        </p:nvSpPr>
-        <p:spPr>
-          <a:xfrm>
-            <a:off x="548640" y="4439412"/>
-            <a:ext cx="384048" cy="384048"/>
-          </a:xfrm>
-          <a:prstGeom prst="ellipse">
-            <a:avLst/>
-          </a:prstGeom>
-          <a:solidFill>
-            <a:srgbClr val="0645AD"/>
-          </a:solidFill>
-          <a:ln>
-            <a:noFill/>
-          </a:ln>
-          <a:effectLst/>
-        </p:spPr>
-        <p:style>
-          <a:lnRef idx="1">
-            <a:schemeClr val="accent1"/>
-          </a:lnRef>
-          <a:fillRef idx="3">
-            <a:schemeClr val="accent1"/>
-          </a:fillRef>
-          <a:effectRef idx="2">
-            <a:schemeClr val="accent1"/>
-          </a:effectRef>
-          <a:fontRef idx="minor">
-            <a:schemeClr val="lt1"/>
-          </a:fontRef>
-        </p:style>
-        <p:txBody>
-          <a:bodyPr rtlCol="0" anchor="ctr" lIns="0" rIns="0" tIns="0" bIns="0"/>
-          <a:lstStyle/>
-          <a:p>
-            <a:pPr algn="ctr"/>
-            <a:r>
-              <a:rPr sz="1300" b="1">
-                <a:solidFill>
-                  <a:srgbClr val="FFFFFF"/>
-                </a:solidFill>
-                <a:latin typeface="Calibri"/>
-              </a:rPr>
-              <a:t>3</a:t>
-            </a:r>
-          </a:p>
-        </p:txBody>
-      </p:sp>
-      <p:sp>
-        <p:nvSpPr>
-          <p:cNvPr id="14" name="TextBox 13"/>
-          <p:cNvSpPr txBox="1"/>
-          <p:nvPr/>
-        </p:nvSpPr>
-        <p:spPr>
-          <a:xfrm>
-            <a:off x="1143000" y="4197096"/>
-            <a:ext cx="5943600" cy="868680"/>
-          </a:xfrm>
-          <a:prstGeom prst="rect">
-            <a:avLst/>
-          </a:prstGeom>
-          <a:noFill/>
-        </p:spPr>
-        <p:txBody>
-          <a:bodyPr wrap="square" anchor="ctr" lIns="0" rIns="0" tIns="0" bIns="0"/>
-          <a:lstStyle/>
-          <a:p>
-            <a:pPr algn="l"/>
-            <a:r>
-              <a:rPr sz="1700" b="0" i="0">
-                <a:solidFill>
-                  <a:srgbClr val="202122"/>
-                </a:solidFill>
-                <a:latin typeface="Calibri"/>
-              </a:rPr>
-              <a:t>Link each feature to C, I or A.</a:t>
-            </a:r>
-          </a:p>
-        </p:txBody>
-      </p:sp>
-      <p:sp>
-        <p:nvSpPr>
-          <p:cNvPr id="15" name="Oval 14"/>
-          <p:cNvSpPr/>
-          <p:nvPr/>
-        </p:nvSpPr>
-        <p:spPr>
-          <a:xfrm>
-            <a:off x="548640" y="5417820"/>
-            <a:ext cx="384048" cy="384048"/>
-          </a:xfrm>
-          <a:prstGeom prst="ellipse">
-            <a:avLst/>
-          </a:prstGeom>
-          <a:solidFill>
-            <a:srgbClr val="0645AD"/>
-          </a:solidFill>
-          <a:ln>
-            <a:noFill/>
-          </a:ln>
-          <a:effectLst/>
-        </p:spPr>
-        <p:style>
-          <a:lnRef idx="1">
-            <a:schemeClr val="accent1"/>
-          </a:lnRef>
-          <a:fillRef idx="3">
-            <a:schemeClr val="accent1"/>
-          </a:fillRef>
-          <a:effectRef idx="2">
-            <a:schemeClr val="accent1"/>
-          </a:effectRef>
-          <a:fontRef idx="minor">
-            <a:schemeClr val="lt1"/>
-          </a:fontRef>
-        </p:style>
-        <p:txBody>
-          <a:bodyPr rtlCol="0" anchor="ctr" lIns="0" rIns="0" tIns="0" bIns="0"/>
-          <a:lstStyle/>
-          <a:p>
-            <a:pPr algn="ctr"/>
-            <a:r>
-              <a:rPr sz="1300" b="1">
-                <a:solidFill>
-                  <a:srgbClr val="FFFFFF"/>
-                </a:solidFill>
-                <a:latin typeface="Calibri"/>
-              </a:rPr>
-              <a:t>4</a:t>
-            </a:r>
-          </a:p>
-        </p:txBody>
-      </p:sp>
-      <p:sp>
-        <p:nvSpPr>
-          <p:cNvPr id="16" name="TextBox 15"/>
-          <p:cNvSpPr txBox="1"/>
-          <p:nvPr/>
-        </p:nvSpPr>
-        <p:spPr>
-          <a:xfrm>
-            <a:off x="1143000" y="5175504"/>
-            <a:ext cx="5943600" cy="868680"/>
-          </a:xfrm>
-          <a:prstGeom prst="rect">
-            <a:avLst/>
-          </a:prstGeom>
-          <a:noFill/>
-        </p:spPr>
-        <p:txBody>
-          <a:bodyPr wrap="square" anchor="ctr" lIns="0" rIns="0" tIns="0" bIns="0"/>
-          <a:lstStyle/>
-          <a:p>
-            <a:pPr algn="l"/>
-            <a:r>
-              <a:rPr sz="1700" b="0" i="0">
-                <a:solidFill>
-                  <a:srgbClr val="202122"/>
-                </a:solidFill>
-                <a:latin typeface="Calibri"/>
-              </a:rPr>
-              <a:t>Choose two mitigation techniques for the server.</a:t>
-            </a:r>
-          </a:p>
-        </p:txBody>
-      </p:sp>
-      <p:sp>
-        <p:nvSpPr>
-          <p:cNvPr id="17" name="Rounded Rectangle 16"/>
-          <p:cNvSpPr/>
-          <p:nvPr/>
-        </p:nvSpPr>
-        <p:spPr>
-          <a:xfrm>
-            <a:off x="7772400" y="1508760"/>
-            <a:ext cx="3867912" cy="4572000"/>
-          </a:xfrm>
-          <a:prstGeom prst="roundRect">
-            <a:avLst>
-              <a:gd name="adj" fmla="val 8000"/>
-            </a:avLst>
-          </a:prstGeom>
-          <a:solidFill>
-            <a:srgbClr val="EAF3FF"/>
-          </a:solidFill>
-          <a:ln>
-            <a:noFill/>
-          </a:ln>
-          <a:effectLst/>
-        </p:spPr>
-        <p:style>
-          <a:lnRef idx="1">
-            <a:schemeClr val="accent1"/>
-          </a:lnRef>
-          <a:fillRef idx="3">
-            <a:schemeClr val="accent1"/>
-          </a:fillRef>
-          <a:effectRef idx="2">
-            <a:schemeClr val="accent1"/>
-          </a:effectRef>
-          <a:fontRef idx="minor">
-            <a:schemeClr val="lt1"/>
-          </a:fontRef>
-        </p:style>
-        <p:txBody>
-          <a:bodyPr rtlCol="0" anchor="ctr"/>
-          <a:lstStyle/>
-          <a:p/>
-        </p:txBody>
-      </p:sp>
-      <p:sp>
-        <p:nvSpPr>
-          <p:cNvPr id="18" name="TextBox 17"/>
-          <p:cNvSpPr txBox="1"/>
-          <p:nvPr/>
-        </p:nvSpPr>
-        <p:spPr>
-          <a:xfrm>
-            <a:off x="8046720" y="1737360"/>
-            <a:ext cx="3291840" cy="365760"/>
-          </a:xfrm>
-          <a:prstGeom prst="rect">
-            <a:avLst/>
-          </a:prstGeom>
-          <a:noFill/>
-        </p:spPr>
-        <p:txBody>
-          <a:bodyPr wrap="square" anchor="t" lIns="0" rIns="0" tIns="0" bIns="0"/>
-          <a:lstStyle/>
-          <a:p>
-            <a:pPr algn="l"/>
-            <a:r>
-              <a:rPr sz="1300" b="1" i="0">
-                <a:solidFill>
-                  <a:srgbClr val="0645AD"/>
-                </a:solidFill>
-                <a:latin typeface="Calibri"/>
-              </a:rPr>
-              <a:t>SUCCESS CRITERIA</a:t>
-            </a:r>
-          </a:p>
-        </p:txBody>
-      </p:sp>
-      <p:sp>
-        <p:nvSpPr>
-          <p:cNvPr id="19" name="TextBox 18"/>
-          <p:cNvSpPr txBox="1"/>
-          <p:nvPr/>
-        </p:nvSpPr>
-        <p:spPr>
-          <a:xfrm>
-            <a:off x="8046720" y="2240280"/>
-            <a:ext cx="3337560" cy="3657600"/>
-          </a:xfrm>
-          <a:prstGeom prst="rect">
-            <a:avLst/>
-          </a:prstGeom>
-          <a:noFill/>
-        </p:spPr>
-        <p:txBody>
-          <a:bodyPr wrap="square" lIns="0" rIns="0" tIns="0" bIns="0">
-            <a:spAutoFit/>
-          </a:bodyPr>
-          <a:lstStyle/>
-          <a:p>
-            <a:pPr marL="274320" indent="-274320">
-              <a:spcAft>
-                <a:spcPts val="810"/>
-              </a:spcAft>
-              <a:buClr>
-                <a:srgbClr val="0645AD"/>
-              </a:buClr>
-              <a:buFont typeface="Arial"/>
-              <a:buChar char="•"/>
-            </a:pPr>
-            <a:r>
-              <a:rPr sz="1800" b="0">
-                <a:solidFill>
-                  <a:srgbClr val="202122"/>
-                </a:solidFill>
-                <a:latin typeface="Calibri"/>
-              </a:rPr>
-              <a:t>All four IAAA stages covered</a:t>
-            </a:r>
-          </a:p>
-          <a:p>
-            <a:pPr marL="274320" indent="-274320">
-              <a:spcAft>
-                <a:spcPts val="810"/>
-              </a:spcAft>
-              <a:buClr>
-                <a:srgbClr val="0645AD"/>
-              </a:buClr>
-              <a:buFont typeface="Arial"/>
-              <a:buChar char="•"/>
-            </a:pPr>
-            <a:r>
-              <a:rPr sz="1800" b="0">
-                <a:solidFill>
-                  <a:srgbClr val="202122"/>
-                </a:solidFill>
-                <a:latin typeface="Calibri"/>
-              </a:rPr>
-              <a:t>Passwords hashed</a:t>
-            </a:r>
-          </a:p>
-          <a:p>
-            <a:pPr marL="274320" indent="-274320">
-              <a:spcAft>
-                <a:spcPts val="810"/>
-              </a:spcAft>
-              <a:buClr>
-                <a:srgbClr val="0645AD"/>
-              </a:buClr>
-              <a:buFont typeface="Arial"/>
-              <a:buChar char="•"/>
-            </a:pPr>
-            <a:r>
-              <a:rPr sz="1800" b="0">
-                <a:solidFill>
-                  <a:srgbClr val="202122"/>
-                </a:solidFill>
-                <a:latin typeface="Calibri"/>
-              </a:rPr>
-              <a:t>Audit logging included</a:t>
+              <a:rPr sz="1300" b="0" i="1">
+                <a:solidFill>
+                  <a:srgbClr val="54595D"/>
+                </a:solidFill>
+                <a:latin typeface="Calibri"/>
+              </a:rPr>
+              <a:t>Answer on mini whiteboards or in your book. Answers are in the speaker notes.</a:t>
             </a:r>
           </a:p>
         </p:txBody>
